--- a/docs/p1.pptx
+++ b/docs/p1.pptx
@@ -12,6 +12,9 @@
     <p:sldId id="260" r:id="rId6"/>
     <p:sldId id="261" r:id="rId7"/>
     <p:sldId id="262" r:id="rId8"/>
+    <p:sldId id="263" r:id="rId9"/>
+    <p:sldId id="264" r:id="rId10"/>
+    <p:sldId id="265" r:id="rId11"/>
   </p:sldIdLst>
   <p:sldSz cx="9144000" cy="5143500" type="screen16x9"/>
   <p:notesSz cx="6858000" cy="9144000"/>
@@ -3147,6 +3150,105 @@
 </p:sld>
 </file>
 
+<file path=ppt/slides/slide10.xml><?xml version="1.0" encoding="utf-8"?>
+<p:sld xmlns:a="http://schemas.openxmlformats.org/drawingml/2006/main" xmlns:r="http://schemas.openxmlformats.org/officeDocument/2006/relationships" xmlns:p="http://schemas.openxmlformats.org/presentationml/2006/main">
+  <p:cSld>
+    <p:spTree>
+      <p:nvGrpSpPr>
+        <p:cNvPr id="1" name=""/>
+        <p:cNvGrpSpPr/>
+        <p:nvPr/>
+      </p:nvGrpSpPr>
+      <p:grpSpPr>
+        <a:xfrm>
+          <a:off x="0" y="0"/>
+          <a:ext cx="0" cy="0"/>
+          <a:chOff x="0" y="0"/>
+          <a:chExt cx="0" cy="0"/>
+        </a:xfrm>
+      </p:grpSpPr>
+      <p:sp>
+        <p:nvSpPr>
+          <p:cNvPr id="2" name="Title 1"/>
+          <p:cNvSpPr>
+            <a:spLocks noGrp="1"/>
+          </p:cNvSpPr>
+          <p:nvPr>
+            <p:ph type="title"/>
+          </p:nvPr>
+        </p:nvSpPr>
+        <p:spPr/>
+        <p:txBody>
+          <a:bodyPr/>
+          <a:lstStyle/>
+          <a:p>
+            <a:pPr lvl="0" indent="0" marL="0">
+              <a:buNone/>
+            </a:pPr>
+            <a:r>
+              <a:rPr/>
+              <a:t>Worflows supported by the strategy</a:t>
+            </a:r>
+          </a:p>
+        </p:txBody>
+      </p:sp>
+      <p:sp>
+        <p:nvSpPr>
+          <p:cNvPr id="3" name="Content Placeholder 2"/>
+          <p:cNvSpPr>
+            <a:spLocks noGrp="1"/>
+          </p:cNvSpPr>
+          <p:nvPr>
+            <p:ph idx="1"/>
+          </p:nvPr>
+        </p:nvSpPr>
+        <p:spPr/>
+        <p:txBody>
+          <a:bodyPr/>
+          <a:lstStyle/>
+          <a:p>
+            <a:pPr lvl="0" indent="0" marL="0">
+              <a:spcBef>
+                <a:spcPts val="3000"/>
+              </a:spcBef>
+              <a:buNone/>
+            </a:pPr>
+            <a:r>
+              <a:rPr b="1"/>
+              <a:t>Delivering changes via a release</a:t>
+            </a:r>
+          </a:p>
+          <a:p>
+            <a:pPr lvl="0" indent="0" marL="0">
+              <a:spcBef>
+                <a:spcPts val="3000"/>
+              </a:spcBef>
+              <a:buNone/>
+            </a:pPr>
+            <a:r>
+              <a:rPr b="1"/>
+              <a:t>Hot-fix for production</a:t>
+            </a:r>
+          </a:p>
+          <a:p>
+            <a:pPr lvl="0" indent="0" marL="0">
+              <a:spcBef>
+                <a:spcPts val="3000"/>
+              </a:spcBef>
+              <a:buNone/>
+            </a:pPr>
+            <a:r>
+              <a:rPr b="1"/>
+              <a:t>Using an Epic branch</a:t>
+            </a:r>
+          </a:p>
+        </p:txBody>
+      </p:sp>
+    </p:spTree>
+  </p:cSld>
+</p:sld>
+</file>
+
 <file path=ppt/slides/slide2.xml><?xml version="1.0" encoding="utf-8"?>
 <p:sld xmlns:a="http://schemas.openxmlformats.org/drawingml/2006/main" xmlns:r="http://schemas.openxmlformats.org/officeDocument/2006/relationships" xmlns:p="http://schemas.openxmlformats.org/presentationml/2006/main">
   <p:cSld>
@@ -3463,7 +3565,7 @@
             </a:pPr>
             <a:r>
               <a:rPr b="1"/>
-              <a:t>Starting Simple</a:t>
+              <a:t>Starting Simple 1</a:t>
             </a:r>
           </a:p>
         </p:txBody>
@@ -3583,6 +3685,15 @@
           <a:lstStyle/>
           <a:p>
             <a:pPr lvl="0" indent="0" marL="0">
+              <a:buNone/>
+            </a:pPr>
+            <a:r>
+              <a:rPr/>
+              <a:t>Multiple commits (changes to multiple files) made to a branch by developers.</a:t>
+            </a:r>
+          </a:p>
+          <a:p>
+            <a:pPr lvl="0" indent="0" marL="0">
               <a:spcBef>
                 <a:spcPts val="3000"/>
               </a:spcBef>
@@ -3590,7 +3701,7 @@
             </a:pPr>
             <a:r>
               <a:rPr b="1"/>
-              <a:t>Starting Simple</a:t>
+              <a:t>Starting Simple 2</a:t>
             </a:r>
           </a:p>
         </p:txBody>
@@ -3637,16 +3748,7 @@
             </a:pPr>
             <a:r>
               <a:rPr/>
-              <a:t>Every change starts in a branch</a:t>
-            </a:r>
-          </a:p>
-          <a:p>
-            <a:pPr lvl="0" indent="0" marL="0">
-              <a:buNone/>
-            </a:pPr>
-            <a:r>
-              <a:rPr/>
-              <a:t>These branches merge to </a:t>
+              <a:t>Every change starts in a branch   These branches merge to </a:t>
             </a:r>
             <a:r>
               <a:rPr>
@@ -3675,6 +3777,594 @@
           <a:xfrm>
             <a:off x="4648200" y="2387600"/>
             <a:ext cx="4038600" cy="990600"/>
+          </a:xfrm>
+          <a:prstGeom prst="rect">
+            <a:avLst/>
+          </a:prstGeom>
+          <a:noFill/>
+          <a:ln w="9525">
+            <a:noFill/>
+            <a:headEnd/>
+            <a:tailEnd/>
+          </a:ln>
+        </p:spPr>
+      </p:pic>
+    </p:spTree>
+  </p:cSld>
+</p:sld>
+</file>
+
+<file path=ppt/slides/slide8.xml><?xml version="1.0" encoding="utf-8"?>
+<p:sld xmlns:a="http://schemas.openxmlformats.org/drawingml/2006/main" xmlns:r="http://schemas.openxmlformats.org/officeDocument/2006/relationships" xmlns:p="http://schemas.openxmlformats.org/presentationml/2006/main">
+  <p:cSld>
+    <p:spTree>
+      <p:nvGrpSpPr>
+        <p:cNvPr id="1" name=""/>
+        <p:cNvGrpSpPr/>
+        <p:nvPr/>
+      </p:nvGrpSpPr>
+      <p:grpSpPr>
+        <a:xfrm>
+          <a:off x="0" y="0"/>
+          <a:ext cx="0" cy="0"/>
+          <a:chOff x="0" y="0"/>
+          <a:chExt cx="0" cy="0"/>
+        </a:xfrm>
+      </p:grpSpPr>
+      <p:sp>
+        <p:nvSpPr>
+          <p:cNvPr id="4" name="Text Placeholder 3"/>
+          <p:cNvSpPr>
+            <a:spLocks noGrp="1"/>
+          </p:cNvSpPr>
+          <p:nvPr>
+            <p:ph idx="2" sz="half" type="body"/>
+          </p:nvPr>
+        </p:nvSpPr>
+        <p:spPr/>
+        <p:txBody>
+          <a:bodyPr/>
+          <a:lstStyle/>
+          <a:p>
+            <a:pPr lvl="0" indent="0" marL="0">
+              <a:spcBef>
+                <a:spcPts val="3000"/>
+              </a:spcBef>
+              <a:buNone/>
+            </a:pPr>
+            <a:r>
+              <a:rPr b="1"/>
+              <a:t>Merging into </a:t>
+            </a:r>
+            <a:r>
+              <a:rPr b="1">
+                <a:latin typeface="Courier"/>
+              </a:rPr>
+              <a:t>main</a:t>
+            </a:r>
+          </a:p>
+          <a:p>
+            <a:pPr lvl="0" indent="0" marL="0">
+              <a:buNone/>
+            </a:pPr>
+            <a:r>
+              <a:rPr/>
+              <a:t>Feature Team/Developers will:</a:t>
+            </a:r>
+          </a:p>
+          <a:p>
+            <a:pPr lvl="0"/>
+            <a:r>
+              <a:rPr/>
+              <a:t>Build</a:t>
+            </a:r>
+          </a:p>
+          <a:p>
+            <a:pPr lvl="1"/>
+            <a:r>
+              <a:rPr/>
+              <a:t>Builds may be done to any commit on any branch</a:t>
+            </a:r>
+          </a:p>
+          <a:p>
+            <a:pPr lvl="1"/>
+            <a:r>
+              <a:rPr/>
+              <a:t>Feature branch </a:t>
+            </a:r>
+            <a:r>
+              <a:rPr b="1"/>
+              <a:t>must</a:t>
+            </a:r>
+            <a:r>
+              <a:rPr/>
+              <a:t> build cleanly for a Pull Request</a:t>
+            </a:r>
+          </a:p>
+          <a:p>
+            <a:pPr lvl="0"/>
+            <a:r>
+              <a:rPr/>
+              <a:t>Test their built feature</a:t>
+            </a:r>
+          </a:p>
+          <a:p>
+            <a:pPr lvl="1"/>
+            <a:r>
+              <a:rPr/>
+              <a:t>To prove quality so that…</a:t>
+            </a:r>
+          </a:p>
+          <a:p>
+            <a:pPr lvl="0" indent="0" marL="0">
+              <a:buNone/>
+            </a:pPr>
+            <a:r>
+              <a:rPr/>
+              <a:t>Team Leaders/Release Controllers will:</a:t>
+            </a:r>
+          </a:p>
+          <a:p>
+            <a:pPr lvl="0"/>
+            <a:r>
+              <a:rPr/>
+              <a:t>Review</a:t>
+            </a:r>
+          </a:p>
+          <a:p>
+            <a:pPr lvl="1"/>
+            <a:r>
+              <a:rPr/>
+              <a:t>Code and Test results</a:t>
+            </a:r>
+          </a:p>
+          <a:p>
+            <a:pPr lvl="0"/>
+            <a:r>
+              <a:rPr/>
+              <a:t>Approve</a:t>
+            </a:r>
+          </a:p>
+          <a:p>
+            <a:pPr lvl="1"/>
+            <a:r>
+              <a:rPr/>
+              <a:t>Safeguard the quality of </a:t>
+            </a:r>
+            <a:r>
+              <a:rPr>
+                <a:latin typeface="Courier"/>
+              </a:rPr>
+              <a:t>main</a:t>
+            </a:r>
+          </a:p>
+          <a:p>
+            <a:pPr lvl="0" indent="0" marL="0">
+              <a:spcBef>
+                <a:spcPts val="3000"/>
+              </a:spcBef>
+              <a:buNone/>
+            </a:pPr>
+            <a:r>
+              <a:rPr b="1"/>
+              <a:t>Before you ask… no, no </a:t>
+            </a:r>
+            <a:r>
+              <a:rPr b="1" i="1"/>
+              <a:t>Production</a:t>
+            </a:r>
+            <a:r>
+              <a:rPr b="1"/>
+              <a:t> branch</a:t>
+            </a:r>
+          </a:p>
+          <a:p>
+            <a:pPr lvl="0" indent="0" marL="0">
+              <a:buNone/>
+            </a:pPr>
+            <a:r>
+              <a:rPr/>
+              <a:t>We have no branches named </a:t>
+            </a:r>
+            <a:r>
+              <a:rPr>
+                <a:latin typeface="Courier"/>
+              </a:rPr>
+              <a:t>prod</a:t>
+            </a:r>
+            <a:r>
+              <a:rPr/>
+              <a:t> (or </a:t>
+            </a:r>
+            <a:r>
+              <a:rPr>
+                <a:latin typeface="Courier"/>
+              </a:rPr>
+              <a:t>test</a:t>
+            </a:r>
+            <a:r>
+              <a:rPr/>
+              <a:t> or </a:t>
+            </a:r>
+            <a:r>
+              <a:rPr>
+                <a:latin typeface="Courier"/>
+              </a:rPr>
+              <a:t>QA</a:t>
+            </a:r>
+            <a:r>
+              <a:rPr/>
+              <a:t>)</a:t>
+            </a:r>
+          </a:p>
+          <a:p>
+            <a:pPr lvl="0"/>
+            <a:r>
+              <a:rPr/>
+              <a:t>Those are </a:t>
+            </a:r>
+            <a:r>
+              <a:rPr i="1"/>
+              <a:t>environments</a:t>
+            </a:r>
+            <a:r>
+              <a:rPr/>
+              <a:t> to which builds can be deployed</a:t>
+            </a:r>
+          </a:p>
+          <a:p>
+            <a:pPr lvl="0"/>
+            <a:r>
+              <a:rPr/>
+              <a:t>Such extra branches:</a:t>
+            </a:r>
+          </a:p>
+          <a:p>
+            <a:pPr lvl="1"/>
+            <a:r>
+              <a:rPr/>
+              <a:t>are unnecessary</a:t>
+            </a:r>
+          </a:p>
+          <a:p>
+            <a:pPr lvl="1"/>
+            <a:r>
+              <a:rPr/>
+              <a:t>cause ambiguity</a:t>
+            </a:r>
+          </a:p>
+          <a:p>
+            <a:pPr lvl="1"/>
+            <a:r>
+              <a:rPr/>
+              <a:t>impose merging and building overheads</a:t>
+            </a:r>
+          </a:p>
+          <a:p>
+            <a:pPr lvl="0" indent="0" marL="0">
+              <a:spcBef>
+                <a:spcPts val="3000"/>
+              </a:spcBef>
+              <a:buNone/>
+            </a:pPr>
+            <a:r>
+              <a:rPr b="1"/>
+              <a:t>Release branches</a:t>
+            </a:r>
+          </a:p>
+          <a:p>
+            <a:pPr lvl="0" indent="0" marL="0">
+              <a:buNone/>
+            </a:pPr>
+            <a:r>
+              <a:rPr/>
+              <a:t>Any point in the history of </a:t>
+            </a:r>
+            <a:r>
+              <a:rPr>
+                <a:latin typeface="Courier"/>
+              </a:rPr>
+              <a:t>main</a:t>
+            </a:r>
+            <a:r>
+              <a:rPr/>
+              <a:t> can be declared a </a:t>
+            </a:r>
+            <a:r>
+              <a:rPr i="1"/>
+              <a:t>release candidate</a:t>
+            </a:r>
+            <a:r>
+              <a:rPr/>
+              <a:t>.</a:t>
+            </a:r>
+          </a:p>
+          <a:p>
+            <a:pPr lvl="0"/>
+            <a:r>
+              <a:rPr/>
+              <a:t>Build a </a:t>
+            </a:r>
+            <a:r>
+              <a:rPr i="1"/>
+              <a:t>release candidate</a:t>
+            </a:r>
+            <a:r>
+              <a:rPr/>
+              <a:t> package</a:t>
+            </a:r>
+          </a:p>
+          <a:p>
+            <a:pPr lvl="0"/>
+            <a:r>
+              <a:rPr/>
+              <a:t>Test it</a:t>
+            </a:r>
+          </a:p>
+          <a:p>
+            <a:pPr lvl="0"/>
+            <a:r>
+              <a:rPr/>
+              <a:t>Deploy it</a:t>
+            </a:r>
+          </a:p>
+          <a:p>
+            <a:pPr lvl="0" indent="0" marL="0">
+              <a:buNone/>
+            </a:pPr>
+            <a:r>
+              <a:rPr/>
+              <a:t>Tag the commit (point in </a:t>
+            </a:r>
+            <a:r>
+              <a:rPr>
+                <a:latin typeface="Courier"/>
+              </a:rPr>
+              <a:t>main</a:t>
+            </a:r>
+            <a:r>
+              <a:rPr/>
+              <a:t>’s history) with a release name.</a:t>
+            </a:r>
+          </a:p>
+          <a:p>
+            <a:pPr lvl="0" indent="0" marL="0">
+              <a:buNone/>
+            </a:pPr>
+            <a:r>
+              <a:rPr/>
+              <a:t>A </a:t>
+            </a:r>
+            <a:r>
+              <a:rPr i="1"/>
+              <a:t>release maintenance</a:t>
+            </a:r>
+            <a:r>
+              <a:rPr/>
+              <a:t> branch will be used if </a:t>
+            </a:r>
+            <a:r>
+              <a:rPr i="1"/>
+              <a:t>hot-fixes</a:t>
+            </a:r>
+            <a:r>
+              <a:rPr/>
+              <a:t> must be developed and delivered.</a:t>
+            </a:r>
+          </a:p>
+          <a:p>
+            <a:pPr lvl="0" indent="0" marL="0">
+              <a:spcBef>
+                <a:spcPts val="3000"/>
+              </a:spcBef>
+              <a:buNone/>
+            </a:pPr>
+            <a:r>
+              <a:rPr b="1"/>
+              <a:t>Release branches</a:t>
+            </a:r>
+          </a:p>
+        </p:txBody>
+      </p:sp>
+      <p:pic>
+        <p:nvPicPr>
+          <p:cNvPr descr="static/img/branching-model/image2.png" id="0" name="Picture 1"/>
+          <p:cNvPicPr>
+            <a:picLocks noGrp="1" noChangeAspect="1"/>
+          </p:cNvPicPr>
+          <p:nvPr/>
+        </p:nvPicPr>
+        <p:blipFill>
+          <a:blip r:embed="rId2"/>
+          <a:stretch>
+            <a:fillRect/>
+          </a:stretch>
+        </p:blipFill>
+        <p:spPr bwMode="auto">
+          <a:xfrm>
+            <a:off x="3568700" y="406400"/>
+            <a:ext cx="5105400" cy="3987800"/>
+          </a:xfrm>
+          <a:prstGeom prst="rect">
+            <a:avLst/>
+          </a:prstGeom>
+          <a:noFill/>
+          <a:ln w="9525">
+            <a:noFill/>
+            <a:headEnd/>
+            <a:tailEnd/>
+          </a:ln>
+        </p:spPr>
+      </p:pic>
+    </p:spTree>
+  </p:cSld>
+</p:sld>
+</file>
+
+<file path=ppt/slides/slide9.xml><?xml version="1.0" encoding="utf-8"?>
+<p:sld xmlns:a="http://schemas.openxmlformats.org/drawingml/2006/main" xmlns:r="http://schemas.openxmlformats.org/officeDocument/2006/relationships" xmlns:p="http://schemas.openxmlformats.org/presentationml/2006/main">
+  <p:cSld>
+    <p:spTree>
+      <p:nvGrpSpPr>
+        <p:cNvPr id="1" name=""/>
+        <p:cNvGrpSpPr/>
+        <p:nvPr/>
+      </p:nvGrpSpPr>
+      <p:grpSpPr>
+        <a:xfrm>
+          <a:off x="0" y="0"/>
+          <a:ext cx="0" cy="0"/>
+          <a:chOff x="0" y="0"/>
+          <a:chExt cx="0" cy="0"/>
+        </a:xfrm>
+      </p:grpSpPr>
+      <p:sp>
+        <p:nvSpPr>
+          <p:cNvPr id="4" name="Text Placeholder 3"/>
+          <p:cNvSpPr>
+            <a:spLocks noGrp="1"/>
+          </p:cNvSpPr>
+          <p:nvPr>
+            <p:ph idx="2" sz="half" type="body"/>
+          </p:nvPr>
+        </p:nvSpPr>
+        <p:spPr/>
+        <p:txBody>
+          <a:bodyPr/>
+          <a:lstStyle/>
+          <a:p>
+            <a:pPr lvl="0" indent="0" marL="0">
+              <a:spcBef>
+                <a:spcPts val="3000"/>
+              </a:spcBef>
+              <a:buNone/>
+            </a:pPr>
+            <a:r>
+              <a:rPr b="1"/>
+              <a:t>Scaling up</a:t>
+            </a:r>
+          </a:p>
+          <a:p>
+            <a:pPr lvl="0" indent="0" marL="0">
+              <a:buNone/>
+            </a:pPr>
+            <a:r>
+              <a:rPr/>
+              <a:t>Concurrent </a:t>
+            </a:r>
+            <a:r>
+              <a:rPr i="1"/>
+              <a:t>feature</a:t>
+            </a:r>
+            <a:r>
+              <a:rPr/>
+              <a:t> branches scale very well, but assume short cycle times.</a:t>
+            </a:r>
+          </a:p>
+          <a:p>
+            <a:pPr lvl="0"/>
+            <a:r>
+              <a:rPr/>
+              <a:t>Ideally live within a release delivery cycle</a:t>
+            </a:r>
+          </a:p>
+          <a:p>
+            <a:pPr lvl="0"/>
+            <a:r>
+              <a:rPr/>
+              <a:t>But no big deal if they don’t</a:t>
+            </a:r>
+          </a:p>
+          <a:p>
+            <a:pPr lvl="0" indent="0" marL="0">
+              <a:buNone/>
+            </a:pPr>
+            <a:r>
+              <a:rPr i="1"/>
+              <a:t>Epic</a:t>
+            </a:r>
+            <a:r>
+              <a:rPr/>
+              <a:t> branches can collect multiple features</a:t>
+            </a:r>
+          </a:p>
+          <a:p>
+            <a:pPr lvl="0"/>
+            <a:r>
+              <a:rPr/>
+              <a:t>Before going to </a:t>
+            </a:r>
+            <a:r>
+              <a:rPr>
+                <a:latin typeface="Courier"/>
+              </a:rPr>
+              <a:t>main</a:t>
+            </a:r>
+          </a:p>
+          <a:p>
+            <a:pPr lvl="0"/>
+            <a:r>
+              <a:rPr/>
+              <a:t>When the delivery is planned beyond the next release</a:t>
+            </a:r>
+          </a:p>
+          <a:p>
+            <a:pPr lvl="0" indent="0" marL="0">
+              <a:buNone/>
+            </a:pPr>
+            <a:r>
+              <a:rPr/>
+              <a:t>(</a:t>
+            </a:r>
+            <a:r>
+              <a:rPr i="1"/>
+              <a:t>Epic</a:t>
+            </a:r>
+            <a:r>
+              <a:rPr/>
+              <a:t> branches are a form of </a:t>
+            </a:r>
+            <a:r>
+              <a:rPr i="1"/>
+              <a:t>integration</a:t>
+            </a:r>
+            <a:r>
+              <a:rPr/>
+              <a:t> branch.)</a:t>
+            </a:r>
+          </a:p>
+          <a:p>
+            <a:pPr lvl="0" indent="0" marL="0">
+              <a:spcBef>
+                <a:spcPts val="3000"/>
+              </a:spcBef>
+              <a:buNone/>
+            </a:pPr>
+            <a:r>
+              <a:rPr b="1"/>
+              <a:t>Integration branches</a:t>
+            </a:r>
+          </a:p>
+        </p:txBody>
+      </p:sp>
+      <p:pic>
+        <p:nvPicPr>
+          <p:cNvPr descr="static/img/branching-model/image3.png" id="0" name="Picture 1"/>
+          <p:cNvPicPr>
+            <a:picLocks noGrp="1" noChangeAspect="1"/>
+          </p:cNvPicPr>
+          <p:nvPr/>
+        </p:nvPicPr>
+        <p:blipFill>
+          <a:blip r:embed="rId2"/>
+          <a:stretch>
+            <a:fillRect/>
+          </a:stretch>
+        </p:blipFill>
+        <p:spPr bwMode="auto">
+          <a:xfrm>
+            <a:off x="3568700" y="330200"/>
+            <a:ext cx="5105400" cy="4140200"/>
           </a:xfrm>
           <a:prstGeom prst="rect">
             <a:avLst/>

--- a/docs/p1.pptx
+++ b/docs/p1.pptx
@@ -3892,7 +3892,7 @@
             <a:pPr lvl="1"/>
             <a:r>
               <a:rPr/>
-              <a:t>To prove quality so that…</a:t>
+              <a:t>To prove quality</a:t>
             </a:r>
           </a:p>
           <a:p>
@@ -3901,7 +3901,7 @@
             </a:pPr>
             <a:r>
               <a:rPr/>
-              <a:t>Team Leaders/Release Controllers will:</a:t>
+              <a:t>Create a Pull Request (PR) to signal to Team Leaders/Release Controllers to:</a:t>
             </a:r>
           </a:p>
           <a:p>

--- a/docs/p1.pptx
+++ b/docs/p1.pptx
@@ -13,8 +13,6 @@
     <p:sldId id="261" r:id="rId7"/>
     <p:sldId id="262" r:id="rId8"/>
     <p:sldId id="263" r:id="rId9"/>
-    <p:sldId id="264" r:id="rId10"/>
-    <p:sldId id="265" r:id="rId11"/>
   </p:sldIdLst>
   <p:sldSz cx="9144000" cy="5143500" type="screen16x9"/>
   <p:notesSz cx="6858000" cy="9144000"/>
@@ -3150,105 +3148,6 @@
 </p:sld>
 </file>
 
-<file path=ppt/slides/slide10.xml><?xml version="1.0" encoding="utf-8"?>
-<p:sld xmlns:a="http://schemas.openxmlformats.org/drawingml/2006/main" xmlns:r="http://schemas.openxmlformats.org/officeDocument/2006/relationships" xmlns:p="http://schemas.openxmlformats.org/presentationml/2006/main">
-  <p:cSld>
-    <p:spTree>
-      <p:nvGrpSpPr>
-        <p:cNvPr id="1" name=""/>
-        <p:cNvGrpSpPr/>
-        <p:nvPr/>
-      </p:nvGrpSpPr>
-      <p:grpSpPr>
-        <a:xfrm>
-          <a:off x="0" y="0"/>
-          <a:ext cx="0" cy="0"/>
-          <a:chOff x="0" y="0"/>
-          <a:chExt cx="0" cy="0"/>
-        </a:xfrm>
-      </p:grpSpPr>
-      <p:sp>
-        <p:nvSpPr>
-          <p:cNvPr id="2" name="Title 1"/>
-          <p:cNvSpPr>
-            <a:spLocks noGrp="1"/>
-          </p:cNvSpPr>
-          <p:nvPr>
-            <p:ph type="title"/>
-          </p:nvPr>
-        </p:nvSpPr>
-        <p:spPr/>
-        <p:txBody>
-          <a:bodyPr/>
-          <a:lstStyle/>
-          <a:p>
-            <a:pPr lvl="0" indent="0" marL="0">
-              <a:buNone/>
-            </a:pPr>
-            <a:r>
-              <a:rPr/>
-              <a:t>Worflows supported by the strategy</a:t>
-            </a:r>
-          </a:p>
-        </p:txBody>
-      </p:sp>
-      <p:sp>
-        <p:nvSpPr>
-          <p:cNvPr id="3" name="Content Placeholder 2"/>
-          <p:cNvSpPr>
-            <a:spLocks noGrp="1"/>
-          </p:cNvSpPr>
-          <p:nvPr>
-            <p:ph idx="1"/>
-          </p:nvPr>
-        </p:nvSpPr>
-        <p:spPr/>
-        <p:txBody>
-          <a:bodyPr/>
-          <a:lstStyle/>
-          <a:p>
-            <a:pPr lvl="0" indent="0" marL="0">
-              <a:spcBef>
-                <a:spcPts val="3000"/>
-              </a:spcBef>
-              <a:buNone/>
-            </a:pPr>
-            <a:r>
-              <a:rPr b="1"/>
-              <a:t>Delivering changes via a release</a:t>
-            </a:r>
-          </a:p>
-          <a:p>
-            <a:pPr lvl="0" indent="0" marL="0">
-              <a:spcBef>
-                <a:spcPts val="3000"/>
-              </a:spcBef>
-              <a:buNone/>
-            </a:pPr>
-            <a:r>
-              <a:rPr b="1"/>
-              <a:t>Hot-fix for production</a:t>
-            </a:r>
-          </a:p>
-          <a:p>
-            <a:pPr lvl="0" indent="0" marL="0">
-              <a:spcBef>
-                <a:spcPts val="3000"/>
-              </a:spcBef>
-              <a:buNone/>
-            </a:pPr>
-            <a:r>
-              <a:rPr b="1"/>
-              <a:t>Using an Epic branch</a:t>
-            </a:r>
-          </a:p>
-        </p:txBody>
-      </p:sp>
-    </p:spTree>
-  </p:cSld>
-</p:sld>
-</file>
-
 <file path=ppt/slides/slide2.xml><?xml version="1.0" encoding="utf-8"?>
 <p:sld xmlns:a="http://schemas.openxmlformats.org/drawingml/2006/main" xmlns:r="http://schemas.openxmlformats.org/officeDocument/2006/relationships" xmlns:p="http://schemas.openxmlformats.org/presentationml/2006/main">
   <p:cSld>
@@ -3429,6 +3328,104 @@
             </a:pPr>
             <a:r>
               <a:rPr b="1"/>
+              <a:t>No baggage</a:t>
+            </a:r>
+          </a:p>
+          <a:p>
+            <a:pPr lvl="0" indent="0" marL="0">
+              <a:buNone/>
+            </a:pPr>
+            <a:r>
+              <a:rPr/>
+              <a:t>Well… </a:t>
+            </a:r>
+            <a:r>
+              <a:rPr i="1"/>
+              <a:t>“travel light”</a:t>
+            </a:r>
+            <a:r>
+              <a:rPr/>
+              <a:t> perhaps!</a:t>
+            </a:r>
+          </a:p>
+          <a:p>
+            <a:pPr lvl="0"/>
+            <a:r>
+              <a:rPr/>
+              <a:t>Are we </a:t>
+            </a:r>
+            <a:r>
+              <a:rPr i="1"/>
+              <a:t>prescriptive</a:t>
+            </a:r>
+            <a:r>
+              <a:rPr/>
+              <a:t> or just </a:t>
+            </a:r>
+            <a:r>
+              <a:rPr i="1"/>
+              <a:t>opinionated</a:t>
+            </a:r>
+            <a:r>
+              <a:rPr/>
+              <a:t>?</a:t>
+            </a:r>
+          </a:p>
+          <a:p>
+            <a:pPr lvl="0"/>
+            <a:r>
+              <a:rPr/>
+              <a:t>We start with a recommendation</a:t>
+            </a:r>
+          </a:p>
+          <a:p>
+            <a:pPr lvl="1"/>
+            <a:r>
+              <a:rPr/>
+              <a:t>Confidently</a:t>
+            </a:r>
+          </a:p>
+          <a:p>
+            <a:pPr lvl="0"/>
+            <a:r>
+              <a:rPr/>
+              <a:t>We question everything</a:t>
+            </a:r>
+          </a:p>
+          <a:p>
+            <a:pPr lvl="1"/>
+            <a:r>
+              <a:rPr b="1"/>
+              <a:t>YAGNI</a:t>
+            </a:r>
+            <a:r>
+              <a:rPr/>
+              <a:t> - “you aren’t gonna need it”</a:t>
+            </a:r>
+          </a:p>
+          <a:p>
+            <a:pPr lvl="0"/>
+            <a:r>
+              <a:rPr/>
+              <a:t>We strive for simplicity</a:t>
+            </a:r>
+          </a:p>
+          <a:p>
+            <a:pPr lvl="1"/>
+            <a:r>
+              <a:rPr/>
+              <a:t>For each user’s experience</a:t>
+            </a:r>
+          </a:p>
+          <a:p>
+            <a:pPr lvl="0" indent="0" marL="0">
+              <a:spcBef>
+                <a:spcPts val="3000"/>
+              </a:spcBef>
+              <a:buNone/>
+            </a:pPr>
+            <a:r>
+              <a:rPr b="1"/>
               <a:t>Scaling</a:t>
             </a:r>
           </a:p>
@@ -3527,7 +3524,12 @@
             <p:ph type="title"/>
           </p:nvPr>
         </p:nvSpPr>
-        <p:spPr/>
+        <p:spPr>
+          <a:xfrm>
+            <a:off x="457201" y="204787"/>
+            <a:ext cx="3008313" cy="871538"/>
+          </a:xfrm>
+        </p:spPr>
         <p:txBody>
           <a:bodyPr/>
           <a:lstStyle/>
@@ -3544,12 +3546,12 @@
       </p:sp>
       <p:sp>
         <p:nvSpPr>
-          <p:cNvPr id="3" name="Content Placeholder 2"/>
-          <p:cNvSpPr>
-            <a:spLocks noGrp="1"/>
-          </p:cNvSpPr>
-          <p:nvPr>
-            <p:ph idx="1"/>
+          <p:cNvPr id="4" name="Text Placeholder 3"/>
+          <p:cNvSpPr>
+            <a:spLocks noGrp="1"/>
+          </p:cNvSpPr>
+          <p:nvPr>
+            <p:ph idx="2" sz="half" type="body"/>
           </p:nvPr>
         </p:nvSpPr>
         <p:spPr/>
@@ -3565,11 +3567,50 @@
             </a:pPr>
             <a:r>
               <a:rPr b="1"/>
-              <a:t>Starting Simple 1</a:t>
-            </a:r>
-          </a:p>
-        </p:txBody>
-      </p:sp>
+              <a:t>Starting Simple</a:t>
+            </a:r>
+          </a:p>
+          <a:p>
+            <a:pPr lvl="0" indent="0" marL="0">
+              <a:buNone/>
+            </a:pPr>
+            <a:r>
+              <a:rPr/>
+              <a:t>Every change starts in a branch.</a:t>
+            </a:r>
+          </a:p>
+        </p:txBody>
+      </p:sp>
+      <p:pic>
+        <p:nvPicPr>
+          <p:cNvPr descr="static/img/branching-model/image5.png" id="0" name="Picture 1"/>
+          <p:cNvPicPr>
+            <a:picLocks noGrp="1" noChangeAspect="1"/>
+          </p:cNvPicPr>
+          <p:nvPr/>
+        </p:nvPicPr>
+        <p:blipFill>
+          <a:blip r:embed="rId2"/>
+          <a:stretch>
+            <a:fillRect/>
+          </a:stretch>
+        </p:blipFill>
+        <p:spPr bwMode="auto">
+          <a:xfrm>
+            <a:off x="3568700" y="1765300"/>
+            <a:ext cx="5105400" cy="1257300"/>
+          </a:xfrm>
+          <a:prstGeom prst="rect">
+            <a:avLst/>
+          </a:prstGeom>
+          <a:noFill/>
+          <a:ln w="9525">
+            <a:noFill/>
+            <a:headEnd/>
+            <a:tailEnd/>
+          </a:ln>
+        </p:spPr>
+      </p:pic>
     </p:spTree>
   </p:cSld>
 </p:sld>
@@ -3594,12 +3635,12 @@
       </p:grpSpPr>
       <p:sp>
         <p:nvSpPr>
-          <p:cNvPr id="3" name="Content Placeholder 2"/>
-          <p:cNvSpPr>
-            <a:spLocks noGrp="1"/>
-          </p:cNvSpPr>
-          <p:nvPr>
-            <p:ph idx="1" sz="half"/>
+          <p:cNvPr id="4" name="Text Placeholder 3"/>
+          <p:cNvSpPr>
+            <a:spLocks noGrp="1"/>
+          </p:cNvSpPr>
+          <p:nvPr>
+            <p:ph idx="2" sz="half" type="body"/>
           </p:nvPr>
         </p:nvSpPr>
         <p:spPr/>
@@ -3607,19 +3648,45 @@
           <a:bodyPr/>
           <a:lstStyle/>
           <a:p>
+            <a:pPr lvl="0"/>
+            <a:r>
+              <a:rPr/>
+              <a:t>Developers work in the branch to make changes, perform user builds and unit tests.</a:t>
+            </a:r>
+          </a:p>
+          <a:p>
+            <a:pPr lvl="0"/>
+            <a:r>
+              <a:rPr/>
+              <a:t>A branch holds multiple commits (changes to multiple files).</a:t>
+            </a:r>
+          </a:p>
+          <a:p>
             <a:pPr lvl="0" indent="0" marL="0">
+              <a:spcBef>
+                <a:spcPts val="3000"/>
+              </a:spcBef>
               <a:buNone/>
             </a:pPr>
             <a:r>
-              <a:rPr/>
-              <a:t>Every change starts in a branch</a:t>
+              <a:rPr b="1"/>
+              <a:t>Starting Simple</a:t>
+            </a:r>
+          </a:p>
+          <a:p>
+            <a:pPr lvl="0" indent="0" marL="0">
+              <a:buNone/>
+            </a:pPr>
+            <a:r>
+              <a:rPr/>
+              <a:t>Every change starts in a branch.</a:t>
             </a:r>
           </a:p>
         </p:txBody>
       </p:sp>
       <p:pic>
         <p:nvPicPr>
-          <p:cNvPr descr="static/img/branching-model/image5.png" id="0" name="Picture 1"/>
+          <p:cNvPr descr="static/img/branching-model/image6.png" id="0" name="Picture 1"/>
           <p:cNvPicPr>
             <a:picLocks noGrp="1" noChangeAspect="1"/>
           </p:cNvPicPr>
@@ -3633,8 +3700,8 @@
         </p:blipFill>
         <p:spPr bwMode="auto">
           <a:xfrm>
-            <a:off x="4648200" y="2387600"/>
-            <a:ext cx="4038600" cy="990600"/>
+            <a:off x="3568700" y="1854200"/>
+            <a:ext cx="5105400" cy="1066800"/>
           </a:xfrm>
           <a:prstGeom prst="rect">
             <a:avLst/>
@@ -3671,12 +3738,12 @@
       </p:grpSpPr>
       <p:sp>
         <p:nvSpPr>
-          <p:cNvPr id="3" name="Content Placeholder 2"/>
-          <p:cNvSpPr>
-            <a:spLocks noGrp="1"/>
-          </p:cNvSpPr>
-          <p:nvPr>
-            <p:ph idx="1"/>
+          <p:cNvPr id="4" name="Text Placeholder 3"/>
+          <p:cNvSpPr>
+            <a:spLocks noGrp="1"/>
+          </p:cNvSpPr>
+          <p:nvPr>
+            <p:ph idx="2" sz="half" type="body"/>
           </p:nvPr>
         </p:nvSpPr>
         <p:spPr/>
@@ -3689,7 +3756,45 @@
             </a:pPr>
             <a:r>
               <a:rPr/>
-              <a:t>Multiple commits (changes to multiple files) made to a branch by developers.</a:t>
+              <a:t>These branches are</a:t>
+            </a:r>
+          </a:p>
+          <a:p>
+            <a:pPr lvl="0"/>
+            <a:r>
+              <a:rPr/>
+              <a:t>built,</a:t>
+            </a:r>
+          </a:p>
+          <a:p>
+            <a:pPr lvl="0"/>
+            <a:r>
+              <a:rPr/>
+              <a:t>tested,</a:t>
+            </a:r>
+          </a:p>
+          <a:p>
+            <a:pPr lvl="0"/>
+            <a:r>
+              <a:rPr/>
+              <a:t>reviewed and</a:t>
+            </a:r>
+          </a:p>
+          <a:p>
+            <a:pPr lvl="0"/>
+            <a:r>
+              <a:rPr/>
+              <a:t>approved before merging to </a:t>
+            </a:r>
+            <a:r>
+              <a:rPr>
+                <a:latin typeface="Courier"/>
+              </a:rPr>
+              <a:t>main</a:t>
+            </a:r>
+            <a:r>
+              <a:rPr/>
+              <a:t>.</a:t>
             </a:r>
           </a:p>
           <a:p>
@@ -3701,139 +3806,6 @@
             </a:pPr>
             <a:r>
               <a:rPr b="1"/>
-              <a:t>Starting Simple 2</a:t>
-            </a:r>
-          </a:p>
-        </p:txBody>
-      </p:sp>
-    </p:spTree>
-  </p:cSld>
-</p:sld>
-</file>
-
-<file path=ppt/slides/slide7.xml><?xml version="1.0" encoding="utf-8"?>
-<p:sld xmlns:a="http://schemas.openxmlformats.org/drawingml/2006/main" xmlns:r="http://schemas.openxmlformats.org/officeDocument/2006/relationships" xmlns:p="http://schemas.openxmlformats.org/presentationml/2006/main">
-  <p:cSld>
-    <p:spTree>
-      <p:nvGrpSpPr>
-        <p:cNvPr id="1" name=""/>
-        <p:cNvGrpSpPr/>
-        <p:nvPr/>
-      </p:nvGrpSpPr>
-      <p:grpSpPr>
-        <a:xfrm>
-          <a:off x="0" y="0"/>
-          <a:ext cx="0" cy="0"/>
-          <a:chOff x="0" y="0"/>
-          <a:chExt cx="0" cy="0"/>
-        </a:xfrm>
-      </p:grpSpPr>
-      <p:sp>
-        <p:nvSpPr>
-          <p:cNvPr id="3" name="Content Placeholder 2"/>
-          <p:cNvSpPr>
-            <a:spLocks noGrp="1"/>
-          </p:cNvSpPr>
-          <p:nvPr>
-            <p:ph idx="1" sz="half"/>
-          </p:nvPr>
-        </p:nvSpPr>
-        <p:spPr/>
-        <p:txBody>
-          <a:bodyPr/>
-          <a:lstStyle/>
-          <a:p>
-            <a:pPr lvl="0" indent="0" marL="0">
-              <a:buNone/>
-            </a:pPr>
-            <a:r>
-              <a:rPr/>
-              <a:t>Every change starts in a branch   These branches merge to </a:t>
-            </a:r>
-            <a:r>
-              <a:rPr>
-                <a:latin typeface="Courier"/>
-              </a:rPr>
-              <a:t>main</a:t>
-            </a:r>
-          </a:p>
-        </p:txBody>
-      </p:sp>
-      <p:pic>
-        <p:nvPicPr>
-          <p:cNvPr descr="static/img/branching-model/image5.png" id="0" name="Picture 1"/>
-          <p:cNvPicPr>
-            <a:picLocks noGrp="1" noChangeAspect="1"/>
-          </p:cNvPicPr>
-          <p:nvPr/>
-        </p:nvPicPr>
-        <p:blipFill>
-          <a:blip r:embed="rId2"/>
-          <a:stretch>
-            <a:fillRect/>
-          </a:stretch>
-        </p:blipFill>
-        <p:spPr bwMode="auto">
-          <a:xfrm>
-            <a:off x="4648200" y="2387600"/>
-            <a:ext cx="4038600" cy="990600"/>
-          </a:xfrm>
-          <a:prstGeom prst="rect">
-            <a:avLst/>
-          </a:prstGeom>
-          <a:noFill/>
-          <a:ln w="9525">
-            <a:noFill/>
-            <a:headEnd/>
-            <a:tailEnd/>
-          </a:ln>
-        </p:spPr>
-      </p:pic>
-    </p:spTree>
-  </p:cSld>
-</p:sld>
-</file>
-
-<file path=ppt/slides/slide8.xml><?xml version="1.0" encoding="utf-8"?>
-<p:sld xmlns:a="http://schemas.openxmlformats.org/drawingml/2006/main" xmlns:r="http://schemas.openxmlformats.org/officeDocument/2006/relationships" xmlns:p="http://schemas.openxmlformats.org/presentationml/2006/main">
-  <p:cSld>
-    <p:spTree>
-      <p:nvGrpSpPr>
-        <p:cNvPr id="1" name=""/>
-        <p:cNvGrpSpPr/>
-        <p:nvPr/>
-      </p:nvGrpSpPr>
-      <p:grpSpPr>
-        <a:xfrm>
-          <a:off x="0" y="0"/>
-          <a:ext cx="0" cy="0"/>
-          <a:chOff x="0" y="0"/>
-          <a:chExt cx="0" cy="0"/>
-        </a:xfrm>
-      </p:grpSpPr>
-      <p:sp>
-        <p:nvSpPr>
-          <p:cNvPr id="4" name="Text Placeholder 3"/>
-          <p:cNvSpPr>
-            <a:spLocks noGrp="1"/>
-          </p:cNvSpPr>
-          <p:nvPr>
-            <p:ph idx="2" sz="half" type="body"/>
-          </p:nvPr>
-        </p:nvSpPr>
-        <p:spPr/>
-        <p:txBody>
-          <a:bodyPr/>
-          <a:lstStyle/>
-          <a:p>
-            <a:pPr lvl="0" indent="0" marL="0">
-              <a:spcBef>
-                <a:spcPts val="3000"/>
-              </a:spcBef>
-              <a:buNone/>
-            </a:pPr>
-            <a:r>
-              <a:rPr b="1"/>
               <a:t>Merging into </a:t>
             </a:r>
             <a:r>
@@ -3885,14 +3857,14 @@
             <a:pPr lvl="0"/>
             <a:r>
               <a:rPr/>
-              <a:t>Test their built feature</a:t>
+              <a:t>Test</a:t>
             </a:r>
           </a:p>
           <a:p>
             <a:pPr lvl="1"/>
             <a:r>
               <a:rPr/>
-              <a:t>To prove quality</a:t>
+              <a:t>To prove quality of the changes in their feature branch</a:t>
             </a:r>
           </a:p>
           <a:p>
@@ -4201,7 +4173,7 @@
 </p:sld>
 </file>
 
-<file path=ppt/slides/slide9.xml><?xml version="1.0" encoding="utf-8"?>
+<file path=ppt/slides/slide7.xml><?xml version="1.0" encoding="utf-8"?>
 <p:sld xmlns:a="http://schemas.openxmlformats.org/drawingml/2006/main" xmlns:r="http://schemas.openxmlformats.org/officeDocument/2006/relationships" xmlns:p="http://schemas.openxmlformats.org/presentationml/2006/main">
   <p:cSld>
     <p:spTree>
@@ -4377,6 +4349,105 @@
           </a:ln>
         </p:spPr>
       </p:pic>
+    </p:spTree>
+  </p:cSld>
+</p:sld>
+</file>
+
+<file path=ppt/slides/slide8.xml><?xml version="1.0" encoding="utf-8"?>
+<p:sld xmlns:a="http://schemas.openxmlformats.org/drawingml/2006/main" xmlns:r="http://schemas.openxmlformats.org/officeDocument/2006/relationships" xmlns:p="http://schemas.openxmlformats.org/presentationml/2006/main">
+  <p:cSld>
+    <p:spTree>
+      <p:nvGrpSpPr>
+        <p:cNvPr id="1" name=""/>
+        <p:cNvGrpSpPr/>
+        <p:nvPr/>
+      </p:nvGrpSpPr>
+      <p:grpSpPr>
+        <a:xfrm>
+          <a:off x="0" y="0"/>
+          <a:ext cx="0" cy="0"/>
+          <a:chOff x="0" y="0"/>
+          <a:chExt cx="0" cy="0"/>
+        </a:xfrm>
+      </p:grpSpPr>
+      <p:sp>
+        <p:nvSpPr>
+          <p:cNvPr id="2" name="Title 1"/>
+          <p:cNvSpPr>
+            <a:spLocks noGrp="1"/>
+          </p:cNvSpPr>
+          <p:nvPr>
+            <p:ph type="title"/>
+          </p:nvPr>
+        </p:nvSpPr>
+        <p:spPr/>
+        <p:txBody>
+          <a:bodyPr/>
+          <a:lstStyle/>
+          <a:p>
+            <a:pPr lvl="0" indent="0" marL="0">
+              <a:buNone/>
+            </a:pPr>
+            <a:r>
+              <a:rPr/>
+              <a:t>Worflows supported by the strategy</a:t>
+            </a:r>
+          </a:p>
+        </p:txBody>
+      </p:sp>
+      <p:sp>
+        <p:nvSpPr>
+          <p:cNvPr id="3" name="Content Placeholder 2"/>
+          <p:cNvSpPr>
+            <a:spLocks noGrp="1"/>
+          </p:cNvSpPr>
+          <p:nvPr>
+            <p:ph idx="1"/>
+          </p:nvPr>
+        </p:nvSpPr>
+        <p:spPr/>
+        <p:txBody>
+          <a:bodyPr/>
+          <a:lstStyle/>
+          <a:p>
+            <a:pPr lvl="0" indent="0" marL="0">
+              <a:spcBef>
+                <a:spcPts val="3000"/>
+              </a:spcBef>
+              <a:buNone/>
+            </a:pPr>
+            <a:r>
+              <a:rPr b="1"/>
+              <a:t>Delivering changes via a release</a:t>
+            </a:r>
+          </a:p>
+          <a:p>
+            <a:pPr lvl="0" indent="0" marL="0">
+              <a:spcBef>
+                <a:spcPts val="3000"/>
+              </a:spcBef>
+              <a:buNone/>
+            </a:pPr>
+            <a:r>
+              <a:rPr b="1"/>
+              <a:t>Hot-fix for production</a:t>
+            </a:r>
+          </a:p>
+          <a:p>
+            <a:pPr lvl="0" indent="0" marL="0">
+              <a:spcBef>
+                <a:spcPts val="3000"/>
+              </a:spcBef>
+              <a:buNone/>
+            </a:pPr>
+            <a:r>
+              <a:rPr b="1"/>
+              <a:t>Using an Epic branch</a:t>
+            </a:r>
+          </a:p>
+        </p:txBody>
+      </p:sp>
     </p:spTree>
   </p:cSld>
 </p:sld>

--- a/docs/p1.pptx
+++ b/docs/p1.pptx
@@ -13,6 +13,7 @@
     <p:sldId id="261" r:id="rId7"/>
     <p:sldId id="262" r:id="rId8"/>
     <p:sldId id="263" r:id="rId9"/>
+    <p:sldId id="264" r:id="rId10"/>
   </p:sldIdLst>
   <p:sldSz cx="9144000" cy="5143500" type="screen16x9"/>
   <p:notesSz cx="6858000" cy="9144000"/>
@@ -4381,6 +4382,36 @@
             <p:ph type="title"/>
           </p:nvPr>
         </p:nvSpPr>
+        <p:spPr>
+          <a:xfrm>
+            <a:off x="457201" y="204787"/>
+            <a:ext cx="3008313" cy="871538"/>
+          </a:xfrm>
+        </p:spPr>
+        <p:txBody>
+          <a:bodyPr/>
+          <a:lstStyle/>
+          <a:p>
+            <a:pPr lvl="0" indent="0" marL="0">
+              <a:buNone/>
+            </a:pPr>
+            <a:r>
+              <a:rPr/>
+              <a:t>Worflows supported by the strategy</a:t>
+            </a:r>
+          </a:p>
+        </p:txBody>
+      </p:sp>
+      <p:sp>
+        <p:nvSpPr>
+          <p:cNvPr id="4" name="Text Placeholder 3"/>
+          <p:cNvSpPr>
+            <a:spLocks noGrp="1"/>
+          </p:cNvSpPr>
+          <p:nvPr>
+            <p:ph idx="2" sz="half" type="body"/>
+          </p:nvPr>
+        </p:nvSpPr>
         <p:spPr/>
         <p:txBody>
           <a:bodyPr/>
@@ -4391,25 +4422,9 @@
             </a:pPr>
             <a:r>
               <a:rPr/>
-              <a:t>Worflows supported by the strategy</a:t>
-            </a:r>
-          </a:p>
-        </p:txBody>
-      </p:sp>
-      <p:sp>
-        <p:nvSpPr>
-          <p:cNvPr id="3" name="Content Placeholder 2"/>
-          <p:cNvSpPr>
-            <a:spLocks noGrp="1"/>
-          </p:cNvSpPr>
-          <p:nvPr>
-            <p:ph idx="1"/>
-          </p:nvPr>
-        </p:nvSpPr>
-        <p:spPr/>
-        <p:txBody>
-          <a:bodyPr/>
-          <a:lstStyle/>
+              <a:t>What do teams do?</a:t>
+            </a:r>
+          </a:p>
           <a:p>
             <a:pPr lvl="0" indent="0" marL="0">
               <a:spcBef>
@@ -4419,9 +4434,110 @@
             </a:pPr>
             <a:r>
               <a:rPr b="1"/>
+              <a:t>Three foundation workflows</a:t>
+            </a:r>
+          </a:p>
+          <a:p>
+            <a:pPr lvl="0"/>
+            <a:r>
+              <a:rPr/>
+              <a:t>Deliver changes with the next planned release</a:t>
+            </a:r>
+          </a:p>
+          <a:p>
+            <a:pPr lvl="0"/>
+            <a:r>
+              <a:rPr/>
+              <a:t>Implement a fix for the current production state</a:t>
+            </a:r>
+          </a:p>
+          <a:p>
+            <a:pPr lvl="0"/>
+            <a:r>
+              <a:rPr/>
+              <a:t>Use an epic branch for a significant development initiative</a:t>
+            </a:r>
+          </a:p>
+          <a:p>
+            <a:pPr lvl="0" indent="0" marL="0">
+              <a:spcBef>
+                <a:spcPts val="3000"/>
+              </a:spcBef>
+              <a:buNone/>
+            </a:pPr>
+            <a:r>
+              <a:rPr b="1"/>
               <a:t>Delivering changes via a release</a:t>
             </a:r>
           </a:p>
+        </p:txBody>
+      </p:sp>
+      <p:pic>
+        <p:nvPicPr>
+          <p:cNvPr descr="p1_files/figure-pptx/mermaid-figure-1.png" id="0" name="Picture 1"/>
+          <p:cNvPicPr>
+            <a:picLocks noGrp="1" noChangeAspect="1"/>
+          </p:cNvPicPr>
+          <p:nvPr/>
+        </p:nvPicPr>
+        <p:blipFill>
+          <a:blip r:embed="rId2"/>
+          <a:stretch>
+            <a:fillRect/>
+          </a:stretch>
+        </p:blipFill>
+        <p:spPr bwMode="auto">
+          <a:xfrm>
+            <a:off x="3568700" y="2184400"/>
+            <a:ext cx="5105400" cy="406400"/>
+          </a:xfrm>
+          <a:prstGeom prst="rect">
+            <a:avLst/>
+          </a:prstGeom>
+          <a:noFill/>
+          <a:ln w="9525">
+            <a:noFill/>
+            <a:headEnd/>
+            <a:tailEnd/>
+          </a:ln>
+        </p:spPr>
+      </p:pic>
+    </p:spTree>
+  </p:cSld>
+</p:sld>
+</file>
+
+<file path=ppt/slides/slide9.xml><?xml version="1.0" encoding="utf-8"?>
+<p:sld xmlns:a="http://schemas.openxmlformats.org/drawingml/2006/main" xmlns:r="http://schemas.openxmlformats.org/officeDocument/2006/relationships" xmlns:p="http://schemas.openxmlformats.org/presentationml/2006/main">
+  <p:cSld>
+    <p:spTree>
+      <p:nvGrpSpPr>
+        <p:cNvPr id="1" name=""/>
+        <p:cNvGrpSpPr/>
+        <p:nvPr/>
+      </p:nvGrpSpPr>
+      <p:grpSpPr>
+        <a:xfrm>
+          <a:off x="0" y="0"/>
+          <a:ext cx="0" cy="0"/>
+          <a:chOff x="0" y="0"/>
+          <a:chExt cx="0" cy="0"/>
+        </a:xfrm>
+      </p:grpSpPr>
+      <p:sp>
+        <p:nvSpPr>
+          <p:cNvPr id="3" name="Content Placeholder 2"/>
+          <p:cNvSpPr>
+            <a:spLocks noGrp="1"/>
+          </p:cNvSpPr>
+          <p:nvPr>
+            <p:ph idx="1"/>
+          </p:nvPr>
+        </p:nvSpPr>
+        <p:spPr/>
+        <p:txBody>
+          <a:bodyPr/>
+          <a:lstStyle/>
           <a:p>
             <a:pPr lvl="0" indent="0" marL="0">
               <a:spcBef>

--- a/docs/p1.pptx
+++ b/docs/p1.pptx
@@ -14,6 +14,9 @@
     <p:sldId id="262" r:id="rId8"/>
     <p:sldId id="263" r:id="rId9"/>
     <p:sldId id="264" r:id="rId10"/>
+    <p:sldId id="265" r:id="rId11"/>
+    <p:sldId id="266" r:id="rId12"/>
+    <p:sldId id="267" r:id="rId13"/>
   </p:sldIdLst>
   <p:sldSz cx="9144000" cy="5143500" type="screen16x9"/>
   <p:notesSz cx="6858000" cy="9144000"/>
@@ -3149,6 +3152,410 @@
 </p:sld>
 </file>
 
+<file path=ppt/slides/slide10.xml><?xml version="1.0" encoding="utf-8"?>
+<p:sld xmlns:a="http://schemas.openxmlformats.org/drawingml/2006/main" xmlns:r="http://schemas.openxmlformats.org/officeDocument/2006/relationships" xmlns:p="http://schemas.openxmlformats.org/presentationml/2006/main">
+  <p:cSld>
+    <p:spTree>
+      <p:nvGrpSpPr>
+        <p:cNvPr id="1" name=""/>
+        <p:cNvGrpSpPr/>
+        <p:nvPr/>
+      </p:nvGrpSpPr>
+      <p:grpSpPr>
+        <a:xfrm>
+          <a:off x="0" y="0"/>
+          <a:ext cx="0" cy="0"/>
+          <a:chOff x="0" y="0"/>
+          <a:chExt cx="0" cy="0"/>
+        </a:xfrm>
+      </p:grpSpPr>
+      <p:sp>
+        <p:nvSpPr>
+          <p:cNvPr id="4" name="Text Placeholder 3"/>
+          <p:cNvSpPr>
+            <a:spLocks noGrp="1"/>
+          </p:cNvSpPr>
+          <p:nvPr>
+            <p:ph idx="2" sz="half" type="body"/>
+          </p:nvPr>
+        </p:nvSpPr>
+        <p:spPr/>
+        <p:txBody>
+          <a:bodyPr/>
+          <a:lstStyle/>
+          <a:p>
+            <a:pPr lvl="0" indent="0" marL="0">
+              <a:buNone/>
+            </a:pPr>
+            <a:r>
+              <a:rPr/>
+              <a:t>Tag the commit (point in </a:t>
+            </a:r>
+            <a:r>
+              <a:rPr>
+                <a:latin typeface="Courier"/>
+              </a:rPr>
+              <a:t>main</a:t>
+            </a:r>
+            <a:r>
+              <a:rPr/>
+              <a:t>’s history) with a release name.</a:t>
+            </a:r>
+          </a:p>
+          <a:p>
+            <a:pPr lvl="0" indent="0" marL="0">
+              <a:spcBef>
+                <a:spcPts val="3000"/>
+              </a:spcBef>
+              <a:buNone/>
+            </a:pPr>
+            <a:r>
+              <a:rPr b="1"/>
+              <a:t>Release branches</a:t>
+            </a:r>
+          </a:p>
+          <a:p>
+            <a:pPr lvl="0" indent="0" marL="0">
+              <a:buNone/>
+            </a:pPr>
+            <a:r>
+              <a:rPr/>
+              <a:t>A </a:t>
+            </a:r>
+            <a:r>
+              <a:rPr i="1"/>
+              <a:t>release maintenance</a:t>
+            </a:r>
+            <a:r>
+              <a:rPr/>
+              <a:t> branch will be used if </a:t>
+            </a:r>
+            <a:r>
+              <a:rPr i="1"/>
+              <a:t>hot-fixes</a:t>
+            </a:r>
+            <a:r>
+              <a:rPr/>
+              <a:t> must be developed and delivered.</a:t>
+            </a:r>
+          </a:p>
+        </p:txBody>
+      </p:sp>
+      <p:pic>
+        <p:nvPicPr>
+          <p:cNvPr descr="static/img/branching-model/image2.png" id="0" name="Picture 1"/>
+          <p:cNvPicPr>
+            <a:picLocks noGrp="1" noChangeAspect="1"/>
+          </p:cNvPicPr>
+          <p:nvPr/>
+        </p:nvPicPr>
+        <p:blipFill>
+          <a:blip r:embed="rId2"/>
+          <a:stretch>
+            <a:fillRect/>
+          </a:stretch>
+        </p:blipFill>
+        <p:spPr bwMode="auto">
+          <a:xfrm>
+            <a:off x="3568700" y="406400"/>
+            <a:ext cx="5105400" cy="3987800"/>
+          </a:xfrm>
+          <a:prstGeom prst="rect">
+            <a:avLst/>
+          </a:prstGeom>
+          <a:noFill/>
+          <a:ln w="9525">
+            <a:noFill/>
+            <a:headEnd/>
+            <a:tailEnd/>
+          </a:ln>
+        </p:spPr>
+      </p:pic>
+    </p:spTree>
+  </p:cSld>
+</p:sld>
+</file>
+
+<file path=ppt/slides/slide11.xml><?xml version="1.0" encoding="utf-8"?>
+<p:sld xmlns:a="http://schemas.openxmlformats.org/drawingml/2006/main" xmlns:r="http://schemas.openxmlformats.org/officeDocument/2006/relationships" xmlns:p="http://schemas.openxmlformats.org/presentationml/2006/main">
+  <p:cSld>
+    <p:spTree>
+      <p:nvGrpSpPr>
+        <p:cNvPr id="1" name=""/>
+        <p:cNvGrpSpPr/>
+        <p:nvPr/>
+      </p:nvGrpSpPr>
+      <p:grpSpPr>
+        <a:xfrm>
+          <a:off x="0" y="0"/>
+          <a:ext cx="0" cy="0"/>
+          <a:chOff x="0" y="0"/>
+          <a:chExt cx="0" cy="0"/>
+        </a:xfrm>
+      </p:grpSpPr>
+      <p:sp>
+        <p:nvSpPr>
+          <p:cNvPr id="4" name="Text Placeholder 3"/>
+          <p:cNvSpPr>
+            <a:spLocks noGrp="1"/>
+          </p:cNvSpPr>
+          <p:nvPr>
+            <p:ph idx="2" sz="half" type="body"/>
+          </p:nvPr>
+        </p:nvSpPr>
+        <p:spPr/>
+        <p:txBody>
+          <a:bodyPr/>
+          <a:lstStyle/>
+          <a:p>
+            <a:pPr lvl="0" indent="0" marL="0">
+              <a:spcBef>
+                <a:spcPts val="3000"/>
+              </a:spcBef>
+              <a:buNone/>
+            </a:pPr>
+            <a:r>
+              <a:rPr b="1"/>
+              <a:t>Scaling up</a:t>
+            </a:r>
+          </a:p>
+          <a:p>
+            <a:pPr lvl="0" indent="0" marL="0">
+              <a:buNone/>
+            </a:pPr>
+            <a:r>
+              <a:rPr/>
+              <a:t>Concurrent </a:t>
+            </a:r>
+            <a:r>
+              <a:rPr i="1"/>
+              <a:t>feature</a:t>
+            </a:r>
+            <a:r>
+              <a:rPr/>
+              <a:t> branches scale very well, but assume short cycle times.</a:t>
+            </a:r>
+          </a:p>
+          <a:p>
+            <a:pPr lvl="0"/>
+            <a:r>
+              <a:rPr/>
+              <a:t>Ideally live within a release delivery cycle</a:t>
+            </a:r>
+          </a:p>
+          <a:p>
+            <a:pPr lvl="0"/>
+            <a:r>
+              <a:rPr/>
+              <a:t>But no big deal if they don’t</a:t>
+            </a:r>
+          </a:p>
+          <a:p>
+            <a:pPr lvl="0" indent="0" marL="0">
+              <a:buNone/>
+            </a:pPr>
+            <a:r>
+              <a:rPr i="1"/>
+              <a:t>Epic</a:t>
+            </a:r>
+            <a:r>
+              <a:rPr/>
+              <a:t> branches can collect multiple features</a:t>
+            </a:r>
+          </a:p>
+          <a:p>
+            <a:pPr lvl="0"/>
+            <a:r>
+              <a:rPr/>
+              <a:t>Before going to </a:t>
+            </a:r>
+            <a:r>
+              <a:rPr>
+                <a:latin typeface="Courier"/>
+              </a:rPr>
+              <a:t>main</a:t>
+            </a:r>
+          </a:p>
+          <a:p>
+            <a:pPr lvl="0"/>
+            <a:r>
+              <a:rPr/>
+              <a:t>When the delivery is planned beyond the next release</a:t>
+            </a:r>
+          </a:p>
+          <a:p>
+            <a:pPr lvl="0" indent="0" marL="0">
+              <a:buNone/>
+            </a:pPr>
+            <a:r>
+              <a:rPr/>
+              <a:t>(</a:t>
+            </a:r>
+            <a:r>
+              <a:rPr i="1"/>
+              <a:t>Epic</a:t>
+            </a:r>
+            <a:r>
+              <a:rPr/>
+              <a:t> branches are a form of </a:t>
+            </a:r>
+            <a:r>
+              <a:rPr i="1"/>
+              <a:t>integration</a:t>
+            </a:r>
+            <a:r>
+              <a:rPr/>
+              <a:t> branch.)</a:t>
+            </a:r>
+          </a:p>
+          <a:p>
+            <a:pPr lvl="0" indent="0" marL="0">
+              <a:spcBef>
+                <a:spcPts val="3000"/>
+              </a:spcBef>
+              <a:buNone/>
+            </a:pPr>
+            <a:r>
+              <a:rPr b="1"/>
+              <a:t>Integration branches</a:t>
+            </a:r>
+          </a:p>
+        </p:txBody>
+      </p:sp>
+      <p:pic>
+        <p:nvPicPr>
+          <p:cNvPr descr="static/img/branching-model/image3.png" id="0" name="Picture 1"/>
+          <p:cNvPicPr>
+            <a:picLocks noGrp="1" noChangeAspect="1"/>
+          </p:cNvPicPr>
+          <p:nvPr/>
+        </p:nvPicPr>
+        <p:blipFill>
+          <a:blip r:embed="rId2"/>
+          <a:stretch>
+            <a:fillRect/>
+          </a:stretch>
+        </p:blipFill>
+        <p:spPr bwMode="auto">
+          <a:xfrm>
+            <a:off x="3568700" y="330200"/>
+            <a:ext cx="5105400" cy="4140200"/>
+          </a:xfrm>
+          <a:prstGeom prst="rect">
+            <a:avLst/>
+          </a:prstGeom>
+          <a:noFill/>
+          <a:ln w="9525">
+            <a:noFill/>
+            <a:headEnd/>
+            <a:tailEnd/>
+          </a:ln>
+        </p:spPr>
+      </p:pic>
+    </p:spTree>
+  </p:cSld>
+</p:sld>
+</file>
+
+<file path=ppt/slides/slide12.xml><?xml version="1.0" encoding="utf-8"?>
+<p:sld xmlns:a="http://schemas.openxmlformats.org/drawingml/2006/main" xmlns:r="http://schemas.openxmlformats.org/officeDocument/2006/relationships" xmlns:p="http://schemas.openxmlformats.org/presentationml/2006/main">
+  <p:cSld>
+    <p:spTree>
+      <p:nvGrpSpPr>
+        <p:cNvPr id="1" name=""/>
+        <p:cNvGrpSpPr/>
+        <p:nvPr/>
+      </p:nvGrpSpPr>
+      <p:grpSpPr>
+        <a:xfrm>
+          <a:off x="0" y="0"/>
+          <a:ext cx="0" cy="0"/>
+          <a:chOff x="0" y="0"/>
+          <a:chExt cx="0" cy="0"/>
+        </a:xfrm>
+      </p:grpSpPr>
+      <p:sp>
+        <p:nvSpPr>
+          <p:cNvPr id="2" name="Title 1"/>
+          <p:cNvSpPr>
+            <a:spLocks noGrp="1"/>
+          </p:cNvSpPr>
+          <p:nvPr>
+            <p:ph type="title"/>
+          </p:nvPr>
+        </p:nvSpPr>
+        <p:spPr/>
+        <p:txBody>
+          <a:bodyPr/>
+          <a:lstStyle/>
+          <a:p>
+            <a:pPr lvl="0" indent="0" marL="0">
+              <a:buNone/>
+            </a:pPr>
+            <a:r>
+              <a:rPr/>
+              <a:t>Worflows supported by the strategy</a:t>
+            </a:r>
+          </a:p>
+        </p:txBody>
+      </p:sp>
+      <p:sp>
+        <p:nvSpPr>
+          <p:cNvPr id="3" name="Content Placeholder 2"/>
+          <p:cNvSpPr>
+            <a:spLocks noGrp="1"/>
+          </p:cNvSpPr>
+          <p:nvPr>
+            <p:ph idx="1"/>
+          </p:nvPr>
+        </p:nvSpPr>
+        <p:spPr/>
+        <p:txBody>
+          <a:bodyPr/>
+          <a:lstStyle/>
+          <a:p>
+            <a:pPr lvl="0" indent="0" marL="0">
+              <a:spcBef>
+                <a:spcPts val="3000"/>
+              </a:spcBef>
+              <a:buNone/>
+            </a:pPr>
+            <a:r>
+              <a:rPr b="1"/>
+              <a:t>Delivering changes via a release</a:t>
+            </a:r>
+          </a:p>
+          <a:p>
+            <a:pPr lvl="0" indent="0" marL="0">
+              <a:spcBef>
+                <a:spcPts val="3000"/>
+              </a:spcBef>
+              <a:buNone/>
+            </a:pPr>
+            <a:r>
+              <a:rPr b="1"/>
+              <a:t>Hot-fix for production</a:t>
+            </a:r>
+          </a:p>
+          <a:p>
+            <a:pPr lvl="0" indent="0" marL="0">
+              <a:spcBef>
+                <a:spcPts val="3000"/>
+              </a:spcBef>
+              <a:buNone/>
+            </a:pPr>
+            <a:r>
+              <a:rPr b="1"/>
+              <a:t>Using an Epic branch</a:t>
+            </a:r>
+          </a:p>
+        </p:txBody>
+      </p:sp>
+    </p:spTree>
+  </p:cSld>
+</p:sld>
+</file>
+
 <file path=ppt/slides/slide2.xml><?xml version="1.0" encoding="utf-8"?>
 <p:sld xmlns:a="http://schemas.openxmlformats.org/drawingml/2006/main" xmlns:r="http://schemas.openxmlformats.org/officeDocument/2006/relationships" xmlns:p="http://schemas.openxmlformats.org/presentationml/2006/main">
   <p:cSld>
@@ -3468,6 +3875,13 @@
             <a:r>
               <a:rPr/>
               <a:t>Planning and design activities as well as code development aim to align to a regular release cadence.</a:t>
+            </a:r>
+          </a:p>
+          <a:p>
+            <a:pPr lvl="0"/>
+            <a:r>
+              <a:rPr/>
+              <a:t>The cadence of the next planned release is defined by the application team.</a:t>
             </a:r>
           </a:p>
           <a:p>
@@ -3687,7 +4101,7 @@
       </p:sp>
       <p:pic>
         <p:nvPicPr>
-          <p:cNvPr descr="static/img/branching-model/image6.png" id="0" name="Picture 1"/>
+          <p:cNvPr descr="static/img/branching-model/defaultWorkflow_featureBranchPipeline.png" id="0" name="Picture 1"/>
           <p:cNvPicPr>
             <a:picLocks noGrp="1" noChangeAspect="1"/>
           </p:cNvPicPr>
@@ -3701,8 +4115,8 @@
         </p:blipFill>
         <p:spPr bwMode="auto">
           <a:xfrm>
-            <a:off x="3568700" y="1854200"/>
-            <a:ext cx="5105400" cy="1066800"/>
+            <a:off x="3568700" y="1320800"/>
+            <a:ext cx="5105400" cy="2133600"/>
           </a:xfrm>
           <a:prstGeom prst="rect">
             <a:avLst/>
@@ -3757,7 +4171,7 @@
             </a:pPr>
             <a:r>
               <a:rPr/>
-              <a:t>These branches are</a:t>
+              <a:t>These changes on these branches are</a:t>
             </a:r>
           </a:p>
           <a:p>
@@ -3868,280 +4282,11 @@
               <a:t>To prove quality of the changes in their feature branch</a:t>
             </a:r>
           </a:p>
-          <a:p>
-            <a:pPr lvl="0" indent="0" marL="0">
-              <a:buNone/>
-            </a:pPr>
-            <a:r>
-              <a:rPr/>
-              <a:t>Create a Pull Request (PR) to signal to Team Leaders/Release Controllers to:</a:t>
-            </a:r>
-          </a:p>
-          <a:p>
-            <a:pPr lvl="0"/>
-            <a:r>
-              <a:rPr/>
-              <a:t>Review</a:t>
-            </a:r>
-          </a:p>
-          <a:p>
-            <a:pPr lvl="1"/>
-            <a:r>
-              <a:rPr/>
-              <a:t>Code and Test results</a:t>
-            </a:r>
-          </a:p>
-          <a:p>
-            <a:pPr lvl="0"/>
-            <a:r>
-              <a:rPr/>
-              <a:t>Approve</a:t>
-            </a:r>
-          </a:p>
-          <a:p>
-            <a:pPr lvl="1"/>
-            <a:r>
-              <a:rPr/>
-              <a:t>Safeguard the quality of </a:t>
-            </a:r>
-            <a:r>
-              <a:rPr>
-                <a:latin typeface="Courier"/>
-              </a:rPr>
-              <a:t>main</a:t>
-            </a:r>
-          </a:p>
-          <a:p>
-            <a:pPr lvl="0" indent="0" marL="0">
-              <a:spcBef>
-                <a:spcPts val="3000"/>
-              </a:spcBef>
-              <a:buNone/>
-            </a:pPr>
-            <a:r>
-              <a:rPr b="1"/>
-              <a:t>Before you ask… no, no </a:t>
-            </a:r>
-            <a:r>
-              <a:rPr b="1" i="1"/>
-              <a:t>Production</a:t>
-            </a:r>
-            <a:r>
-              <a:rPr b="1"/>
-              <a:t> branch</a:t>
-            </a:r>
-          </a:p>
-          <a:p>
-            <a:pPr lvl="0" indent="0" marL="0">
-              <a:buNone/>
-            </a:pPr>
-            <a:r>
-              <a:rPr/>
-              <a:t>We have no branches named </a:t>
-            </a:r>
-            <a:r>
-              <a:rPr>
-                <a:latin typeface="Courier"/>
-              </a:rPr>
-              <a:t>prod</a:t>
-            </a:r>
-            <a:r>
-              <a:rPr/>
-              <a:t> (or </a:t>
-            </a:r>
-            <a:r>
-              <a:rPr>
-                <a:latin typeface="Courier"/>
-              </a:rPr>
-              <a:t>test</a:t>
-            </a:r>
-            <a:r>
-              <a:rPr/>
-              <a:t> or </a:t>
-            </a:r>
-            <a:r>
-              <a:rPr>
-                <a:latin typeface="Courier"/>
-              </a:rPr>
-              <a:t>QA</a:t>
-            </a:r>
-            <a:r>
-              <a:rPr/>
-              <a:t>)</a:t>
-            </a:r>
-          </a:p>
-          <a:p>
-            <a:pPr lvl="0"/>
-            <a:r>
-              <a:rPr/>
-              <a:t>Those are </a:t>
-            </a:r>
-            <a:r>
-              <a:rPr i="1"/>
-              <a:t>environments</a:t>
-            </a:r>
-            <a:r>
-              <a:rPr/>
-              <a:t> to which builds can be deployed</a:t>
-            </a:r>
-          </a:p>
-          <a:p>
-            <a:pPr lvl="0"/>
-            <a:r>
-              <a:rPr/>
-              <a:t>Such extra branches:</a:t>
-            </a:r>
-          </a:p>
-          <a:p>
-            <a:pPr lvl="1"/>
-            <a:r>
-              <a:rPr/>
-              <a:t>are unnecessary</a:t>
-            </a:r>
-          </a:p>
-          <a:p>
-            <a:pPr lvl="1"/>
-            <a:r>
-              <a:rPr/>
-              <a:t>cause ambiguity</a:t>
-            </a:r>
-          </a:p>
-          <a:p>
-            <a:pPr lvl="1"/>
-            <a:r>
-              <a:rPr/>
-              <a:t>impose merging and building overheads</a:t>
-            </a:r>
-          </a:p>
-          <a:p>
-            <a:pPr lvl="0" indent="0" marL="0">
-              <a:spcBef>
-                <a:spcPts val="3000"/>
-              </a:spcBef>
-              <a:buNone/>
-            </a:pPr>
-            <a:r>
-              <a:rPr b="1"/>
-              <a:t>Release branches</a:t>
-            </a:r>
-          </a:p>
-          <a:p>
-            <a:pPr lvl="0" indent="0" marL="0">
-              <a:buNone/>
-            </a:pPr>
-            <a:r>
-              <a:rPr/>
-              <a:t>Any point in the history of </a:t>
-            </a:r>
-            <a:r>
-              <a:rPr>
-                <a:latin typeface="Courier"/>
-              </a:rPr>
-              <a:t>main</a:t>
-            </a:r>
-            <a:r>
-              <a:rPr/>
-              <a:t> can be declared a </a:t>
-            </a:r>
-            <a:r>
-              <a:rPr i="1"/>
-              <a:t>release candidate</a:t>
-            </a:r>
-            <a:r>
-              <a:rPr/>
-              <a:t>.</a:t>
-            </a:r>
-          </a:p>
-          <a:p>
-            <a:pPr lvl="0"/>
-            <a:r>
-              <a:rPr/>
-              <a:t>Build a </a:t>
-            </a:r>
-            <a:r>
-              <a:rPr i="1"/>
-              <a:t>release candidate</a:t>
-            </a:r>
-            <a:r>
-              <a:rPr/>
-              <a:t> package</a:t>
-            </a:r>
-          </a:p>
-          <a:p>
-            <a:pPr lvl="0"/>
-            <a:r>
-              <a:rPr/>
-              <a:t>Test it</a:t>
-            </a:r>
-          </a:p>
-          <a:p>
-            <a:pPr lvl="0"/>
-            <a:r>
-              <a:rPr/>
-              <a:t>Deploy it</a:t>
-            </a:r>
-          </a:p>
-          <a:p>
-            <a:pPr lvl="0" indent="0" marL="0">
-              <a:buNone/>
-            </a:pPr>
-            <a:r>
-              <a:rPr/>
-              <a:t>Tag the commit (point in </a:t>
-            </a:r>
-            <a:r>
-              <a:rPr>
-                <a:latin typeface="Courier"/>
-              </a:rPr>
-              <a:t>main</a:t>
-            </a:r>
-            <a:r>
-              <a:rPr/>
-              <a:t>’s history) with a release name.</a:t>
-            </a:r>
-          </a:p>
-          <a:p>
-            <a:pPr lvl="0" indent="0" marL="0">
-              <a:buNone/>
-            </a:pPr>
-            <a:r>
-              <a:rPr/>
-              <a:t>A </a:t>
-            </a:r>
-            <a:r>
-              <a:rPr i="1"/>
-              <a:t>release maintenance</a:t>
-            </a:r>
-            <a:r>
-              <a:rPr/>
-              <a:t> branch will be used if </a:t>
-            </a:r>
-            <a:r>
-              <a:rPr i="1"/>
-              <a:t>hot-fixes</a:t>
-            </a:r>
-            <a:r>
-              <a:rPr/>
-              <a:t> must be developed and delivered.</a:t>
-            </a:r>
-          </a:p>
-          <a:p>
-            <a:pPr lvl="0" indent="0" marL="0">
-              <a:spcBef>
-                <a:spcPts val="3000"/>
-              </a:spcBef>
-              <a:buNone/>
-            </a:pPr>
-            <a:r>
-              <a:rPr b="1"/>
-              <a:t>Release branches</a:t>
-            </a:r>
-          </a:p>
         </p:txBody>
       </p:sp>
       <p:pic>
         <p:nvPicPr>
-          <p:cNvPr descr="static/img/branching-model/image2.png" id="0" name="Picture 1"/>
+          <p:cNvPr descr="static/img/branching-model/image18.png" id="0" name="Picture 1"/>
           <p:cNvPicPr>
             <a:picLocks noGrp="1" noChangeAspect="1"/>
           </p:cNvPicPr>
@@ -4155,8 +4300,8 @@
         </p:blipFill>
         <p:spPr bwMode="auto">
           <a:xfrm>
-            <a:off x="3568700" y="406400"/>
-            <a:ext cx="5105400" cy="3987800"/>
+            <a:off x="3568700" y="1371600"/>
+            <a:ext cx="5105400" cy="2044700"/>
           </a:xfrm>
           <a:prstGeom prst="rect">
             <a:avLst/>
@@ -4207,65 +4352,39 @@
           <a:lstStyle/>
           <a:p>
             <a:pPr lvl="0" indent="0" marL="0">
-              <a:spcBef>
-                <a:spcPts val="3000"/>
-              </a:spcBef>
               <a:buNone/>
             </a:pPr>
             <a:r>
-              <a:rPr b="1"/>
-              <a:t>Scaling up</a:t>
-            </a:r>
-          </a:p>
-          <a:p>
-            <a:pPr lvl="0" indent="0" marL="0">
-              <a:buNone/>
-            </a:pPr>
-            <a:r>
-              <a:rPr/>
-              <a:t>Concurrent </a:t>
-            </a:r>
-            <a:r>
-              <a:rPr i="1"/>
-              <a:t>feature</a:t>
-            </a:r>
-            <a:r>
-              <a:rPr/>
-              <a:t> branches scale very well, but assume short cycle times.</a:t>
+              <a:rPr/>
+              <a:t>Create a Pull Request (PR) to signal to Team Leaders/Release Controllers to:</a:t>
             </a:r>
           </a:p>
           <a:p>
             <a:pPr lvl="0"/>
             <a:r>
               <a:rPr/>
-              <a:t>Ideally live within a release delivery cycle</a:t>
+              <a:t>Review</a:t>
+            </a:r>
+          </a:p>
+          <a:p>
+            <a:pPr lvl="1"/>
+            <a:r>
+              <a:rPr/>
+              <a:t>Code and Test results</a:t>
             </a:r>
           </a:p>
           <a:p>
             <a:pPr lvl="0"/>
             <a:r>
               <a:rPr/>
-              <a:t>But no big deal if they don’t</a:t>
-            </a:r>
-          </a:p>
-          <a:p>
-            <a:pPr lvl="0" indent="0" marL="0">
-              <a:buNone/>
-            </a:pPr>
-            <a:r>
-              <a:rPr i="1"/>
-              <a:t>Epic</a:t>
-            </a:r>
-            <a:r>
-              <a:rPr/>
-              <a:t> branches can collect multiple features</a:t>
-            </a:r>
-          </a:p>
-          <a:p>
-            <a:pPr lvl="0"/>
-            <a:r>
-              <a:rPr/>
-              <a:t>Before going to </a:t>
+              <a:t>Approve</a:t>
+            </a:r>
+          </a:p>
+          <a:p>
+            <a:pPr lvl="1"/>
+            <a:r>
+              <a:rPr/>
+              <a:t>Safeguard the quality of </a:t>
             </a:r>
             <a:r>
               <a:rPr>
@@ -4274,55 +4393,11 @@
               <a:t>main</a:t>
             </a:r>
           </a:p>
-          <a:p>
-            <a:pPr lvl="0"/>
-            <a:r>
-              <a:rPr/>
-              <a:t>When the delivery is planned beyond the next release</a:t>
-            </a:r>
-          </a:p>
-          <a:p>
-            <a:pPr lvl="0" indent="0" marL="0">
-              <a:buNone/>
-            </a:pPr>
-            <a:r>
-              <a:rPr/>
-              <a:t>(</a:t>
-            </a:r>
-            <a:r>
-              <a:rPr i="1"/>
-              <a:t>Epic</a:t>
-            </a:r>
-            <a:r>
-              <a:rPr/>
-              <a:t> branches are a form of </a:t>
-            </a:r>
-            <a:r>
-              <a:rPr i="1"/>
-              <a:t>integration</a:t>
-            </a:r>
-            <a:r>
-              <a:rPr/>
-              <a:t> branch.)</a:t>
-            </a:r>
-          </a:p>
-          <a:p>
-            <a:pPr lvl="0" indent="0" marL="0">
-              <a:spcBef>
-                <a:spcPts val="3000"/>
-              </a:spcBef>
-              <a:buNone/>
-            </a:pPr>
-            <a:r>
-              <a:rPr b="1"/>
-              <a:t>Integration branches</a:t>
-            </a:r>
-          </a:p>
         </p:txBody>
       </p:sp>
       <p:pic>
         <p:nvPicPr>
-          <p:cNvPr descr="static/img/branching-model/image3.png" id="0" name="Picture 1"/>
+          <p:cNvPr descr="static/img/branching-model/image6.png" id="0" name="Picture 1"/>
           <p:cNvPicPr>
             <a:picLocks noGrp="1" noChangeAspect="1"/>
           </p:cNvPicPr>
@@ -4336,8 +4411,8 @@
         </p:blipFill>
         <p:spPr bwMode="auto">
           <a:xfrm>
-            <a:off x="3568700" y="330200"/>
-            <a:ext cx="5105400" cy="4140200"/>
+            <a:off x="3568700" y="1854200"/>
+            <a:ext cx="5105400" cy="1066800"/>
           </a:xfrm>
           <a:prstGeom prst="rect">
             <a:avLst/>
@@ -4374,36 +4449,6 @@
       </p:grpSpPr>
       <p:sp>
         <p:nvSpPr>
-          <p:cNvPr id="2" name="Title 1"/>
-          <p:cNvSpPr>
-            <a:spLocks noGrp="1"/>
-          </p:cNvSpPr>
-          <p:nvPr>
-            <p:ph type="title"/>
-          </p:nvPr>
-        </p:nvSpPr>
-        <p:spPr>
-          <a:xfrm>
-            <a:off x="457201" y="204787"/>
-            <a:ext cx="3008313" cy="871538"/>
-          </a:xfrm>
-        </p:spPr>
-        <p:txBody>
-          <a:bodyPr/>
-          <a:lstStyle/>
-          <a:p>
-            <a:pPr lvl="0" indent="0" marL="0">
-              <a:buNone/>
-            </a:pPr>
-            <a:r>
-              <a:rPr/>
-              <a:t>Worflows supported by the strategy</a:t>
-            </a:r>
-          </a:p>
-        </p:txBody>
-      </p:sp>
-      <p:sp>
-        <p:nvSpPr>
           <p:cNvPr id="4" name="Text Placeholder 3"/>
           <p:cNvSpPr>
             <a:spLocks noGrp="1"/>
@@ -4416,15 +4461,6 @@
         <p:txBody>
           <a:bodyPr/>
           <a:lstStyle/>
-          <a:p>
-            <a:pPr lvl="0" indent="0" marL="0">
-              <a:buNone/>
-            </a:pPr>
-            <a:r>
-              <a:rPr/>
-              <a:t>What do teams do?</a:t>
-            </a:r>
-          </a:p>
           <a:p>
             <a:pPr lvl="0" indent="0" marL="0">
               <a:spcBef>
@@ -4434,28 +4470,113 @@
             </a:pPr>
             <a:r>
               <a:rPr b="1"/>
-              <a:t>Three foundation workflows</a:t>
+              <a:t>Before you ask… no, no </a:t>
+            </a:r>
+            <a:r>
+              <a:rPr b="1" i="1"/>
+              <a:t>Production</a:t>
+            </a:r>
+            <a:r>
+              <a:rPr b="1"/>
+              <a:t> branch</a:t>
+            </a:r>
+          </a:p>
+          <a:p>
+            <a:pPr lvl="0" indent="0" marL="0">
+              <a:buNone/>
+            </a:pPr>
+            <a:r>
+              <a:rPr/>
+              <a:t>CI/CD decouples the building and deploying to test environments and production.</a:t>
+            </a:r>
+          </a:p>
+          <a:p>
+            <a:pPr lvl="0" indent="0" marL="0">
+              <a:buNone/>
+            </a:pPr>
+            <a:r>
+              <a:rPr/>
+              <a:t>We have no branches named </a:t>
+            </a:r>
+            <a:r>
+              <a:rPr>
+                <a:latin typeface="Courier"/>
+              </a:rPr>
+              <a:t>prod</a:t>
+            </a:r>
+            <a:r>
+              <a:rPr/>
+              <a:t> (or </a:t>
+            </a:r>
+            <a:r>
+              <a:rPr>
+                <a:latin typeface="Courier"/>
+              </a:rPr>
+              <a:t>test</a:t>
+            </a:r>
+            <a:r>
+              <a:rPr/>
+              <a:t> or </a:t>
+            </a:r>
+            <a:r>
+              <a:rPr>
+                <a:latin typeface="Courier"/>
+              </a:rPr>
+              <a:t>QA</a:t>
+            </a:r>
+            <a:r>
+              <a:rPr/>
+              <a:t>)</a:t>
             </a:r>
           </a:p>
           <a:p>
             <a:pPr lvl="0"/>
             <a:r>
               <a:rPr/>
-              <a:t>Deliver changes with the next planned release</a:t>
+              <a:t>Those are </a:t>
+            </a:r>
+            <a:r>
+              <a:rPr i="1"/>
+              <a:t>environments</a:t>
+            </a:r>
+            <a:r>
+              <a:rPr/>
+              <a:t> to which builds can be deployed</a:t>
             </a:r>
           </a:p>
           <a:p>
             <a:pPr lvl="0"/>
             <a:r>
               <a:rPr/>
-              <a:t>Implement a fix for the current production state</a:t>
+              <a:t>Such extra branches:</a:t>
+            </a:r>
+          </a:p>
+          <a:p>
+            <a:pPr lvl="1"/>
+            <a:r>
+              <a:rPr/>
+              <a:t>are unnecessary</a:t>
+            </a:r>
+          </a:p>
+          <a:p>
+            <a:pPr lvl="1"/>
+            <a:r>
+              <a:rPr/>
+              <a:t>cause ambiguity</a:t>
+            </a:r>
+          </a:p>
+          <a:p>
+            <a:pPr lvl="1"/>
+            <a:r>
+              <a:rPr/>
+              <a:t>impose merging and building overheads</a:t>
             </a:r>
           </a:p>
           <a:p>
             <a:pPr lvl="0"/>
             <a:r>
               <a:rPr/>
-              <a:t>Use an epic branch for a significant development initiative</a:t>
+              <a:t>Deployment manager is maintaining what is deployed where and provides traceability to</a:t>
             </a:r>
           </a:p>
           <a:p>
@@ -4467,14 +4588,70 @@
             </a:pPr>
             <a:r>
               <a:rPr b="1"/>
-              <a:t>Delivering changes via a release</a:t>
+              <a:t>Testing a release candidate</a:t>
+            </a:r>
+          </a:p>
+          <a:p>
+            <a:pPr lvl="0" indent="0" marL="0">
+              <a:buNone/>
+            </a:pPr>
+            <a:r>
+              <a:rPr/>
+              <a:t>Any point in the history of </a:t>
+            </a:r>
+            <a:r>
+              <a:rPr>
+                <a:latin typeface="Courier"/>
+              </a:rPr>
+              <a:t>main</a:t>
+            </a:r>
+            <a:r>
+              <a:rPr/>
+              <a:t> can be declared a </a:t>
+            </a:r>
+            <a:r>
+              <a:rPr i="1"/>
+              <a:t>release candidate</a:t>
+            </a:r>
+            <a:r>
+              <a:rPr/>
+              <a:t>.</a:t>
+            </a:r>
+          </a:p>
+          <a:p>
+            <a:pPr lvl="0"/>
+            <a:r>
+              <a:rPr/>
+              <a:t>Build a </a:t>
+            </a:r>
+            <a:r>
+              <a:rPr i="1"/>
+              <a:t>release candidate</a:t>
+            </a:r>
+            <a:r>
+              <a:rPr/>
+              <a:t> package</a:t>
+            </a:r>
+          </a:p>
+          <a:p>
+            <a:pPr lvl="0"/>
+            <a:r>
+              <a:rPr/>
+              <a:t>Deploy it</a:t>
+            </a:r>
+          </a:p>
+          <a:p>
+            <a:pPr lvl="0"/>
+            <a:r>
+              <a:rPr/>
+              <a:t>Test it</a:t>
             </a:r>
           </a:p>
         </p:txBody>
       </p:sp>
       <p:pic>
         <p:nvPicPr>
-          <p:cNvPr descr="p1_files/figure-pptx/mermaid-figure-1.png" id="0" name="Picture 1"/>
+          <p:cNvPr descr="static/img/branching-model/defaultWorkflow_releasePipeline_RC1.png" id="0" name="Picture 1"/>
           <p:cNvPicPr>
             <a:picLocks noGrp="1" noChangeAspect="1"/>
           </p:cNvPicPr>
@@ -4488,8 +4665,8 @@
         </p:blipFill>
         <p:spPr bwMode="auto">
           <a:xfrm>
-            <a:off x="3568700" y="2184400"/>
-            <a:ext cx="5105400" cy="406400"/>
+            <a:off x="3568700" y="1320800"/>
+            <a:ext cx="5105400" cy="2159000"/>
           </a:xfrm>
           <a:prstGeom prst="rect">
             <a:avLst/>
@@ -4526,18 +4703,37 @@
       </p:grpSpPr>
       <p:sp>
         <p:nvSpPr>
-          <p:cNvPr id="3" name="Content Placeholder 2"/>
-          <p:cNvSpPr>
-            <a:spLocks noGrp="1"/>
-          </p:cNvSpPr>
-          <p:nvPr>
-            <p:ph idx="1"/>
+          <p:cNvPr id="4" name="Text Placeholder 3"/>
+          <p:cNvSpPr>
+            <a:spLocks noGrp="1"/>
+          </p:cNvSpPr>
+          <p:nvPr>
+            <p:ph idx="2" sz="half" type="body"/>
           </p:nvPr>
         </p:nvSpPr>
         <p:spPr/>
         <p:txBody>
           <a:bodyPr/>
           <a:lstStyle/>
+          <a:p>
+            <a:pPr lvl="0" indent="0" marL="0">
+              <a:buNone/>
+            </a:pPr>
+            <a:r>
+              <a:rPr/>
+              <a:t>Tag the commit (point in </a:t>
+            </a:r>
+            <a:r>
+              <a:rPr>
+                <a:latin typeface="Courier"/>
+              </a:rPr>
+              <a:t>main</a:t>
+            </a:r>
+            <a:r>
+              <a:rPr/>
+              <a:t>’s history) with a release name.</a:t>
+            </a:r>
+          </a:p>
           <a:p>
             <a:pPr lvl="0" indent="0" marL="0">
               <a:spcBef>
@@ -4547,23 +4743,50 @@
             </a:pPr>
             <a:r>
               <a:rPr b="1"/>
-              <a:t>Hot-fix for production</a:t>
+              <a:t>Deploying to production</a:t>
             </a:r>
           </a:p>
           <a:p>
             <a:pPr lvl="0" indent="0" marL="0">
-              <a:spcBef>
-                <a:spcPts val="3000"/>
-              </a:spcBef>
               <a:buNone/>
             </a:pPr>
             <a:r>
-              <a:rPr b="1"/>
-              <a:t>Using an Epic branch</a:t>
-            </a:r>
-          </a:p>
-        </p:txBody>
-      </p:sp>
+              <a:rPr/>
+              <a:t>When all the committed work items for the next planned release are ready to be shipped, and all quality gates have passed successfully and the required approvals have been issued by the appropriate reviewers, the release package and be deployed to production.</a:t>
+            </a:r>
+          </a:p>
+        </p:txBody>
+      </p:sp>
+      <p:pic>
+        <p:nvPicPr>
+          <p:cNvPr descr="static/img/branching-model/defaultWorkflow_fullPic.png" id="0" name="Picture 1"/>
+          <p:cNvPicPr>
+            <a:picLocks noGrp="1" noChangeAspect="1"/>
+          </p:cNvPicPr>
+          <p:nvPr/>
+        </p:nvPicPr>
+        <p:blipFill>
+          <a:blip r:embed="rId2"/>
+          <a:stretch>
+            <a:fillRect/>
+          </a:stretch>
+        </p:blipFill>
+        <p:spPr bwMode="auto">
+          <a:xfrm>
+            <a:off x="3568700" y="1130300"/>
+            <a:ext cx="5105400" cy="2540000"/>
+          </a:xfrm>
+          <a:prstGeom prst="rect">
+            <a:avLst/>
+          </a:prstGeom>
+          <a:noFill/>
+          <a:ln w="9525">
+            <a:noFill/>
+            <a:headEnd/>
+            <a:tailEnd/>
+          </a:ln>
+        </p:spPr>
+      </p:pic>
     </p:spTree>
   </p:cSld>
 </p:sld>

--- a/docs/p1.pptx
+++ b/docs/p1.pptx
@@ -17,6 +17,12 @@
     <p:sldId id="265" r:id="rId11"/>
     <p:sldId id="266" r:id="rId12"/>
     <p:sldId id="267" r:id="rId13"/>
+    <p:sldId id="268" r:id="rId14"/>
+    <p:sldId id="269" r:id="rId15"/>
+    <p:sldId id="270" r:id="rId16"/>
+    <p:sldId id="271" r:id="rId17"/>
+    <p:sldId id="272" r:id="rId18"/>
+    <p:sldId id="273" r:id="rId19"/>
   </p:sldIdLst>
   <p:sldSz cx="9144000" cy="5143500" type="screen16x9"/>
   <p:notesSz cx="6858000" cy="9144000"/>
@@ -3211,7 +3217,7 @@
             </a:pPr>
             <a:r>
               <a:rPr b="1"/>
-              <a:t>Release branches</a:t>
+              <a:t>Release maintenance branches</a:t>
             </a:r>
           </a:p>
           <a:p>
@@ -3484,7 +3490,12 @@
             <p:ph type="title"/>
           </p:nvPr>
         </p:nvSpPr>
-        <p:spPr/>
+        <p:spPr>
+          <a:xfrm>
+            <a:off x="457201" y="204787"/>
+            <a:ext cx="3008313" cy="871538"/>
+          </a:xfrm>
+        </p:spPr>
         <p:txBody>
           <a:bodyPr/>
           <a:lstStyle/>
@@ -3494,19 +3505,19 @@
             </a:pPr>
             <a:r>
               <a:rPr/>
-              <a:t>Worflows supported by the strategy</a:t>
-            </a:r>
-          </a:p>
-        </p:txBody>
-      </p:sp>
-      <p:sp>
-        <p:nvSpPr>
-          <p:cNvPr id="3" name="Content Placeholder 2"/>
-          <p:cNvSpPr>
-            <a:spLocks noGrp="1"/>
-          </p:cNvSpPr>
-          <p:nvPr>
-            <p:ph idx="1"/>
+              <a:t>Workflows supported by the strategy</a:t>
+            </a:r>
+          </a:p>
+        </p:txBody>
+      </p:sp>
+      <p:sp>
+        <p:nvSpPr>
+          <p:cNvPr id="4" name="Text Placeholder 3"/>
+          <p:cNvSpPr>
+            <a:spLocks noGrp="1"/>
+          </p:cNvSpPr>
+          <p:nvPr>
+            <p:ph idx="2" sz="half" type="body"/>
           </p:nvPr>
         </p:nvSpPr>
         <p:spPr/>
@@ -3522,7 +3533,60 @@
             </a:pPr>
             <a:r>
               <a:rPr b="1"/>
-              <a:t>Delivering changes via a release</a:t>
+              <a:t>The types of workflows</a:t>
+            </a:r>
+          </a:p>
+          <a:p>
+            <a:pPr lvl="0" indent="-342900" marL="342900">
+              <a:buAutoNum type="arabicParenR"/>
+            </a:pPr>
+            <a:r>
+              <a:rPr/>
+              <a:t>Work and focus on the </a:t>
+            </a:r>
+            <a:r>
+              <a:rPr b="1"/>
+              <a:t>next planned release</a:t>
+            </a:r>
+            <a:r>
+              <a:rPr/>
+              <a:t> via the </a:t>
+            </a:r>
+            <a:r>
+              <a:rPr>
+                <a:latin typeface="Courier"/>
+              </a:rPr>
+              <a:t>main</a:t>
+            </a:r>
+            <a:r>
+              <a:rPr/>
+              <a:t> branch. After planning the work items for the next release, the development team is adding changes to the main branch.</a:t>
+            </a:r>
+          </a:p>
+          <a:p>
+            <a:pPr lvl="0" indent="-342900" marL="342900">
+              <a:buAutoNum type="arabicParenR"/>
+            </a:pPr>
+            <a:r>
+              <a:rPr b="1"/>
+              <a:t>Resolution of a production problem</a:t>
+            </a:r>
+            <a:r>
+              <a:rPr/>
+              <a:t> in the currently-released version of the application by leveraging a release maintenance branch that is used for maintenance purposes,</a:t>
+            </a:r>
+          </a:p>
+          <a:p>
+            <a:pPr lvl="0" indent="-342900" marL="342900">
+              <a:buAutoNum type="arabicParenR"/>
+            </a:pPr>
+            <a:r>
+              <a:rPr b="1"/>
+              <a:t>concurrent development activities for significant development initiatives</a:t>
+            </a:r>
+            <a:r>
+              <a:rPr/>
+              <a:t>, which include multiple planned work items for a later delivery (including starting development of a future release) by creating an epic branch from a commit point in the history of main.</a:t>
             </a:r>
           </a:p>
           <a:p>
@@ -3538,6 +3602,96 @@
             </a:r>
           </a:p>
           <a:p>
+            <a:pPr lvl="0"/>
+            <a:r>
+              <a:rPr/>
+              <a:t>The process of urgent fixes for modules in the production environment follows the fix-forward approach, rather than rolling back the affected modules and reverting to the previous deployed state.</a:t>
+            </a:r>
+          </a:p>
+          <a:p>
+            <a:pPr lvl="0"/>
+            <a:r>
+              <a:rPr/>
+              <a:t>The development team starts this process by creating a </a:t>
+            </a:r>
+            <a:r>
+              <a:rPr b="1"/>
+              <a:t>release maintenance</a:t>
+            </a:r>
+            <a:r>
+              <a:rPr/>
+              <a:t> branch of the git tag that represents the most recent release, that was deployed to production.</a:t>
+            </a:r>
+          </a:p>
+        </p:txBody>
+      </p:sp>
+      <p:pic>
+        <p:nvPicPr>
+          <p:cNvPr descr="static/img/branching-model/releaseMaintenanceWorkflow_overview.png" id="0" name="Picture 1"/>
+          <p:cNvPicPr>
+            <a:picLocks noGrp="1" noChangeAspect="1"/>
+          </p:cNvPicPr>
+          <p:nvPr/>
+        </p:nvPicPr>
+        <p:blipFill>
+          <a:blip r:embed="rId2"/>
+          <a:stretch>
+            <a:fillRect/>
+          </a:stretch>
+        </p:blipFill>
+        <p:spPr bwMode="auto">
+          <a:xfrm>
+            <a:off x="4000500" y="203200"/>
+            <a:ext cx="4241800" cy="4381500"/>
+          </a:xfrm>
+          <a:prstGeom prst="rect">
+            <a:avLst/>
+          </a:prstGeom>
+          <a:noFill/>
+          <a:ln w="9525">
+            <a:noFill/>
+            <a:headEnd/>
+            <a:tailEnd/>
+          </a:ln>
+        </p:spPr>
+      </p:pic>
+    </p:spTree>
+  </p:cSld>
+</p:sld>
+</file>
+
+<file path=ppt/slides/slide13.xml><?xml version="1.0" encoding="utf-8"?>
+<p:sld xmlns:a="http://schemas.openxmlformats.org/drawingml/2006/main" xmlns:r="http://schemas.openxmlformats.org/officeDocument/2006/relationships" xmlns:p="http://schemas.openxmlformats.org/presentationml/2006/main">
+  <p:cSld>
+    <p:spTree>
+      <p:nvGrpSpPr>
+        <p:cNvPr id="1" name=""/>
+        <p:cNvGrpSpPr/>
+        <p:nvPr/>
+      </p:nvGrpSpPr>
+      <p:grpSpPr>
+        <a:xfrm>
+          <a:off x="0" y="0"/>
+          <a:ext cx="0" cy="0"/>
+          <a:chOff x="0" y="0"/>
+          <a:chExt cx="0" cy="0"/>
+        </a:xfrm>
+      </p:grpSpPr>
+      <p:sp>
+        <p:nvSpPr>
+          <p:cNvPr id="4" name="Text Placeholder 3"/>
+          <p:cNvSpPr>
+            <a:spLocks noGrp="1"/>
+          </p:cNvSpPr>
+          <p:nvPr>
+            <p:ph idx="2" sz="half" type="body"/>
+          </p:nvPr>
+        </p:nvSpPr>
+        <p:spPr/>
+        <p:txBody>
+          <a:bodyPr/>
+          <a:lstStyle/>
+          <a:p>
             <a:pPr lvl="0" indent="0" marL="0">
               <a:spcBef>
                 <a:spcPts val="3000"/>
@@ -3546,7 +3700,580 @@
             </a:pPr>
             <a:r>
               <a:rPr b="1"/>
-              <a:t>Using an Epic branch</a:t>
+              <a:t>Building the fix package</a:t>
+            </a:r>
+          </a:p>
+          <a:p>
+            <a:pPr lvl="0"/>
+            <a:r>
+              <a:rPr/>
+              <a:t>Changes contributed to the release maintenance branch are build and packaged.</a:t>
+            </a:r>
+          </a:p>
+          <a:p>
+            <a:pPr lvl="0"/>
+            <a:r>
+              <a:rPr/>
+              <a:t>The fix package is tested in the appropriate test env</a:t>
+            </a:r>
+          </a:p>
+          <a:p>
+            <a:pPr lvl="0"/>
+            <a:r>
+              <a:rPr/>
+              <a:t>Finally deployed to production</a:t>
+            </a:r>
+          </a:p>
+        </p:txBody>
+      </p:sp>
+      <p:pic>
+        <p:nvPicPr>
+          <p:cNvPr descr="static/img/branching-model/releaseMaintenanceWorkflow_fixPackageBuild.png" id="0" name="Picture 1"/>
+          <p:cNvPicPr>
+            <a:picLocks noGrp="1" noChangeAspect="1"/>
+          </p:cNvPicPr>
+          <p:nvPr/>
+        </p:nvPicPr>
+        <p:blipFill>
+          <a:blip r:embed="rId2"/>
+          <a:stretch>
+            <a:fillRect/>
+          </a:stretch>
+        </p:blipFill>
+        <p:spPr bwMode="auto">
+          <a:xfrm>
+            <a:off x="3568700" y="355600"/>
+            <a:ext cx="5105400" cy="4064000"/>
+          </a:xfrm>
+          <a:prstGeom prst="rect">
+            <a:avLst/>
+          </a:prstGeom>
+          <a:noFill/>
+          <a:ln w="9525">
+            <a:noFill/>
+            <a:headEnd/>
+            <a:tailEnd/>
+          </a:ln>
+        </p:spPr>
+      </p:pic>
+    </p:spTree>
+  </p:cSld>
+</p:sld>
+</file>
+
+<file path=ppt/slides/slide14.xml><?xml version="1.0" encoding="utf-8"?>
+<p:sld xmlns:a="http://schemas.openxmlformats.org/drawingml/2006/main" xmlns:r="http://schemas.openxmlformats.org/officeDocument/2006/relationships" xmlns:p="http://schemas.openxmlformats.org/presentationml/2006/main">
+  <p:cSld>
+    <p:spTree>
+      <p:nvGrpSpPr>
+        <p:cNvPr id="1" name=""/>
+        <p:cNvGrpSpPr/>
+        <p:nvPr/>
+      </p:nvGrpSpPr>
+      <p:grpSpPr>
+        <a:xfrm>
+          <a:off x="0" y="0"/>
+          <a:ext cx="0" cy="0"/>
+          <a:chOff x="0" y="0"/>
+          <a:chExt cx="0" cy="0"/>
+        </a:xfrm>
+      </p:grpSpPr>
+      <p:sp>
+        <p:nvSpPr>
+          <p:cNvPr id="4" name="Text Placeholder 3"/>
+          <p:cNvSpPr>
+            <a:spLocks noGrp="1"/>
+          </p:cNvSpPr>
+          <p:nvPr>
+            <p:ph idx="2" sz="half" type="body"/>
+          </p:nvPr>
+        </p:nvSpPr>
+        <p:spPr/>
+        <p:txBody>
+          <a:bodyPr/>
+          <a:lstStyle/>
+          <a:p>
+            <a:pPr lvl="0"/>
+            <a:r>
+              <a:rPr/>
+              <a:t>The commit is tagged as the new version </a:t>
+            </a:r>
+            <a:r>
+              <a:rPr>
+                <a:latin typeface="Courier"/>
+              </a:rPr>
+              <a:t>2.1.1</a:t>
+            </a:r>
+            <a:r>
+              <a:rPr/>
+              <a:t>.</a:t>
+            </a:r>
+          </a:p>
+          <a:p>
+            <a:pPr lvl="0" indent="0" marL="0">
+              <a:spcBef>
+                <a:spcPts val="3000"/>
+              </a:spcBef>
+              <a:buNone/>
+            </a:pPr>
+            <a:r>
+              <a:rPr b="1"/>
+              <a:t>Using the Epic branch workflow</a:t>
+            </a:r>
+          </a:p>
+          <a:p>
+            <a:pPr lvl="0" indent="0" marL="0">
+              <a:buNone/>
+            </a:pPr>
+            <a:r>
+              <a:rPr/>
+              <a:t>Dealing with significant development initiatives like</a:t>
+            </a:r>
+          </a:p>
+          <a:p>
+            <a:pPr lvl="0"/>
+            <a:r>
+              <a:rPr/>
+              <a:t>Updates in regulatory frameworks</a:t>
+            </a:r>
+          </a:p>
+          <a:p>
+            <a:pPr lvl="0"/>
+            <a:r>
+              <a:rPr/>
+              <a:t>Start the development phase of </a:t>
+            </a:r>
+            <a:r>
+              <a:rPr i="1"/>
+              <a:t>subsequent</a:t>
+            </a:r>
+            <a:r>
+              <a:rPr/>
+              <a:t> releases</a:t>
+            </a:r>
+          </a:p>
+          <a:p>
+            <a:pPr lvl="0" indent="0" marL="0">
+              <a:buNone/>
+            </a:pPr>
+            <a:r>
+              <a:rPr/>
+              <a:t>-&gt; A process to work independently from the default workflow.</a:t>
+            </a:r>
+          </a:p>
+          <a:p>
+            <a:pPr lvl="0" indent="0" marL="0">
+              <a:spcBef>
+                <a:spcPts val="3000"/>
+              </a:spcBef>
+              <a:buNone/>
+            </a:pPr>
+            <a:r>
+              <a:rPr b="1"/>
+              <a:t>Epic branch workflow</a:t>
+            </a:r>
+          </a:p>
+        </p:txBody>
+      </p:sp>
+      <p:pic>
+        <p:nvPicPr>
+          <p:cNvPr descr="static/img/branching-model/image12.png" id="0" name="Picture 1"/>
+          <p:cNvPicPr>
+            <a:picLocks noGrp="1" noChangeAspect="1"/>
+          </p:cNvPicPr>
+          <p:nvPr/>
+        </p:nvPicPr>
+        <p:blipFill>
+          <a:blip r:embed="rId2"/>
+          <a:stretch>
+            <a:fillRect/>
+          </a:stretch>
+        </p:blipFill>
+        <p:spPr bwMode="auto">
+          <a:xfrm>
+            <a:off x="3568700" y="1244600"/>
+            <a:ext cx="5105400" cy="2311400"/>
+          </a:xfrm>
+          <a:prstGeom prst="rect">
+            <a:avLst/>
+          </a:prstGeom>
+          <a:noFill/>
+          <a:ln w="9525">
+            <a:noFill/>
+            <a:headEnd/>
+            <a:tailEnd/>
+          </a:ln>
+        </p:spPr>
+      </p:pic>
+    </p:spTree>
+  </p:cSld>
+</p:sld>
+</file>
+
+<file path=ppt/slides/slide15.xml><?xml version="1.0" encoding="utf-8"?>
+<p:sld xmlns:a="http://schemas.openxmlformats.org/drawingml/2006/main" xmlns:r="http://schemas.openxmlformats.org/officeDocument/2006/relationships" xmlns:p="http://schemas.openxmlformats.org/presentationml/2006/main">
+  <p:cSld>
+    <p:spTree>
+      <p:nvGrpSpPr>
+        <p:cNvPr id="1" name=""/>
+        <p:cNvGrpSpPr/>
+        <p:nvPr/>
+      </p:nvGrpSpPr>
+      <p:grpSpPr>
+        <a:xfrm>
+          <a:off x="0" y="0"/>
+          <a:ext cx="0" cy="0"/>
+          <a:chOff x="0" y="0"/>
+          <a:chExt cx="0" cy="0"/>
+        </a:xfrm>
+      </p:grpSpPr>
+      <p:sp>
+        <p:nvSpPr>
+          <p:cNvPr id="3" name="Content Placeholder 2"/>
+          <p:cNvSpPr>
+            <a:spLocks noGrp="1"/>
+          </p:cNvSpPr>
+          <p:nvPr>
+            <p:ph idx="1"/>
+          </p:nvPr>
+        </p:nvSpPr>
+        <p:spPr/>
+        <p:txBody>
+          <a:bodyPr/>
+          <a:lstStyle/>
+          <a:p>
+            <a:pPr lvl="0" indent="0" marL="0">
+              <a:spcBef>
+                <a:spcPts val="3000"/>
+              </a:spcBef>
+              <a:buNone/>
+            </a:pPr>
+            <a:r>
+              <a:rPr b="1"/>
+              <a:t>Guidelines and policies in the epic branch workflow</a:t>
+            </a:r>
+          </a:p>
+          <a:p>
+            <a:pPr lvl="0"/>
+            <a:r>
+              <a:rPr/>
+              <a:t>Frequently merge updates from </a:t>
+            </a:r>
+            <a:r>
+              <a:rPr>
+                <a:latin typeface="Courier"/>
+              </a:rPr>
+              <a:t>main</a:t>
+            </a:r>
+            <a:r>
+              <a:rPr/>
+              <a:t> into the epic branch to avoid making the merge of the </a:t>
+            </a:r>
+            <a:r>
+              <a:rPr>
+                <a:latin typeface="Courier"/>
+              </a:rPr>
+              <a:t>epic</a:t>
+            </a:r>
+            <a:r>
+              <a:rPr/>
+              <a:t> branch into </a:t>
+            </a:r>
+            <a:r>
+              <a:rPr>
+                <a:latin typeface="Courier"/>
+              </a:rPr>
+              <a:t>main</a:t>
+            </a:r>
+            <a:r>
+              <a:rPr/>
+              <a:t> difficult.</a:t>
+            </a:r>
+          </a:p>
+          <a:p>
+            <a:pPr lvl="0"/>
+            <a:r>
+              <a:rPr/>
+              <a:t>Preliminary packages must not be deployed to a production runtime.</a:t>
+            </a:r>
+          </a:p>
+        </p:txBody>
+      </p:sp>
+    </p:spTree>
+  </p:cSld>
+</p:sld>
+</file>
+
+<file path=ppt/slides/slide16.xml><?xml version="1.0" encoding="utf-8"?>
+<p:sld xmlns:a="http://schemas.openxmlformats.org/drawingml/2006/main" xmlns:r="http://schemas.openxmlformats.org/officeDocument/2006/relationships" xmlns:p="http://schemas.openxmlformats.org/presentationml/2006/main">
+  <p:cSld>
+    <p:spTree>
+      <p:nvGrpSpPr>
+        <p:cNvPr id="1" name=""/>
+        <p:cNvGrpSpPr/>
+        <p:nvPr/>
+      </p:nvGrpSpPr>
+      <p:grpSpPr>
+        <a:xfrm>
+          <a:off x="0" y="0"/>
+          <a:ext cx="0" cy="0"/>
+          <a:chOff x="0" y="0"/>
+          <a:chExt cx="0" cy="0"/>
+        </a:xfrm>
+      </p:grpSpPr>
+      <p:sp>
+        <p:nvSpPr>
+          <p:cNvPr id="2" name="Title 1"/>
+          <p:cNvSpPr>
+            <a:spLocks noGrp="1"/>
+          </p:cNvSpPr>
+          <p:nvPr>
+            <p:ph type="title"/>
+          </p:nvPr>
+        </p:nvSpPr>
+        <p:spPr>
+          <a:xfrm>
+            <a:off x="457201" y="204787"/>
+            <a:ext cx="3008313" cy="871538"/>
+          </a:xfrm>
+        </p:spPr>
+        <p:txBody>
+          <a:bodyPr/>
+          <a:lstStyle/>
+          <a:p>
+            <a:pPr lvl="0" indent="0" marL="0">
+              <a:buNone/>
+            </a:pPr>
+            <a:r>
+              <a:rPr/>
+              <a:t>Pipeline implementations</a:t>
+            </a:r>
+          </a:p>
+        </p:txBody>
+      </p:sp>
+      <p:sp>
+        <p:nvSpPr>
+          <p:cNvPr id="4" name="Text Placeholder 3"/>
+          <p:cNvSpPr>
+            <a:spLocks noGrp="1"/>
+          </p:cNvSpPr>
+          <p:nvPr>
+            <p:ph idx="2" sz="half" type="body"/>
+          </p:nvPr>
+        </p:nvSpPr>
+        <p:spPr/>
+        <p:txBody>
+          <a:bodyPr/>
+          <a:lstStyle/>
+          <a:p>
+            <a:pPr lvl="0" indent="0" marL="0">
+              <a:spcBef>
+                <a:spcPts val="3000"/>
+              </a:spcBef>
+              <a:buNone/>
+            </a:pPr>
+            <a:r>
+              <a:rPr b="1"/>
+              <a:t>Pipeline principles</a:t>
+            </a:r>
+          </a:p>
+          <a:p>
+            <a:pPr lvl="0" indent="0" marL="0">
+              <a:buNone/>
+            </a:pPr>
+            <a:r>
+              <a:rPr/>
+              <a:t>Git tags are leveraged to calculate the changes for the next planned release</a:t>
+            </a:r>
+          </a:p>
+        </p:txBody>
+      </p:sp>
+      <p:pic>
+        <p:nvPicPr>
+          <p:cNvPr descr="static/img/branching-model/basicBuildPipeline-computeChanges-default-workflow.png" id="0" name="Picture 1"/>
+          <p:cNvPicPr>
+            <a:picLocks noGrp="1" noChangeAspect="1"/>
+          </p:cNvPicPr>
+          <p:nvPr/>
+        </p:nvPicPr>
+        <p:blipFill>
+          <a:blip r:embed="rId2"/>
+          <a:stretch>
+            <a:fillRect/>
+          </a:stretch>
+        </p:blipFill>
+        <p:spPr bwMode="auto">
+          <a:xfrm>
+            <a:off x="3568700" y="1066800"/>
+            <a:ext cx="5105400" cy="2641600"/>
+          </a:xfrm>
+          <a:prstGeom prst="rect">
+            <a:avLst/>
+          </a:prstGeom>
+          <a:noFill/>
+          <a:ln w="9525">
+            <a:noFill/>
+            <a:headEnd/>
+            <a:tailEnd/>
+          </a:ln>
+        </p:spPr>
+      </p:pic>
+    </p:spTree>
+  </p:cSld>
+</p:sld>
+</file>
+
+<file path=ppt/slides/slide17.xml><?xml version="1.0" encoding="utf-8"?>
+<p:sld xmlns:a="http://schemas.openxmlformats.org/drawingml/2006/main" xmlns:r="http://schemas.openxmlformats.org/officeDocument/2006/relationships" xmlns:p="http://schemas.openxmlformats.org/presentationml/2006/main">
+  <p:cSld>
+    <p:spTree>
+      <p:nvGrpSpPr>
+        <p:cNvPr id="1" name=""/>
+        <p:cNvGrpSpPr/>
+        <p:nvPr/>
+      </p:nvGrpSpPr>
+      <p:grpSpPr>
+        <a:xfrm>
+          <a:off x="0" y="0"/>
+          <a:ext cx="0" cy="0"/>
+          <a:chOff x="0" y="0"/>
+          <a:chExt cx="0" cy="0"/>
+        </a:xfrm>
+      </p:grpSpPr>
+      <p:sp>
+        <p:nvSpPr>
+          <p:cNvPr id="3" name="Content Placeholder 2"/>
+          <p:cNvSpPr>
+            <a:spLocks noGrp="1"/>
+          </p:cNvSpPr>
+          <p:nvPr>
+            <p:ph idx="1"/>
+          </p:nvPr>
+        </p:nvSpPr>
+        <p:spPr/>
+        <p:txBody>
+          <a:bodyPr/>
+          <a:lstStyle/>
+          <a:p>
+            <a:pPr lvl="0" indent="0" marL="0">
+              <a:buNone/>
+            </a:pPr>
+            <a:r>
+              <a:rPr/>
+              <a:t>Packages are always cumulative.</a:t>
+            </a:r>
+          </a:p>
+          <a:p>
+            <a:pPr lvl="0" indent="0" marL="0">
+              <a:spcBef>
+                <a:spcPts val="3000"/>
+              </a:spcBef>
+              <a:buNone/>
+            </a:pPr>
+            <a:r>
+              <a:rPr b="1"/>
+              <a:t>Basic Build pipeline</a:t>
+            </a:r>
+          </a:p>
+          <a:p>
+            <a:pPr lvl="0"/>
+            <a:r>
+              <a:rPr/>
+              <a:t>(Typically) runs on each commit added to the history of a branch</a:t>
+            </a:r>
+          </a:p>
+          <a:p>
+            <a:pPr lvl="0"/>
+            <a:r>
+              <a:rPr/>
+              <a:t>Produces a preliminary package that is stored in a binary repository</a:t>
+            </a:r>
+          </a:p>
+          <a:p>
+            <a:pPr lvl="0"/>
+            <a:r>
+              <a:rPr/>
+              <a:t>May include an automated step to install it into the DEV-TEST environment</a:t>
+            </a:r>
+          </a:p>
+          <a:p>
+            <a:pPr lvl="0" indent="0" marL="0">
+              <a:spcBef>
+                <a:spcPts val="3000"/>
+              </a:spcBef>
+              <a:buNone/>
+            </a:pPr>
+            <a:r>
+              <a:rPr b="1"/>
+              <a:t>Release Pipeline</a:t>
+            </a:r>
+          </a:p>
+          <a:p>
+            <a:pPr lvl="0"/>
+            <a:r>
+              <a:rPr/>
+              <a:t>Produces binaries optimized for performance</a:t>
+            </a:r>
+          </a:p>
+          <a:p>
+            <a:pPr lvl="0"/>
+            <a:r>
+              <a:rPr/>
+              <a:t>(Typically) is manually requested by the development team when a level of stability is reached</a:t>
+            </a:r>
+          </a:p>
+          <a:p>
+            <a:pPr lvl="0"/>
+            <a:r>
+              <a:rPr/>
+              <a:t>produces a release candidate package that can be deployed to higher test environments.</a:t>
+            </a:r>
+          </a:p>
+        </p:txBody>
+      </p:sp>
+    </p:spTree>
+  </p:cSld>
+</p:sld>
+</file>
+
+<file path=ppt/slides/slide18.xml><?xml version="1.0" encoding="utf-8"?>
+<p:sld xmlns:a="http://schemas.openxmlformats.org/drawingml/2006/main" xmlns:r="http://schemas.openxmlformats.org/officeDocument/2006/relationships" xmlns:p="http://schemas.openxmlformats.org/presentationml/2006/main">
+  <p:cSld>
+    <p:spTree>
+      <p:nvGrpSpPr>
+        <p:cNvPr id="1" name=""/>
+        <p:cNvGrpSpPr/>
+        <p:nvPr/>
+      </p:nvGrpSpPr>
+      <p:grpSpPr>
+        <a:xfrm>
+          <a:off x="0" y="0"/>
+          <a:ext cx="0" cy="0"/>
+          <a:chOff x="0" y="0"/>
+          <a:chExt cx="0" cy="0"/>
+        </a:xfrm>
+      </p:grpSpPr>
+      <p:sp>
+        <p:nvSpPr>
+          <p:cNvPr id="2" name="Title 1"/>
+          <p:cNvSpPr>
+            <a:spLocks noGrp="1"/>
+          </p:cNvSpPr>
+          <p:nvPr>
+            <p:ph type="title"/>
+          </p:nvPr>
+        </p:nvSpPr>
+        <p:spPr/>
+        <p:txBody>
+          <a:bodyPr/>
+          <a:lstStyle/>
+          <a:p>
+            <a:pPr lvl="0" indent="0" marL="0">
+              <a:buNone/>
+            </a:pPr>
+            <a:r>
+              <a:rPr/>
+              <a:t>Collateral</a:t>
             </a:r>
           </a:p>
         </p:txBody>
@@ -3610,49 +4337,21 @@
             <a:pPr lvl="0"/>
             <a:r>
               <a:rPr/>
-              <a:t>Choosing a branching model and workflow</a:t>
-            </a:r>
-          </a:p>
-          <a:p>
-            <a:pPr lvl="0"/>
-            <a:r>
-              <a:rPr/>
-              <a:t>Starting simple</a:t>
-            </a:r>
-          </a:p>
-          <a:p>
-            <a:pPr lvl="0"/>
-            <a:r>
-              <a:rPr/>
-              <a:t>Scaling up</a:t>
-            </a:r>
-          </a:p>
-          <a:p>
-            <a:pPr lvl="0"/>
-            <a:r>
-              <a:rPr/>
-              <a:t>Integration branches</a:t>
-            </a:r>
-          </a:p>
-          <a:p>
-            <a:pPr lvl="0"/>
-            <a:r>
-              <a:rPr/>
-              <a:t>Delivering changes via a release</a:t>
-            </a:r>
-          </a:p>
-          <a:p>
-            <a:pPr lvl="0"/>
-            <a:r>
-              <a:rPr/>
-              <a:t>Hot-fix for production</a:t>
-            </a:r>
-          </a:p>
-          <a:p>
-            <a:pPr lvl="0"/>
-            <a:r>
-              <a:rPr/>
-              <a:t>Using an Epic branch</a:t>
+              <a:t>Fundamentals of the branching strategy</a:t>
+            </a:r>
+          </a:p>
+          <a:p>
+            <a:pPr lvl="0"/>
+            <a:r>
+              <a:rPr/>
+              <a:t>Supported workflows</a:t>
+            </a:r>
+          </a:p>
+          <a:p>
+            <a:pPr lvl="0"/>
+            <a:r>
+              <a:rPr/>
+              <a:t>Implementing pipelines</a:t>
             </a:r>
           </a:p>
         </p:txBody>
@@ -4221,7 +4920,7 @@
             </a:pPr>
             <a:r>
               <a:rPr b="1"/>
-              <a:t>Merging into </a:t>
+              <a:t>Preparing to Merge into </a:t>
             </a:r>
             <a:r>
               <a:rPr b="1">
@@ -4352,6 +5051,24 @@
           <a:lstStyle/>
           <a:p>
             <a:pPr lvl="0" indent="0" marL="0">
+              <a:spcBef>
+                <a:spcPts val="3000"/>
+              </a:spcBef>
+              <a:buNone/>
+            </a:pPr>
+            <a:r>
+              <a:rPr b="1"/>
+              <a:t>Merging into </a:t>
+            </a:r>
+            <a:r>
+              <a:rPr b="1">
+                <a:latin typeface="Courier"/>
+              </a:rPr>
+              <a:t>main</a:t>
+            </a:r>
+          </a:p>
+          <a:p>
+            <a:pPr lvl="0" indent="0" marL="0">
               <a:buNone/>
             </a:pPr>
             <a:r>
@@ -4461,6 +5178,49 @@
         <p:txBody>
           <a:bodyPr/>
           <a:lstStyle/>
+          <a:p>
+            <a:pPr lvl="0" indent="0" marL="0">
+              <a:buNone/>
+            </a:pPr>
+            <a:r>
+              <a:rPr>
+                <a:latin typeface="Courier"/>
+              </a:rPr>
+              <a:t>main</a:t>
+            </a:r>
+            <a:r>
+              <a:rPr/>
+              <a:t> and other long-lived branches are </a:t>
+            </a:r>
+            <a:r>
+              <a:rPr i="1"/>
+              <a:t>protected</a:t>
+            </a:r>
+            <a:r>
+              <a:rPr/>
+              <a:t> (not everyone can </a:t>
+            </a:r>
+            <a:r>
+              <a:rPr>
+                <a:latin typeface="Courier"/>
+              </a:rPr>
+              <a:t>push</a:t>
+            </a:r>
+            <a:r>
+              <a:rPr/>
+              <a:t> or </a:t>
+            </a:r>
+            <a:r>
+              <a:rPr>
+                <a:latin typeface="Courier"/>
+              </a:rPr>
+              <a:t>merge</a:t>
+            </a:r>
+            <a:r>
+              <a:rPr/>
+              <a:t> to them).</a:t>
+            </a:r>
+          </a:p>
           <a:p>
             <a:pPr lvl="0" indent="0" marL="0">
               <a:spcBef>

--- a/docs/p1.pptx
+++ b/docs/p1.pptx
@@ -3526,6 +3526,15 @@
           <a:lstStyle/>
           <a:p>
             <a:pPr lvl="0" indent="0" marL="0">
+              <a:buNone/>
+            </a:pPr>
+            <a:r>
+              <a:rPr/>
+              <a:t>How do teams work with and benefit from the branch strategy?</a:t>
+            </a:r>
+          </a:p>
+          <a:p>
+            <a:pPr lvl="0" indent="0" marL="0">
               <a:spcBef>
                 <a:spcPts val="3000"/>
               </a:spcBef>
@@ -3587,6 +3596,27 @@
             <a:r>
               <a:rPr/>
               <a:t>, which include multiple planned work items for a later delivery (including starting development of a future release) by creating an epic branch from a commit point in the history of main.</a:t>
+            </a:r>
+          </a:p>
+          <a:p>
+            <a:pPr lvl="0" indent="0" marL="0">
+              <a:spcBef>
+                <a:spcPts val="3000"/>
+              </a:spcBef>
+              <a:buNone/>
+            </a:pPr>
+            <a:r>
+              <a:rPr b="1"/>
+              <a:t>Features for the next planned release</a:t>
+            </a:r>
+          </a:p>
+          <a:p>
+            <a:pPr lvl="0" indent="0" marL="0">
+              <a:buNone/>
+            </a:pPr>
+            <a:r>
+              <a:rPr i="1"/>
+              <a:t>TO-DO</a:t>
             </a:r>
           </a:p>
           <a:p>
@@ -3714,7 +3744,7 @@
             <a:pPr lvl="0"/>
             <a:r>
               <a:rPr/>
-              <a:t>The fix package is tested in the appropriate test env</a:t>
+              <a:t>The fix package is tested in the appropriate test environment(s)</a:t>
             </a:r>
           </a:p>
           <a:p>
@@ -3827,7 +3857,7 @@
             </a:pPr>
             <a:r>
               <a:rPr/>
-              <a:t>Dealing with significant development initiatives like</a:t>
+              <a:t>Dealing with significant development initiatives such as:</a:t>
             </a:r>
           </a:p>
           <a:p>
@@ -3858,7 +3888,7 @@
             </a:pPr>
             <a:r>
               <a:rPr/>
-              <a:t>-&gt; A process to work independently from the default workflow.</a:t>
+              <a:t>→ A process to work independently from the default workflow.</a:t>
             </a:r>
           </a:p>
           <a:p>
@@ -3957,7 +3987,7 @@
             <a:pPr lvl="0"/>
             <a:r>
               <a:rPr/>
-              <a:t>Frequently merge updates from </a:t>
+              <a:t>Frequently synchronize with </a:t>
             </a:r>
             <a:r>
               <a:rPr>
@@ -4083,7 +4113,7 @@
             </a:pPr>
             <a:r>
               <a:rPr/>
-              <a:t>Git tags are leveraged to calculate the changes for the next planned release</a:t>
+              <a:t>Git tags are used to calculate the changes for the next planned release</a:t>
             </a:r>
           </a:p>
         </p:txBody>
@@ -4205,7 +4235,7 @@
             </a:pPr>
             <a:r>
               <a:rPr b="1"/>
-              <a:t>Release Pipeline</a:t>
+              <a:t>Release pipeline</a:t>
             </a:r>
           </a:p>
           <a:p>
@@ -4522,6 +4552,21 @@
             <a:r>
               <a:rPr/>
               <a:t>For each user’s experience</a:t>
+            </a:r>
+          </a:p>
+          <a:p>
+            <a:pPr lvl="0"/>
+            <a:r>
+              <a:rPr/>
+              <a:t>Be </a:t>
+            </a:r>
+            <a:r>
+              <a:rPr i="1"/>
+              <a:t>git-native</a:t>
+            </a:r>
+            <a:r>
+              <a:rPr/>
+              <a:t>!</a:t>
             </a:r>
           </a:p>
           <a:p>
@@ -5230,7 +5275,7 @@
             </a:pPr>
             <a:r>
               <a:rPr b="1"/>
-              <a:t>Before you ask… no, no </a:t>
+              <a:t>Before you ask… no, there is no </a:t>
             </a:r>
             <a:r>
               <a:rPr b="1" i="1"/>

--- a/docs/p1.pptx
+++ b/docs/p1.pptx
@@ -4223,7 +4223,7 @@
             <a:pPr lvl="0"/>
             <a:r>
               <a:rPr/>
-              <a:t>May include an automated step to install it into the DEV-TEST environment</a:t>
+              <a:t>May include an automated step to deploy it into the DEV-TEST environment</a:t>
             </a:r>
           </a:p>
           <a:p>
@@ -4256,7 +4256,7 @@
             <a:pPr lvl="0"/>
             <a:r>
               <a:rPr/>
-              <a:t>produces a release candidate package that can be deployed to higher test environments.</a:t>
+              <a:t>Produces a release candidate package that can be deployed to higher test environments.</a:t>
             </a:r>
           </a:p>
         </p:txBody>
@@ -4509,6 +4509,21 @@
             </a:r>
           </a:p>
           <a:p>
+            <a:pPr lvl="1"/>
+            <a:r>
+              <a:rPr/>
+              <a:t>Aim to be </a:t>
+            </a:r>
+            <a:r>
+              <a:rPr i="1"/>
+              <a:t>git-native</a:t>
+            </a:r>
+            <a:r>
+              <a:rPr/>
+              <a:t>!</a:t>
+            </a:r>
+          </a:p>
+          <a:p>
             <a:pPr lvl="0"/>
             <a:r>
               <a:rPr/>
@@ -4552,21 +4567,6 @@
             <a:r>
               <a:rPr/>
               <a:t>For each user’s experience</a:t>
-            </a:r>
-          </a:p>
-          <a:p>
-            <a:pPr lvl="0"/>
-            <a:r>
-              <a:rPr/>
-              <a:t>Be </a:t>
-            </a:r>
-            <a:r>
-              <a:rPr i="1"/>
-              <a:t>git-native</a:t>
-            </a:r>
-            <a:r>
-              <a:rPr/>
-              <a:t>!</a:t>
             </a:r>
           </a:p>
           <a:p>
@@ -4647,6 +4647,18 @@
             <a:r>
               <a:rPr/>
               <a:t>We know it is sometimes unavoidable for work to take longer than one release cycle and we accommodate that as a variant of the base workflow.</a:t>
+            </a:r>
+          </a:p>
+          <a:p>
+            <a:pPr lvl="0" indent="0" marL="0">
+              <a:spcBef>
+                <a:spcPts val="3000"/>
+              </a:spcBef>
+              <a:buNone/>
+            </a:pPr>
+            <a:r>
+              <a:rPr b="1"/>
+              <a:t>Convention over configuration</a:t>
             </a:r>
           </a:p>
         </p:txBody>

--- a/docs/p1.pptx
+++ b/docs/p1.pptx
@@ -3600,6 +3600,15 @@
           </a:p>
           <a:p>
             <a:pPr lvl="0" indent="0" marL="0">
+              <a:buNone/>
+            </a:pPr>
+            <a:r>
+              <a:rPr i="1"/>
+              <a:t>The following narratives complement the structure.</a:t>
+            </a:r>
+          </a:p>
+          <a:p>
+            <a:pPr lvl="0" indent="0" marL="0">
               <a:spcBef>
                 <a:spcPts val="3000"/>
               </a:spcBef>
@@ -3615,8 +3624,155 @@
               <a:buNone/>
             </a:pPr>
             <a:r>
+              <a:rPr b="1"/>
+              <a:t>Developer activities:</a:t>
+            </a:r>
+          </a:p>
+          <a:p>
+            <a:pPr lvl="0" indent="-342900" marL="342900">
+              <a:buAutoNum type="arabicPeriod"/>
+            </a:pPr>
+            <a:r>
+              <a:rPr/>
+              <a:t>Take item from backlog</a:t>
+            </a:r>
+          </a:p>
+          <a:p>
+            <a:pPr lvl="0" indent="-342900" marL="342900">
+              <a:buAutoNum type="arabicPeriod"/>
+            </a:pPr>
+            <a:r>
+              <a:rPr/>
+              <a:t>Create feature branch</a:t>
+            </a:r>
+          </a:p>
+          <a:p>
+            <a:pPr lvl="0" indent="-342900" marL="342900">
+              <a:buAutoNum type="arabicPeriod"/>
+            </a:pPr>
+            <a:r>
+              <a:rPr/>
+              <a:t>Code locally</a:t>
+            </a:r>
+          </a:p>
+          <a:p>
+            <a:pPr lvl="0" indent="-342900" marL="342900">
+              <a:buAutoNum type="arabicPeriod"/>
+            </a:pPr>
+            <a:r>
+              <a:rPr/>
+              <a:t>Build with DBB User Build</a:t>
+            </a:r>
+          </a:p>
+          <a:p>
+            <a:pPr lvl="0" indent="-342900" marL="342900">
+              <a:buAutoNum type="arabicPeriod"/>
+            </a:pPr>
+            <a:r>
+              <a:rPr/>
+              <a:t>Commit into feature branch, build and test feature functionality</a:t>
+            </a:r>
+          </a:p>
+          <a:p>
+            <a:pPr lvl="0" indent="-342900" marL="342900">
+              <a:buAutoNum type="arabicPeriod"/>
+            </a:pPr>
+            <a:r>
+              <a:rPr/>
+              <a:t>Create Pull Request for review and approval</a:t>
+            </a:r>
+          </a:p>
+          <a:p>
+            <a:pPr lvl="0" indent="0" marL="0">
+              <a:spcBef>
+                <a:spcPts val="3000"/>
+              </a:spcBef>
+              <a:buNone/>
+            </a:pPr>
+            <a:r>
+              <a:rPr b="1"/>
+              <a:t>Features for the next planned release</a:t>
+            </a:r>
+          </a:p>
+          <a:p>
+            <a:pPr lvl="0" indent="0" marL="0">
+              <a:buNone/>
+            </a:pPr>
+            <a:r>
+              <a:rPr b="1"/>
+              <a:t>Release control activities:</a:t>
+            </a:r>
+          </a:p>
+          <a:p>
+            <a:pPr lvl="0" indent="-342900" marL="342900">
+              <a:buAutoNum startAt="7" type="arabicPeriod"/>
+            </a:pPr>
+            <a:r>
+              <a:rPr/>
+              <a:t>Merge approved branches to </a:t>
+            </a:r>
+            <a:r>
+              <a:rPr>
+                <a:latin typeface="Courier"/>
+              </a:rPr>
+              <a:t>main</a:t>
+            </a:r>
+            <a:r>
+              <a:rPr/>
+              <a:t> and build</a:t>
+            </a:r>
+          </a:p>
+          <a:p>
+            <a:pPr lvl="0" indent="-342900" marL="342900">
+              <a:buAutoNum startAt="7" type="arabicPeriod"/>
+            </a:pPr>
+            <a:r>
+              <a:rPr/>
+              <a:t>When planned features have merged, build and tag Release Candidate package</a:t>
+            </a:r>
+          </a:p>
+          <a:p>
+            <a:pPr lvl="0" indent="-342900" marL="342900">
+              <a:buAutoNum startAt="7" type="arabicPeriod"/>
+            </a:pPr>
+            <a:r>
+              <a:rPr/>
+              <a:t>Deploy Release Candidate to test environments</a:t>
+            </a:r>
+          </a:p>
+          <a:p>
+            <a:pPr lvl="0" indent="-342900" marL="342900">
+              <a:buAutoNum startAt="7" type="arabicPeriod"/>
+            </a:pPr>
+            <a:r>
+              <a:rPr/>
+              <a:t>(</a:t>
+            </a:r>
+            <a:r>
               <a:rPr i="1"/>
-              <a:t>TO-DO</a:t>
+              <a:t>Release candidate can be superceded</a:t>
+            </a:r>
+            <a:r>
+              <a:rPr/>
+              <a:t>)</a:t>
+            </a:r>
+          </a:p>
+          <a:p>
+            <a:pPr lvl="0" indent="-342900" marL="342900">
+              <a:buAutoNum startAt="7" type="arabicPeriod"/>
+            </a:pPr>
+            <a:r>
+              <a:rPr/>
+              <a:t>Finalise Release package in Artifactory (or equivalent)</a:t>
+            </a:r>
+          </a:p>
+          <a:p>
+            <a:pPr lvl="0" indent="-342900" marL="342900">
+              <a:buAutoNum startAt="7" type="arabicPeriod"/>
+            </a:pPr>
+            <a:r>
+              <a:rPr/>
+              <a:t>Tag commit from step 8 as the production release and deploy</a:t>
             </a:r>
           </a:p>
           <a:p>
@@ -3687,6 +3843,627 @@
       </p:pic>
     </p:spTree>
   </p:cSld>
+  <p:timing>
+    <p:tnLst>
+      <p:par>
+        <p:cTn id="1" dur="indefinite" restart="never" nodeType="tmRoot">
+          <p:childTnLst>
+            <p:seq concurrent="1" nextAc="seek">
+              <p:cTn id="2" dur="indefinite" nodeType="mainSeq">
+                <p:childTnLst>
+                  <p:par>
+                    <p:cTn id="3" fill="hold">
+                      <p:stCondLst>
+                        <p:cond delay="indefinite"/>
+                      </p:stCondLst>
+                      <p:childTnLst>
+                        <p:par>
+                          <p:cTn id="4" fill="hold">
+                            <p:stCondLst>
+                              <p:cond delay="0"/>
+                            </p:stCondLst>
+                            <p:childTnLst>
+                              <p:par>
+                                <p:cTn id="5" presetID="1" presetClass="entr" presetSubtype="0" fill="hold" grpId="0" nodeType="clickEffect">
+                                  <p:stCondLst>
+                                    <p:cond delay="0"/>
+                                  </p:stCondLst>
+                                  <p:childTnLst>
+                                    <p:set>
+                                      <p:cBhvr>
+                                        <p:cTn id="6" dur="1" fill="hold">
+                                          <p:stCondLst>
+                                            <p:cond delay="0"/>
+                                          </p:stCondLst>
+                                        </p:cTn>
+                                        <p:tgtEl>
+                                          <p:spTgt spid="4">
+                                            <p:txEl>
+                                              <p:pRg st="8" end="8"/>
+                                            </p:txEl>
+                                          </p:spTgt>
+                                        </p:tgtEl>
+                                        <p:attrNameLst>
+                                          <p:attrName>style.visibility</p:attrName>
+                                        </p:attrNameLst>
+                                      </p:cBhvr>
+                                      <p:to>
+                                        <p:strVal val="visible"/>
+                                      </p:to>
+                                    </p:set>
+                                  </p:childTnLst>
+                                </p:cTn>
+                              </p:par>
+                            </p:childTnLst>
+                          </p:cTn>
+                        </p:par>
+                      </p:childTnLst>
+                    </p:cTn>
+                  </p:par>
+                  <p:par>
+                    <p:cTn id="7" fill="hold">
+                      <p:stCondLst>
+                        <p:cond delay="indefinite"/>
+                      </p:stCondLst>
+                      <p:childTnLst>
+                        <p:par>
+                          <p:cTn id="8" fill="hold">
+                            <p:stCondLst>
+                              <p:cond delay="0"/>
+                            </p:stCondLst>
+                            <p:childTnLst>
+                              <p:par>
+                                <p:cTn id="9" presetID="1" presetClass="entr" presetSubtype="0" fill="hold" grpId="0" nodeType="clickEffect">
+                                  <p:stCondLst>
+                                    <p:cond delay="0"/>
+                                  </p:stCondLst>
+                                  <p:childTnLst>
+                                    <p:set>
+                                      <p:cBhvr>
+                                        <p:cTn id="10" dur="1" fill="hold">
+                                          <p:stCondLst>
+                                            <p:cond delay="0"/>
+                                          </p:stCondLst>
+                                        </p:cTn>
+                                        <p:tgtEl>
+                                          <p:spTgt spid="4">
+                                            <p:txEl>
+                                              <p:pRg st="9" end="9"/>
+                                            </p:txEl>
+                                          </p:spTgt>
+                                        </p:tgtEl>
+                                        <p:attrNameLst>
+                                          <p:attrName>style.visibility</p:attrName>
+                                        </p:attrNameLst>
+                                      </p:cBhvr>
+                                      <p:to>
+                                        <p:strVal val="visible"/>
+                                      </p:to>
+                                    </p:set>
+                                  </p:childTnLst>
+                                </p:cTn>
+                              </p:par>
+                            </p:childTnLst>
+                          </p:cTn>
+                        </p:par>
+                      </p:childTnLst>
+                    </p:cTn>
+                  </p:par>
+                  <p:par>
+                    <p:cTn id="11" fill="hold">
+                      <p:stCondLst>
+                        <p:cond delay="indefinite"/>
+                      </p:stCondLst>
+                      <p:childTnLst>
+                        <p:par>
+                          <p:cTn id="12" fill="hold">
+                            <p:stCondLst>
+                              <p:cond delay="0"/>
+                            </p:stCondLst>
+                            <p:childTnLst>
+                              <p:par>
+                                <p:cTn id="13" presetID="1" presetClass="entr" presetSubtype="0" fill="hold" grpId="0" nodeType="clickEffect">
+                                  <p:stCondLst>
+                                    <p:cond delay="0"/>
+                                  </p:stCondLst>
+                                  <p:childTnLst>
+                                    <p:set>
+                                      <p:cBhvr>
+                                        <p:cTn id="14" dur="1" fill="hold">
+                                          <p:stCondLst>
+                                            <p:cond delay="0"/>
+                                          </p:stCondLst>
+                                        </p:cTn>
+                                        <p:tgtEl>
+                                          <p:spTgt spid="4">
+                                            <p:txEl>
+                                              <p:pRg st="10" end="10"/>
+                                            </p:txEl>
+                                          </p:spTgt>
+                                        </p:tgtEl>
+                                        <p:attrNameLst>
+                                          <p:attrName>style.visibility</p:attrName>
+                                        </p:attrNameLst>
+                                      </p:cBhvr>
+                                      <p:to>
+                                        <p:strVal val="visible"/>
+                                      </p:to>
+                                    </p:set>
+                                  </p:childTnLst>
+                                </p:cTn>
+                              </p:par>
+                            </p:childTnLst>
+                          </p:cTn>
+                        </p:par>
+                      </p:childTnLst>
+                    </p:cTn>
+                  </p:par>
+                  <p:par>
+                    <p:cTn id="15" fill="hold">
+                      <p:stCondLst>
+                        <p:cond delay="indefinite"/>
+                      </p:stCondLst>
+                      <p:childTnLst>
+                        <p:par>
+                          <p:cTn id="16" fill="hold">
+                            <p:stCondLst>
+                              <p:cond delay="0"/>
+                            </p:stCondLst>
+                            <p:childTnLst>
+                              <p:par>
+                                <p:cTn id="17" presetID="1" presetClass="entr" presetSubtype="0" fill="hold" grpId="0" nodeType="clickEffect">
+                                  <p:stCondLst>
+                                    <p:cond delay="0"/>
+                                  </p:stCondLst>
+                                  <p:childTnLst>
+                                    <p:set>
+                                      <p:cBhvr>
+                                        <p:cTn id="18" dur="1" fill="hold">
+                                          <p:stCondLst>
+                                            <p:cond delay="0"/>
+                                          </p:stCondLst>
+                                        </p:cTn>
+                                        <p:tgtEl>
+                                          <p:spTgt spid="4">
+                                            <p:txEl>
+                                              <p:pRg st="11" end="11"/>
+                                            </p:txEl>
+                                          </p:spTgt>
+                                        </p:tgtEl>
+                                        <p:attrNameLst>
+                                          <p:attrName>style.visibility</p:attrName>
+                                        </p:attrNameLst>
+                                      </p:cBhvr>
+                                      <p:to>
+                                        <p:strVal val="visible"/>
+                                      </p:to>
+                                    </p:set>
+                                  </p:childTnLst>
+                                </p:cTn>
+                              </p:par>
+                            </p:childTnLst>
+                          </p:cTn>
+                        </p:par>
+                      </p:childTnLst>
+                    </p:cTn>
+                  </p:par>
+                  <p:par>
+                    <p:cTn id="19" fill="hold">
+                      <p:stCondLst>
+                        <p:cond delay="indefinite"/>
+                      </p:stCondLst>
+                      <p:childTnLst>
+                        <p:par>
+                          <p:cTn id="20" fill="hold">
+                            <p:stCondLst>
+                              <p:cond delay="0"/>
+                            </p:stCondLst>
+                            <p:childTnLst>
+                              <p:par>
+                                <p:cTn id="21" presetID="1" presetClass="entr" presetSubtype="0" fill="hold" grpId="0" nodeType="clickEffect">
+                                  <p:stCondLst>
+                                    <p:cond delay="0"/>
+                                  </p:stCondLst>
+                                  <p:childTnLst>
+                                    <p:set>
+                                      <p:cBhvr>
+                                        <p:cTn id="22" dur="1" fill="hold">
+                                          <p:stCondLst>
+                                            <p:cond delay="0"/>
+                                          </p:stCondLst>
+                                        </p:cTn>
+                                        <p:tgtEl>
+                                          <p:spTgt spid="4">
+                                            <p:txEl>
+                                              <p:pRg st="12" end="12"/>
+                                            </p:txEl>
+                                          </p:spTgt>
+                                        </p:tgtEl>
+                                        <p:attrNameLst>
+                                          <p:attrName>style.visibility</p:attrName>
+                                        </p:attrNameLst>
+                                      </p:cBhvr>
+                                      <p:to>
+                                        <p:strVal val="visible"/>
+                                      </p:to>
+                                    </p:set>
+                                  </p:childTnLst>
+                                </p:cTn>
+                              </p:par>
+                            </p:childTnLst>
+                          </p:cTn>
+                        </p:par>
+                      </p:childTnLst>
+                    </p:cTn>
+                  </p:par>
+                  <p:par>
+                    <p:cTn id="23" fill="hold">
+                      <p:stCondLst>
+                        <p:cond delay="indefinite"/>
+                      </p:stCondLst>
+                      <p:childTnLst>
+                        <p:par>
+                          <p:cTn id="24" fill="hold">
+                            <p:stCondLst>
+                              <p:cond delay="0"/>
+                            </p:stCondLst>
+                            <p:childTnLst>
+                              <p:par>
+                                <p:cTn id="25" presetID="1" presetClass="entr" presetSubtype="0" fill="hold" grpId="0" nodeType="clickEffect">
+                                  <p:stCondLst>
+                                    <p:cond delay="0"/>
+                                  </p:stCondLst>
+                                  <p:childTnLst>
+                                    <p:set>
+                                      <p:cBhvr>
+                                        <p:cTn id="26" dur="1" fill="hold">
+                                          <p:stCondLst>
+                                            <p:cond delay="0"/>
+                                          </p:stCondLst>
+                                        </p:cTn>
+                                        <p:tgtEl>
+                                          <p:spTgt spid="4">
+                                            <p:txEl>
+                                              <p:pRg st="13" end="13"/>
+                                            </p:txEl>
+                                          </p:spTgt>
+                                        </p:tgtEl>
+                                        <p:attrNameLst>
+                                          <p:attrName>style.visibility</p:attrName>
+                                        </p:attrNameLst>
+                                      </p:cBhvr>
+                                      <p:to>
+                                        <p:strVal val="visible"/>
+                                      </p:to>
+                                    </p:set>
+                                  </p:childTnLst>
+                                </p:cTn>
+                              </p:par>
+                            </p:childTnLst>
+                          </p:cTn>
+                        </p:par>
+                      </p:childTnLst>
+                    </p:cTn>
+                  </p:par>
+                  <p:par>
+                    <p:cTn id="27" fill="hold">
+                      <p:stCondLst>
+                        <p:cond delay="indefinite"/>
+                      </p:stCondLst>
+                      <p:childTnLst>
+                        <p:par>
+                          <p:cTn id="28" fill="hold">
+                            <p:stCondLst>
+                              <p:cond delay="0"/>
+                            </p:stCondLst>
+                            <p:childTnLst>
+                              <p:par>
+                                <p:cTn id="29" presetID="1" presetClass="entr" presetSubtype="0" fill="hold" grpId="0" nodeType="clickEffect">
+                                  <p:stCondLst>
+                                    <p:cond delay="0"/>
+                                  </p:stCondLst>
+                                  <p:childTnLst>
+                                    <p:set>
+                                      <p:cBhvr>
+                                        <p:cTn id="30" dur="1" fill="hold">
+                                          <p:stCondLst>
+                                            <p:cond delay="0"/>
+                                          </p:stCondLst>
+                                        </p:cTn>
+                                        <p:tgtEl>
+                                          <p:spTgt spid="4">
+                                            <p:txEl>
+                                              <p:pRg st="16" end="16"/>
+                                            </p:txEl>
+                                          </p:spTgt>
+                                        </p:tgtEl>
+                                        <p:attrNameLst>
+                                          <p:attrName>style.visibility</p:attrName>
+                                        </p:attrNameLst>
+                                      </p:cBhvr>
+                                      <p:to>
+                                        <p:strVal val="visible"/>
+                                      </p:to>
+                                    </p:set>
+                                  </p:childTnLst>
+                                </p:cTn>
+                              </p:par>
+                            </p:childTnLst>
+                          </p:cTn>
+                        </p:par>
+                      </p:childTnLst>
+                    </p:cTn>
+                  </p:par>
+                  <p:par>
+                    <p:cTn id="31" fill="hold">
+                      <p:stCondLst>
+                        <p:cond delay="indefinite"/>
+                      </p:stCondLst>
+                      <p:childTnLst>
+                        <p:par>
+                          <p:cTn id="32" fill="hold">
+                            <p:stCondLst>
+                              <p:cond delay="0"/>
+                            </p:stCondLst>
+                            <p:childTnLst>
+                              <p:par>
+                                <p:cTn id="33" presetID="1" presetClass="entr" presetSubtype="0" fill="hold" grpId="0" nodeType="clickEffect">
+                                  <p:stCondLst>
+                                    <p:cond delay="0"/>
+                                  </p:stCondLst>
+                                  <p:childTnLst>
+                                    <p:set>
+                                      <p:cBhvr>
+                                        <p:cTn id="34" dur="1" fill="hold">
+                                          <p:stCondLst>
+                                            <p:cond delay="0"/>
+                                          </p:stCondLst>
+                                        </p:cTn>
+                                        <p:tgtEl>
+                                          <p:spTgt spid="4">
+                                            <p:txEl>
+                                              <p:pRg st="17" end="17"/>
+                                            </p:txEl>
+                                          </p:spTgt>
+                                        </p:tgtEl>
+                                        <p:attrNameLst>
+                                          <p:attrName>style.visibility</p:attrName>
+                                        </p:attrNameLst>
+                                      </p:cBhvr>
+                                      <p:to>
+                                        <p:strVal val="visible"/>
+                                      </p:to>
+                                    </p:set>
+                                  </p:childTnLst>
+                                </p:cTn>
+                              </p:par>
+                            </p:childTnLst>
+                          </p:cTn>
+                        </p:par>
+                      </p:childTnLst>
+                    </p:cTn>
+                  </p:par>
+                  <p:par>
+                    <p:cTn id="35" fill="hold">
+                      <p:stCondLst>
+                        <p:cond delay="indefinite"/>
+                      </p:stCondLst>
+                      <p:childTnLst>
+                        <p:par>
+                          <p:cTn id="36" fill="hold">
+                            <p:stCondLst>
+                              <p:cond delay="0"/>
+                            </p:stCondLst>
+                            <p:childTnLst>
+                              <p:par>
+                                <p:cTn id="37" presetID="1" presetClass="entr" presetSubtype="0" fill="hold" grpId="0" nodeType="clickEffect">
+                                  <p:stCondLst>
+                                    <p:cond delay="0"/>
+                                  </p:stCondLst>
+                                  <p:childTnLst>
+                                    <p:set>
+                                      <p:cBhvr>
+                                        <p:cTn id="38" dur="1" fill="hold">
+                                          <p:stCondLst>
+                                            <p:cond delay="0"/>
+                                          </p:stCondLst>
+                                        </p:cTn>
+                                        <p:tgtEl>
+                                          <p:spTgt spid="4">
+                                            <p:txEl>
+                                              <p:pRg st="18" end="18"/>
+                                            </p:txEl>
+                                          </p:spTgt>
+                                        </p:tgtEl>
+                                        <p:attrNameLst>
+                                          <p:attrName>style.visibility</p:attrName>
+                                        </p:attrNameLst>
+                                      </p:cBhvr>
+                                      <p:to>
+                                        <p:strVal val="visible"/>
+                                      </p:to>
+                                    </p:set>
+                                  </p:childTnLst>
+                                </p:cTn>
+                              </p:par>
+                            </p:childTnLst>
+                          </p:cTn>
+                        </p:par>
+                      </p:childTnLst>
+                    </p:cTn>
+                  </p:par>
+                  <p:par>
+                    <p:cTn id="39" fill="hold">
+                      <p:stCondLst>
+                        <p:cond delay="indefinite"/>
+                      </p:stCondLst>
+                      <p:childTnLst>
+                        <p:par>
+                          <p:cTn id="40" fill="hold">
+                            <p:stCondLst>
+                              <p:cond delay="0"/>
+                            </p:stCondLst>
+                            <p:childTnLst>
+                              <p:par>
+                                <p:cTn id="41" presetID="1" presetClass="entr" presetSubtype="0" fill="hold" grpId="0" nodeType="clickEffect">
+                                  <p:stCondLst>
+                                    <p:cond delay="0"/>
+                                  </p:stCondLst>
+                                  <p:childTnLst>
+                                    <p:set>
+                                      <p:cBhvr>
+                                        <p:cTn id="42" dur="1" fill="hold">
+                                          <p:stCondLst>
+                                            <p:cond delay="0"/>
+                                          </p:stCondLst>
+                                        </p:cTn>
+                                        <p:tgtEl>
+                                          <p:spTgt spid="4">
+                                            <p:txEl>
+                                              <p:pRg st="19" end="19"/>
+                                            </p:txEl>
+                                          </p:spTgt>
+                                        </p:tgtEl>
+                                        <p:attrNameLst>
+                                          <p:attrName>style.visibility</p:attrName>
+                                        </p:attrNameLst>
+                                      </p:cBhvr>
+                                      <p:to>
+                                        <p:strVal val="visible"/>
+                                      </p:to>
+                                    </p:set>
+                                  </p:childTnLst>
+                                </p:cTn>
+                              </p:par>
+                            </p:childTnLst>
+                          </p:cTn>
+                        </p:par>
+                      </p:childTnLst>
+                    </p:cTn>
+                  </p:par>
+                  <p:par>
+                    <p:cTn id="43" fill="hold">
+                      <p:stCondLst>
+                        <p:cond delay="indefinite"/>
+                      </p:stCondLst>
+                      <p:childTnLst>
+                        <p:par>
+                          <p:cTn id="44" fill="hold">
+                            <p:stCondLst>
+                              <p:cond delay="0"/>
+                            </p:stCondLst>
+                            <p:childTnLst>
+                              <p:par>
+                                <p:cTn id="45" presetID="1" presetClass="entr" presetSubtype="0" fill="hold" grpId="0" nodeType="clickEffect">
+                                  <p:stCondLst>
+                                    <p:cond delay="0"/>
+                                  </p:stCondLst>
+                                  <p:childTnLst>
+                                    <p:set>
+                                      <p:cBhvr>
+                                        <p:cTn id="46" dur="1" fill="hold">
+                                          <p:stCondLst>
+                                            <p:cond delay="0"/>
+                                          </p:stCondLst>
+                                        </p:cTn>
+                                        <p:tgtEl>
+                                          <p:spTgt spid="4">
+                                            <p:txEl>
+                                              <p:pRg st="20" end="20"/>
+                                            </p:txEl>
+                                          </p:spTgt>
+                                        </p:tgtEl>
+                                        <p:attrNameLst>
+                                          <p:attrName>style.visibility</p:attrName>
+                                        </p:attrNameLst>
+                                      </p:cBhvr>
+                                      <p:to>
+                                        <p:strVal val="visible"/>
+                                      </p:to>
+                                    </p:set>
+                                  </p:childTnLst>
+                                </p:cTn>
+                              </p:par>
+                            </p:childTnLst>
+                          </p:cTn>
+                        </p:par>
+                      </p:childTnLst>
+                    </p:cTn>
+                  </p:par>
+                  <p:par>
+                    <p:cTn id="47" fill="hold">
+                      <p:stCondLst>
+                        <p:cond delay="indefinite"/>
+                      </p:stCondLst>
+                      <p:childTnLst>
+                        <p:par>
+                          <p:cTn id="48" fill="hold">
+                            <p:stCondLst>
+                              <p:cond delay="0"/>
+                            </p:stCondLst>
+                            <p:childTnLst>
+                              <p:par>
+                                <p:cTn id="49" presetID="1" presetClass="entr" presetSubtype="0" fill="hold" grpId="0" nodeType="clickEffect">
+                                  <p:stCondLst>
+                                    <p:cond delay="0"/>
+                                  </p:stCondLst>
+                                  <p:childTnLst>
+                                    <p:set>
+                                      <p:cBhvr>
+                                        <p:cTn id="50" dur="1" fill="hold">
+                                          <p:stCondLst>
+                                            <p:cond delay="0"/>
+                                          </p:stCondLst>
+                                        </p:cTn>
+                                        <p:tgtEl>
+                                          <p:spTgt spid="4">
+                                            <p:txEl>
+                                              <p:pRg st="21" end="21"/>
+                                            </p:txEl>
+                                          </p:spTgt>
+                                        </p:tgtEl>
+                                        <p:attrNameLst>
+                                          <p:attrName>style.visibility</p:attrName>
+                                        </p:attrNameLst>
+                                      </p:cBhvr>
+                                      <p:to>
+                                        <p:strVal val="visible"/>
+                                      </p:to>
+                                    </p:set>
+                                  </p:childTnLst>
+                                </p:cTn>
+                              </p:par>
+                            </p:childTnLst>
+                          </p:cTn>
+                        </p:par>
+                      </p:childTnLst>
+                    </p:cTn>
+                  </p:par>
+                </p:childTnLst>
+              </p:cTn>
+              <p:prevCondLst>
+                <p:cond evt="onPrev" delay="0">
+                  <p:tgtEl>
+                    <p:sldTgt/>
+                  </p:tgtEl>
+                </p:cond>
+              </p:prevCondLst>
+              <p:nextCondLst>
+                <p:cond evt="onNext" delay="0">
+                  <p:tgtEl>
+                    <p:sldTgt/>
+                  </p:tgtEl>
+                </p:cond>
+              </p:nextCondLst>
+            </p:seq>
+          </p:childTnLst>
+        </p:cTn>
+      </p:par>
+    </p:tnLst>
+    <p:bldLst>
+      <p:bldP spid="4" grpId="0" uiExpand="1" build="p"/>
+    </p:bldLst>
+  </p:timing>
 </p:sld>
 </file>
 
@@ -4639,7 +5416,30 @@
             <a:pPr lvl="1"/>
             <a:r>
               <a:rPr/>
-              <a:t>DevOps/Agile practices typically encourage that, where possible, development teams should strive to break down larger changes into sets of smaller, incremental deliverables that can each be completed within an iteration. This reduces the number of “in-flight” changes, and allows the team to deliver value (end-to-end functionality) more quickly while still building towards a larger development goal.</a:t>
+              <a:t>DevOps/Agile practices to break down larger changes into sets of </a:t>
+            </a:r>
+            <a:r>
+              <a:rPr b="1"/>
+              <a:t>smaller, incremental</a:t>
+            </a:r>
+            <a:r>
+              <a:rPr/>
+              <a:t> deliverables that can each be completed within an iteration.</a:t>
+            </a:r>
+          </a:p>
+          <a:p>
+            <a:pPr lvl="1"/>
+            <a:r>
+              <a:rPr/>
+              <a:t>This reduces the number of “in-flight” changes, and allows the team to deliver </a:t>
+            </a:r>
+            <a:r>
+              <a:rPr b="1"/>
+              <a:t>value</a:t>
+            </a:r>
+            <a:r>
+              <a:rPr/>
+              <a:t> more quickly while still building towards a larger development goal.</a:t>
             </a:r>
           </a:p>
           <a:p>
@@ -4659,6 +5459,94 @@
             <a:r>
               <a:rPr b="1"/>
               <a:t>Convention over configuration</a:t>
+            </a:r>
+          </a:p>
+          <a:p>
+            <a:pPr lvl="0" indent="0" marL="0">
+              <a:buNone/>
+            </a:pPr>
+            <a:r>
+              <a:rPr/>
+              <a:t>The principles are more important that the tools and names.</a:t>
+            </a:r>
+          </a:p>
+          <a:p>
+            <a:pPr lvl="0" indent="0" marL="0">
+              <a:buNone/>
+            </a:pPr>
+            <a:r>
+              <a:rPr/>
+              <a:t>Naming conventions - making purpose obvious:</a:t>
+            </a:r>
+          </a:p>
+          <a:p>
+            <a:pPr lvl="0"/>
+            <a:r>
+              <a:rPr>
+                <a:latin typeface="Courier"/>
+              </a:rPr>
+              <a:t>main</a:t>
+            </a:r>
+            <a:r>
+              <a:rPr/>
+              <a:t>: single source of truth</a:t>
+            </a:r>
+          </a:p>
+          <a:p>
+            <a:pPr lvl="0"/>
+            <a:r>
+              <a:rPr>
+                <a:latin typeface="Courier"/>
+              </a:rPr>
+              <a:t>release/rel-2.0.1</a:t>
+            </a:r>
+            <a:r>
+              <a:rPr/>
+              <a:t>: explicit versioning numbering of releases</a:t>
+            </a:r>
+          </a:p>
+          <a:p>
+            <a:pPr lvl="0"/>
+            <a:r>
+              <a:rPr>
+                <a:latin typeface="Courier"/>
+              </a:rPr>
+              <a:t>feature/&lt;jira-id|servicenow-id&gt;/new-mortage-calculation</a:t>
+            </a:r>
+            <a:r>
+              <a:rPr/>
+              <a:t>: traceable to other processes</a:t>
+            </a:r>
+          </a:p>
+          <a:p>
+            <a:pPr lvl="0"/>
+            <a:r>
+              <a:rPr>
+                <a:latin typeface="Courier"/>
+              </a:rPr>
+              <a:t>epic/ai-fraud-detection</a:t>
+            </a:r>
+            <a:r>
+              <a:rPr/>
+              <a:t>: maybe put Jira or ServiceNow ids in here too</a:t>
+            </a:r>
+          </a:p>
+          <a:p>
+            <a:pPr lvl="0"/>
+            <a:r>
+              <a:rPr>
+                <a:latin typeface="Courier"/>
+              </a:rPr>
+              <a:t>hotfix/rel-2.0.1/fix-mortgage-calc</a:t>
+            </a:r>
+          </a:p>
+          <a:p>
+            <a:pPr lvl="0" indent="0" marL="0">
+              <a:buNone/>
+            </a:pPr>
+            <a:r>
+              <a:rPr/>
+              <a:t>Names of branches and tags flow through to builds and deployments.</a:t>
             </a:r>
           </a:p>
         </p:txBody>
@@ -5393,7 +6281,7 @@
             <a:pPr lvl="0"/>
             <a:r>
               <a:rPr/>
-              <a:t>Deployment manager is maintaining what is deployed where and provides traceability to</a:t>
+              <a:t>Deployment manager is maintaining what is deployed where and provides traceability from developer to production deployment</a:t>
             </a:r>
           </a:p>
           <a:p>

--- a/docs/p1.pptx
+++ b/docs/p1.pptx
@@ -5161,6 +5161,17 @@
               <a:t>Implementing pipelines</a:t>
             </a:r>
           </a:p>
+          <a:p>
+            <a:pPr lvl="0" indent="0">
+              <a:buNone/>
+            </a:pPr>
+            <a:r>
+              <a:rPr>
+                <a:latin typeface="Courier"/>
+              </a:rPr>
+              <a:t>some code</a:t>
+            </a:r>
+          </a:p>
         </p:txBody>
       </p:sp>
     </p:spTree>

--- a/docs/p1.pptx
+++ b/docs/p1.pptx
@@ -5161,17 +5161,6 @@
               <a:t>Implementing pipelines</a:t>
             </a:r>
           </a:p>
-          <a:p>
-            <a:pPr lvl="0" indent="0">
-              <a:buNone/>
-            </a:pPr>
-            <a:r>
-              <a:rPr>
-                <a:latin typeface="Courier"/>
-              </a:rPr>
-              <a:t>some code</a:t>
-            </a:r>
-          </a:p>
         </p:txBody>
       </p:sp>
     </p:spTree>

--- a/docs/p1.pptx
+++ b/docs/p1.pptx
@@ -22,7 +22,6 @@
     <p:sldId id="270" r:id="rId16"/>
     <p:sldId id="271" r:id="rId17"/>
     <p:sldId id="272" r:id="rId18"/>
-    <p:sldId id="273" r:id="rId19"/>
   </p:sldIdLst>
   <p:sldSz cx="9144000" cy="5143500" type="screen16x9"/>
   <p:notesSz cx="6858000" cy="9144000"/>
@@ -3482,6 +3481,161 @@
       </p:grpSpPr>
       <p:sp>
         <p:nvSpPr>
+          <p:cNvPr id="3" name="Content Placeholder 2"/>
+          <p:cNvSpPr>
+            <a:spLocks noGrp="1"/>
+          </p:cNvSpPr>
+          <p:nvPr>
+            <p:ph idx="1"/>
+          </p:nvPr>
+        </p:nvSpPr>
+        <p:spPr/>
+        <p:txBody>
+          <a:bodyPr/>
+          <a:lstStyle/>
+          <a:p>
+            <a:pPr lvl="0" indent="0" marL="0">
+              <a:spcBef>
+                <a:spcPts val="3000"/>
+              </a:spcBef>
+              <a:buNone/>
+            </a:pPr>
+            <a:r>
+              <a:rPr b="1"/>
+              <a:t>Convention over configuration</a:t>
+            </a:r>
+          </a:p>
+          <a:p>
+            <a:pPr lvl="0" indent="0" marL="0">
+              <a:buNone/>
+            </a:pPr>
+            <a:r>
+              <a:rPr/>
+              <a:t>The principles are more important that the tools and names.</a:t>
+            </a:r>
+          </a:p>
+          <a:p>
+            <a:pPr lvl="0" indent="0" marL="0">
+              <a:buNone/>
+            </a:pPr>
+            <a:r>
+              <a:rPr/>
+              <a:t>Naming conventions - making purpose obvious:</a:t>
+            </a:r>
+          </a:p>
+          <a:p>
+            <a:pPr lvl="0"/>
+            <a:r>
+              <a:rPr>
+                <a:latin typeface="Courier"/>
+              </a:rPr>
+              <a:t>main</a:t>
+            </a:r>
+            <a:r>
+              <a:rPr/>
+              <a:t> : single source of truth. The only long-living branch.</a:t>
+            </a:r>
+          </a:p>
+          <a:p>
+            <a:pPr lvl="0"/>
+            <a:r>
+              <a:rPr>
+                <a:latin typeface="Courier"/>
+              </a:rPr>
+              <a:t>release/rel-2.0.1</a:t>
+            </a:r>
+            <a:r>
+              <a:rPr/>
+              <a:t> : explicit versioning numbering to identify releases maintenance branch.</a:t>
+            </a:r>
+          </a:p>
+          <a:p>
+            <a:pPr lvl="0"/>
+            <a:r>
+              <a:rPr>
+                <a:latin typeface="Courier"/>
+              </a:rPr>
+              <a:t>epic/47-ai-fraud-detection</a:t>
+            </a:r>
+            <a:r>
+              <a:rPr/>
+              <a:t> : development initiative identified by epic id and description.</a:t>
+            </a:r>
+          </a:p>
+          <a:p>
+            <a:pPr lvl="0"/>
+            <a:r>
+              <a:rPr>
+                <a:latin typeface="Courier"/>
+              </a:rPr>
+              <a:t>feature/&lt;jira-id|servicenow-id&gt;/new-mortgage-calculation</a:t>
+            </a:r>
+            <a:r>
+              <a:rPr/>
+              <a:t> : references to other planning tools for new features for the next planned release.</a:t>
+            </a:r>
+          </a:p>
+          <a:p>
+            <a:pPr lvl="0"/>
+            <a:r>
+              <a:rPr>
+                <a:latin typeface="Courier"/>
+              </a:rPr>
+              <a:t>feature/47-ai-fraud-detection/refactor-mortgage-calculation</a:t>
+            </a:r>
+            <a:r>
+              <a:rPr/>
+              <a:t>: feature implemented for development initiative</a:t>
+            </a:r>
+          </a:p>
+          <a:p>
+            <a:pPr lvl="0"/>
+            <a:r>
+              <a:rPr>
+                <a:latin typeface="Courier"/>
+              </a:rPr>
+              <a:t>hotfix/rel-2.0.1/fix-mortgage-calc</a:t>
+            </a:r>
+            <a:r>
+              <a:rPr/>
+              <a:t>: fix implemented for release rel-2.0.1</a:t>
+            </a:r>
+          </a:p>
+          <a:p>
+            <a:pPr lvl="0" indent="0" marL="0">
+              <a:buNone/>
+            </a:pPr>
+            <a:r>
+              <a:rPr/>
+              <a:t>Names of branches and tags flow through to builds and deployments.</a:t>
+            </a:r>
+          </a:p>
+        </p:txBody>
+      </p:sp>
+    </p:spTree>
+  </p:cSld>
+</p:sld>
+</file>
+
+<file path=ppt/slides/slide13.xml><?xml version="1.0" encoding="utf-8"?>
+<p:sld xmlns:a="http://schemas.openxmlformats.org/drawingml/2006/main" xmlns:r="http://schemas.openxmlformats.org/officeDocument/2006/relationships" xmlns:p="http://schemas.openxmlformats.org/presentationml/2006/main">
+  <p:cSld>
+    <p:spTree>
+      <p:nvGrpSpPr>
+        <p:cNvPr id="1" name=""/>
+        <p:cNvGrpSpPr/>
+        <p:nvPr/>
+      </p:nvGrpSpPr>
+      <p:grpSpPr>
+        <a:xfrm>
+          <a:off x="0" y="0"/>
+          <a:ext cx="0" cy="0"/>
+          <a:chOff x="0" y="0"/>
+          <a:chExt cx="0" cy="0"/>
+        </a:xfrm>
+      </p:grpSpPr>
+      <p:sp>
+        <p:nvSpPr>
           <p:cNvPr id="2" name="Title 1"/>
           <p:cNvSpPr>
             <a:spLocks noGrp="1"/>
@@ -3784,7 +3938,7 @@
             </a:pPr>
             <a:r>
               <a:rPr b="1"/>
-              <a:t>Hot-fix for production</a:t>
+              <a:t>Fix a production defect</a:t>
             </a:r>
           </a:p>
           <a:p>
@@ -4467,107 +4621,6 @@
 </p:sld>
 </file>
 
-<file path=ppt/slides/slide13.xml><?xml version="1.0" encoding="utf-8"?>
-<p:sld xmlns:a="http://schemas.openxmlformats.org/drawingml/2006/main" xmlns:r="http://schemas.openxmlformats.org/officeDocument/2006/relationships" xmlns:p="http://schemas.openxmlformats.org/presentationml/2006/main">
-  <p:cSld>
-    <p:spTree>
-      <p:nvGrpSpPr>
-        <p:cNvPr id="1" name=""/>
-        <p:cNvGrpSpPr/>
-        <p:nvPr/>
-      </p:nvGrpSpPr>
-      <p:grpSpPr>
-        <a:xfrm>
-          <a:off x="0" y="0"/>
-          <a:ext cx="0" cy="0"/>
-          <a:chOff x="0" y="0"/>
-          <a:chExt cx="0" cy="0"/>
-        </a:xfrm>
-      </p:grpSpPr>
-      <p:sp>
-        <p:nvSpPr>
-          <p:cNvPr id="4" name="Text Placeholder 3"/>
-          <p:cNvSpPr>
-            <a:spLocks noGrp="1"/>
-          </p:cNvSpPr>
-          <p:nvPr>
-            <p:ph idx="2" sz="half" type="body"/>
-          </p:nvPr>
-        </p:nvSpPr>
-        <p:spPr/>
-        <p:txBody>
-          <a:bodyPr/>
-          <a:lstStyle/>
-          <a:p>
-            <a:pPr lvl="0" indent="0" marL="0">
-              <a:spcBef>
-                <a:spcPts val="3000"/>
-              </a:spcBef>
-              <a:buNone/>
-            </a:pPr>
-            <a:r>
-              <a:rPr b="1"/>
-              <a:t>Building the fix package</a:t>
-            </a:r>
-          </a:p>
-          <a:p>
-            <a:pPr lvl="0"/>
-            <a:r>
-              <a:rPr/>
-              <a:t>Changes contributed to the release maintenance branch are build and packaged.</a:t>
-            </a:r>
-          </a:p>
-          <a:p>
-            <a:pPr lvl="0"/>
-            <a:r>
-              <a:rPr/>
-              <a:t>The fix package is tested in the appropriate test environment(s)</a:t>
-            </a:r>
-          </a:p>
-          <a:p>
-            <a:pPr lvl="0"/>
-            <a:r>
-              <a:rPr/>
-              <a:t>Finally deployed to production</a:t>
-            </a:r>
-          </a:p>
-        </p:txBody>
-      </p:sp>
-      <p:pic>
-        <p:nvPicPr>
-          <p:cNvPr descr="static/img/branching-model/releaseMaintenanceWorkflow_fixPackageBuild.png" id="0" name="Picture 1"/>
-          <p:cNvPicPr>
-            <a:picLocks noGrp="1" noChangeAspect="1"/>
-          </p:cNvPicPr>
-          <p:nvPr/>
-        </p:nvPicPr>
-        <p:blipFill>
-          <a:blip r:embed="rId2"/>
-          <a:stretch>
-            <a:fillRect/>
-          </a:stretch>
-        </p:blipFill>
-        <p:spPr bwMode="auto">
-          <a:xfrm>
-            <a:off x="3568700" y="355600"/>
-            <a:ext cx="5105400" cy="4064000"/>
-          </a:xfrm>
-          <a:prstGeom prst="rect">
-            <a:avLst/>
-          </a:prstGeom>
-          <a:noFill/>
-          <a:ln w="9525">
-            <a:noFill/>
-            <a:headEnd/>
-            <a:tailEnd/>
-          </a:ln>
-        </p:spPr>
-      </p:pic>
-    </p:spTree>
-  </p:cSld>
-</p:sld>
-</file>
-
 <file path=ppt/slides/slide14.xml><?xml version="1.0" encoding="utf-8"?>
 <p:sld xmlns:a="http://schemas.openxmlformats.org/drawingml/2006/main" xmlns:r="http://schemas.openxmlformats.org/officeDocument/2006/relationships" xmlns:p="http://schemas.openxmlformats.org/presentationml/2006/main">
   <p:cSld>
@@ -4600,23 +4653,6 @@
           <a:bodyPr/>
           <a:lstStyle/>
           <a:p>
-            <a:pPr lvl="0"/>
-            <a:r>
-              <a:rPr/>
-              <a:t>The commit is tagged as the new version </a:t>
-            </a:r>
-            <a:r>
-              <a:rPr>
-                <a:latin typeface="Courier"/>
-              </a:rPr>
-              <a:t>2.1.1</a:t>
-            </a:r>
-            <a:r>
-              <a:rPr/>
-              <a:t>.</a:t>
-            </a:r>
-          </a:p>
-          <a:p>
             <a:pPr lvl="0" indent="0" marL="0">
               <a:spcBef>
                 <a:spcPts val="3000"/>
@@ -4625,6 +4661,186 @@
             </a:pPr>
             <a:r>
               <a:rPr b="1"/>
+              <a:t>Fix a production defect</a:t>
+            </a:r>
+          </a:p>
+          <a:p>
+            <a:pPr lvl="0" indent="0" marL="0">
+              <a:buNone/>
+            </a:pPr>
+            <a:r>
+              <a:rPr b="1"/>
+              <a:t>Developer activities resolving a production defect:</a:t>
+            </a:r>
+          </a:p>
+          <a:p>
+            <a:pPr lvl="0" indent="-342900" marL="342900">
+              <a:buAutoNum type="arabicPeriod"/>
+            </a:pPr>
+            <a:r>
+              <a:rPr/>
+              <a:t>Creates the </a:t>
+            </a:r>
+            <a:r>
+              <a:rPr>
+                <a:latin typeface="Courier"/>
+              </a:rPr>
+              <a:t>release/rel-2.1.0</a:t>
+            </a:r>
+            <a:r>
+              <a:rPr/>
+              <a:t> branch based on the existing Git tag</a:t>
+            </a:r>
+          </a:p>
+          <a:p>
+            <a:pPr lvl="0" indent="-342900" marL="342900">
+              <a:buAutoNum type="arabicPeriod"/>
+            </a:pPr>
+            <a:r>
+              <a:rPr/>
+              <a:t>Creates a feature branch </a:t>
+            </a:r>
+            <a:r>
+              <a:rPr>
+                <a:latin typeface="Courier"/>
+              </a:rPr>
+              <a:t>hotfix/rel-2.1.0/urgent-fix</a:t>
+            </a:r>
+            <a:r>
+              <a:rPr/>
+              <a:t> from the release maintenance branch.</a:t>
+            </a:r>
+          </a:p>
+          <a:p>
+            <a:pPr lvl="0" indent="-342900" marL="342900">
+              <a:buAutoNum type="arabicPeriod"/>
+            </a:pPr>
+            <a:r>
+              <a:rPr/>
+              <a:t>Implement the fix locally</a:t>
+            </a:r>
+          </a:p>
+          <a:p>
+            <a:pPr lvl="0" indent="-342900" marL="342900">
+              <a:buAutoNum type="arabicPeriod"/>
+            </a:pPr>
+            <a:r>
+              <a:rPr/>
+              <a:t>Build with DBB User Build</a:t>
+            </a:r>
+          </a:p>
+          <a:p>
+            <a:pPr lvl="0" indent="-342900" marL="342900">
+              <a:buAutoNum type="arabicPeriod"/>
+            </a:pPr>
+            <a:r>
+              <a:rPr/>
+              <a:t>Commit into hotfix branch, push, build and test feature functionality</a:t>
+            </a:r>
+          </a:p>
+          <a:p>
+            <a:pPr lvl="0" indent="-342900" marL="342900">
+              <a:buAutoNum type="arabicPeriod"/>
+            </a:pPr>
+            <a:r>
+              <a:rPr/>
+              <a:t>Create Pull Request for review and approval</a:t>
+            </a:r>
+          </a:p>
+          <a:p>
+            <a:pPr lvl="0" indent="0" marL="0">
+              <a:spcBef>
+                <a:spcPts val="3000"/>
+              </a:spcBef>
+              <a:buNone/>
+            </a:pPr>
+            <a:r>
+              <a:rPr b="1"/>
+              <a:t>Fix a production defect</a:t>
+            </a:r>
+          </a:p>
+          <a:p>
+            <a:pPr lvl="0" indent="0" marL="0">
+              <a:buNone/>
+            </a:pPr>
+            <a:r>
+              <a:rPr b="1"/>
+              <a:t>Release control activities resolving a production defect:</a:t>
+            </a:r>
+          </a:p>
+          <a:p>
+            <a:pPr lvl="0" indent="-342900" marL="342900">
+              <a:buAutoNum startAt="7" type="arabicPeriod"/>
+            </a:pPr>
+            <a:r>
+              <a:rPr/>
+              <a:t>Merge hotfix branch to release maintenance branch and build</a:t>
+            </a:r>
+          </a:p>
+          <a:p>
+            <a:pPr lvl="0" indent="-342900" marL="342900">
+              <a:buAutoNum startAt="7" type="arabicPeriod"/>
+            </a:pPr>
+            <a:r>
+              <a:rPr/>
+              <a:t>Use release pipeline to create fix package</a:t>
+            </a:r>
+          </a:p>
+          <a:p>
+            <a:pPr lvl="0" indent="-342900" marL="342900">
+              <a:buAutoNum startAt="7" type="arabicPeriod"/>
+            </a:pPr>
+            <a:r>
+              <a:rPr/>
+              <a:t>Deploy fix package to controlled test environments and test it</a:t>
+            </a:r>
+          </a:p>
+          <a:p>
+            <a:pPr lvl="0" indent="-342900" marL="342900">
+              <a:buAutoNum startAt="7" type="arabicPeriod"/>
+            </a:pPr>
+            <a:r>
+              <a:rPr/>
+              <a:t>Deploy fix package to production</a:t>
+            </a:r>
+          </a:p>
+          <a:p>
+            <a:pPr lvl="0" indent="-342900" marL="342900">
+              <a:buAutoNum startAt="7" type="arabicPeriod"/>
+            </a:pPr>
+            <a:r>
+              <a:rPr/>
+              <a:t>Tag commit from step 8 indicating the new version</a:t>
+            </a:r>
+          </a:p>
+          <a:p>
+            <a:pPr lvl="0" indent="-342900" marL="342900">
+              <a:buAutoNum startAt="7" type="arabicPeriod"/>
+            </a:pPr>
+            <a:r>
+              <a:rPr/>
+              <a:t>Merge release maintenance branch into </a:t>
+            </a:r>
+            <a:r>
+              <a:rPr>
+                <a:latin typeface="Courier"/>
+              </a:rPr>
+              <a:t>main</a:t>
+            </a:r>
+            <a:r>
+              <a:rPr/>
+              <a:t>.</a:t>
+            </a:r>
+          </a:p>
+          <a:p>
+            <a:pPr lvl="0" indent="0" marL="0">
+              <a:spcBef>
+                <a:spcPts val="3000"/>
+              </a:spcBef>
+              <a:buNone/>
+            </a:pPr>
+            <a:r>
+              <a:rPr b="1"/>
               <a:t>Using the Epic branch workflow</a:t>
             </a:r>
           </a:p>
@@ -4665,7 +4881,225 @@
             </a:pPr>
             <a:r>
               <a:rPr/>
-              <a:t>→ A process to work independently from the default workflow.</a:t>
+              <a:t>→ A process to work independently from the base workflow.</a:t>
+            </a:r>
+          </a:p>
+          <a:p>
+            <a:pPr lvl="0" indent="0" marL="0">
+              <a:spcBef>
+                <a:spcPts val="3000"/>
+              </a:spcBef>
+              <a:buNone/>
+            </a:pPr>
+            <a:r>
+              <a:rPr b="1"/>
+              <a:t>Using the Epic branch workflow</a:t>
+            </a:r>
+          </a:p>
+          <a:p>
+            <a:pPr lvl="0" indent="0" marL="0">
+              <a:buNone/>
+            </a:pPr>
+            <a:r>
+              <a:rPr b="1"/>
+              <a:t>Developer activities for implementing significant development initiatives:</a:t>
+            </a:r>
+          </a:p>
+          <a:p>
+            <a:pPr lvl="0" indent="-342900" marL="342900">
+              <a:buAutoNum type="arabicPeriod"/>
+            </a:pPr>
+            <a:r>
+              <a:rPr/>
+              <a:t>Creates the </a:t>
+            </a:r>
+            <a:r>
+              <a:rPr>
+                <a:latin typeface="Courier"/>
+              </a:rPr>
+              <a:t>epic/ai-fraud-detection</a:t>
+            </a:r>
+            <a:r>
+              <a:rPr/>
+              <a:t> branch based on the existing Git tag</a:t>
+            </a:r>
+          </a:p>
+          <a:p>
+            <a:pPr lvl="0" indent="-342900" marL="342900">
+              <a:buAutoNum type="arabicPeriod"/>
+            </a:pPr>
+            <a:r>
+              <a:rPr/>
+              <a:t>Creates a feature branch </a:t>
+            </a:r>
+            <a:r>
+              <a:rPr>
+                <a:latin typeface="Courier"/>
+              </a:rPr>
+              <a:t>feature/ai-fraud-detection/introduce-ai-model-to-mortgage-calculation</a:t>
+            </a:r>
+            <a:r>
+              <a:rPr/>
+              <a:t> from the epic branch.</a:t>
+            </a:r>
+          </a:p>
+          <a:p>
+            <a:pPr lvl="0" indent="-342900" marL="342900">
+              <a:buAutoNum type="arabicPeriod"/>
+            </a:pPr>
+            <a:r>
+              <a:rPr/>
+              <a:t>Code locally</a:t>
+            </a:r>
+          </a:p>
+          <a:p>
+            <a:pPr lvl="0" indent="-342900" marL="342900">
+              <a:buAutoNum type="arabicPeriod"/>
+            </a:pPr>
+            <a:r>
+              <a:rPr/>
+              <a:t>Build with DBB User Build</a:t>
+            </a:r>
+          </a:p>
+          <a:p>
+            <a:pPr lvl="0" indent="-342900" marL="342900">
+              <a:buAutoNum type="arabicPeriod"/>
+            </a:pPr>
+            <a:r>
+              <a:rPr/>
+              <a:t>Commit into feature branch, push, build and test feature functionality</a:t>
+            </a:r>
+          </a:p>
+          <a:p>
+            <a:pPr lvl="0" indent="-342900" marL="342900">
+              <a:buAutoNum type="arabicPeriod"/>
+            </a:pPr>
+            <a:r>
+              <a:rPr/>
+              <a:t>Create Pull Request for review and approval to merge into the integration branch</a:t>
+            </a:r>
+          </a:p>
+          <a:p>
+            <a:pPr lvl="0" indent="0" marL="0">
+              <a:spcBef>
+                <a:spcPts val="3000"/>
+              </a:spcBef>
+              <a:buNone/>
+            </a:pPr>
+            <a:r>
+              <a:rPr b="1"/>
+              <a:t>Using the Epic branch workflow</a:t>
+            </a:r>
+          </a:p>
+          <a:p>
+            <a:pPr lvl="0" indent="0" marL="0">
+              <a:buNone/>
+            </a:pPr>
+            <a:r>
+              <a:rPr b="1"/>
+              <a:t>Release activities for implementing significant development initiatives:</a:t>
+            </a:r>
+          </a:p>
+          <a:p>
+            <a:pPr lvl="0" indent="-342900" marL="342900">
+              <a:buAutoNum startAt="7" type="arabicPeriod"/>
+            </a:pPr>
+            <a:r>
+              <a:rPr/>
+              <a:t>Merge feature branch to epic branch and build</a:t>
+            </a:r>
+          </a:p>
+          <a:p>
+            <a:pPr lvl="0" indent="-342900" marL="342900">
+              <a:buAutoNum startAt="7" type="arabicPeriod"/>
+            </a:pPr>
+            <a:r>
+              <a:rPr/>
+              <a:t>Use release pipeline to create preliminary package</a:t>
+            </a:r>
+          </a:p>
+          <a:p>
+            <a:pPr lvl="0" indent="-342900" marL="342900">
+              <a:buAutoNum startAt="7" type="arabicPeriod"/>
+            </a:pPr>
+            <a:r>
+              <a:rPr/>
+              <a:t>Deploy package to project test environment</a:t>
+            </a:r>
+          </a:p>
+          <a:p>
+            <a:pPr lvl="0" indent="-342900" marL="342900">
+              <a:buAutoNum startAt="7" type="arabicPeriod"/>
+            </a:pPr>
+            <a:r>
+              <a:rPr/>
+              <a:t>Frequently synchronize with </a:t>
+            </a:r>
+            <a:r>
+              <a:rPr>
+                <a:latin typeface="Courier"/>
+              </a:rPr>
+              <a:t>main</a:t>
+            </a:r>
+            <a:r>
+              <a:rPr/>
+              <a:t> into the epic branch to avoid making the merge of the </a:t>
+            </a:r>
+            <a:r>
+              <a:rPr>
+                <a:latin typeface="Courier"/>
+              </a:rPr>
+              <a:t>epic</a:t>
+            </a:r>
+            <a:r>
+              <a:rPr/>
+              <a:t> branch into </a:t>
+            </a:r>
+            <a:r>
+              <a:rPr>
+                <a:latin typeface="Courier"/>
+              </a:rPr>
+              <a:t>main</a:t>
+            </a:r>
+            <a:r>
+              <a:rPr/>
+              <a:t> difficult.</a:t>
+            </a:r>
+          </a:p>
+          <a:p>
+            <a:pPr lvl="0" indent="-342900" marL="342900">
+              <a:buAutoNum startAt="7" type="arabicPeriod"/>
+            </a:pPr>
+            <a:r>
+              <a:rPr/>
+              <a:t>Decision </a:t>
+            </a:r>
+            <a:r>
+              <a:rPr b="1"/>
+              <a:t>when</a:t>
+            </a:r>
+            <a:r>
+              <a:rPr/>
+              <a:t> the changes on the epic branch should be released</a:t>
+            </a:r>
+          </a:p>
+          <a:p>
+            <a:pPr lvl="0" indent="-342900" marL="342900">
+              <a:buAutoNum startAt="7" type="arabicPeriod"/>
+            </a:pPr>
+            <a:r>
+              <a:rPr/>
+              <a:t>Merge epic branch into </a:t>
+            </a:r>
+            <a:r>
+              <a:rPr>
+                <a:latin typeface="Courier"/>
+              </a:rPr>
+              <a:t>main</a:t>
+            </a:r>
+            <a:r>
+              <a:rPr/>
+              <a:t> and deliver via the base workflow.</a:t>
             </a:r>
           </a:p>
           <a:p>
@@ -4714,104 +5148,1219 @@
       </p:pic>
     </p:spTree>
   </p:cSld>
+  <p:timing>
+    <p:tnLst>
+      <p:par>
+        <p:cTn id="1" dur="indefinite" restart="never" nodeType="tmRoot">
+          <p:childTnLst>
+            <p:seq concurrent="1" nextAc="seek">
+              <p:cTn id="2" dur="indefinite" nodeType="mainSeq">
+                <p:childTnLst>
+                  <p:par>
+                    <p:cTn id="3" fill="hold">
+                      <p:stCondLst>
+                        <p:cond delay="indefinite"/>
+                      </p:stCondLst>
+                      <p:childTnLst>
+                        <p:par>
+                          <p:cTn id="4" fill="hold">
+                            <p:stCondLst>
+                              <p:cond delay="0"/>
+                            </p:stCondLst>
+                            <p:childTnLst>
+                              <p:par>
+                                <p:cTn id="5" presetID="1" presetClass="entr" presetSubtype="0" fill="hold" grpId="0" nodeType="clickEffect">
+                                  <p:stCondLst>
+                                    <p:cond delay="0"/>
+                                  </p:stCondLst>
+                                  <p:childTnLst>
+                                    <p:set>
+                                      <p:cBhvr>
+                                        <p:cTn id="6" dur="1" fill="hold">
+                                          <p:stCondLst>
+                                            <p:cond delay="0"/>
+                                          </p:stCondLst>
+                                        </p:cTn>
+                                        <p:tgtEl>
+                                          <p:spTgt spid="4">
+                                            <p:txEl>
+                                              <p:pRg st="2" end="2"/>
+                                            </p:txEl>
+                                          </p:spTgt>
+                                        </p:tgtEl>
+                                        <p:attrNameLst>
+                                          <p:attrName>style.visibility</p:attrName>
+                                        </p:attrNameLst>
+                                      </p:cBhvr>
+                                      <p:to>
+                                        <p:strVal val="visible"/>
+                                      </p:to>
+                                    </p:set>
+                                  </p:childTnLst>
+                                </p:cTn>
+                              </p:par>
+                            </p:childTnLst>
+                          </p:cTn>
+                        </p:par>
+                      </p:childTnLst>
+                    </p:cTn>
+                  </p:par>
+                  <p:par>
+                    <p:cTn id="7" fill="hold">
+                      <p:stCondLst>
+                        <p:cond delay="indefinite"/>
+                      </p:stCondLst>
+                      <p:childTnLst>
+                        <p:par>
+                          <p:cTn id="8" fill="hold">
+                            <p:stCondLst>
+                              <p:cond delay="0"/>
+                            </p:stCondLst>
+                            <p:childTnLst>
+                              <p:par>
+                                <p:cTn id="9" presetID="1" presetClass="entr" presetSubtype="0" fill="hold" grpId="0" nodeType="clickEffect">
+                                  <p:stCondLst>
+                                    <p:cond delay="0"/>
+                                  </p:stCondLst>
+                                  <p:childTnLst>
+                                    <p:set>
+                                      <p:cBhvr>
+                                        <p:cTn id="10" dur="1" fill="hold">
+                                          <p:stCondLst>
+                                            <p:cond delay="0"/>
+                                          </p:stCondLst>
+                                        </p:cTn>
+                                        <p:tgtEl>
+                                          <p:spTgt spid="4">
+                                            <p:txEl>
+                                              <p:pRg st="3" end="3"/>
+                                            </p:txEl>
+                                          </p:spTgt>
+                                        </p:tgtEl>
+                                        <p:attrNameLst>
+                                          <p:attrName>style.visibility</p:attrName>
+                                        </p:attrNameLst>
+                                      </p:cBhvr>
+                                      <p:to>
+                                        <p:strVal val="visible"/>
+                                      </p:to>
+                                    </p:set>
+                                  </p:childTnLst>
+                                </p:cTn>
+                              </p:par>
+                            </p:childTnLst>
+                          </p:cTn>
+                        </p:par>
+                      </p:childTnLst>
+                    </p:cTn>
+                  </p:par>
+                  <p:par>
+                    <p:cTn id="11" fill="hold">
+                      <p:stCondLst>
+                        <p:cond delay="indefinite"/>
+                      </p:stCondLst>
+                      <p:childTnLst>
+                        <p:par>
+                          <p:cTn id="12" fill="hold">
+                            <p:stCondLst>
+                              <p:cond delay="0"/>
+                            </p:stCondLst>
+                            <p:childTnLst>
+                              <p:par>
+                                <p:cTn id="13" presetID="1" presetClass="entr" presetSubtype="0" fill="hold" grpId="0" nodeType="clickEffect">
+                                  <p:stCondLst>
+                                    <p:cond delay="0"/>
+                                  </p:stCondLst>
+                                  <p:childTnLst>
+                                    <p:set>
+                                      <p:cBhvr>
+                                        <p:cTn id="14" dur="1" fill="hold">
+                                          <p:stCondLst>
+                                            <p:cond delay="0"/>
+                                          </p:stCondLst>
+                                        </p:cTn>
+                                        <p:tgtEl>
+                                          <p:spTgt spid="4">
+                                            <p:txEl>
+                                              <p:pRg st="4" end="4"/>
+                                            </p:txEl>
+                                          </p:spTgt>
+                                        </p:tgtEl>
+                                        <p:attrNameLst>
+                                          <p:attrName>style.visibility</p:attrName>
+                                        </p:attrNameLst>
+                                      </p:cBhvr>
+                                      <p:to>
+                                        <p:strVal val="visible"/>
+                                      </p:to>
+                                    </p:set>
+                                  </p:childTnLst>
+                                </p:cTn>
+                              </p:par>
+                            </p:childTnLst>
+                          </p:cTn>
+                        </p:par>
+                      </p:childTnLst>
+                    </p:cTn>
+                  </p:par>
+                  <p:par>
+                    <p:cTn id="15" fill="hold">
+                      <p:stCondLst>
+                        <p:cond delay="indefinite"/>
+                      </p:stCondLst>
+                      <p:childTnLst>
+                        <p:par>
+                          <p:cTn id="16" fill="hold">
+                            <p:stCondLst>
+                              <p:cond delay="0"/>
+                            </p:stCondLst>
+                            <p:childTnLst>
+                              <p:par>
+                                <p:cTn id="17" presetID="1" presetClass="entr" presetSubtype="0" fill="hold" grpId="0" nodeType="clickEffect">
+                                  <p:stCondLst>
+                                    <p:cond delay="0"/>
+                                  </p:stCondLst>
+                                  <p:childTnLst>
+                                    <p:set>
+                                      <p:cBhvr>
+                                        <p:cTn id="18" dur="1" fill="hold">
+                                          <p:stCondLst>
+                                            <p:cond delay="0"/>
+                                          </p:stCondLst>
+                                        </p:cTn>
+                                        <p:tgtEl>
+                                          <p:spTgt spid="4">
+                                            <p:txEl>
+                                              <p:pRg st="5" end="5"/>
+                                            </p:txEl>
+                                          </p:spTgt>
+                                        </p:tgtEl>
+                                        <p:attrNameLst>
+                                          <p:attrName>style.visibility</p:attrName>
+                                        </p:attrNameLst>
+                                      </p:cBhvr>
+                                      <p:to>
+                                        <p:strVal val="visible"/>
+                                      </p:to>
+                                    </p:set>
+                                  </p:childTnLst>
+                                </p:cTn>
+                              </p:par>
+                            </p:childTnLst>
+                          </p:cTn>
+                        </p:par>
+                      </p:childTnLst>
+                    </p:cTn>
+                  </p:par>
+                  <p:par>
+                    <p:cTn id="19" fill="hold">
+                      <p:stCondLst>
+                        <p:cond delay="indefinite"/>
+                      </p:stCondLst>
+                      <p:childTnLst>
+                        <p:par>
+                          <p:cTn id="20" fill="hold">
+                            <p:stCondLst>
+                              <p:cond delay="0"/>
+                            </p:stCondLst>
+                            <p:childTnLst>
+                              <p:par>
+                                <p:cTn id="21" presetID="1" presetClass="entr" presetSubtype="0" fill="hold" grpId="0" nodeType="clickEffect">
+                                  <p:stCondLst>
+                                    <p:cond delay="0"/>
+                                  </p:stCondLst>
+                                  <p:childTnLst>
+                                    <p:set>
+                                      <p:cBhvr>
+                                        <p:cTn id="22" dur="1" fill="hold">
+                                          <p:stCondLst>
+                                            <p:cond delay="0"/>
+                                          </p:stCondLst>
+                                        </p:cTn>
+                                        <p:tgtEl>
+                                          <p:spTgt spid="4">
+                                            <p:txEl>
+                                              <p:pRg st="6" end="6"/>
+                                            </p:txEl>
+                                          </p:spTgt>
+                                        </p:tgtEl>
+                                        <p:attrNameLst>
+                                          <p:attrName>style.visibility</p:attrName>
+                                        </p:attrNameLst>
+                                      </p:cBhvr>
+                                      <p:to>
+                                        <p:strVal val="visible"/>
+                                      </p:to>
+                                    </p:set>
+                                  </p:childTnLst>
+                                </p:cTn>
+                              </p:par>
+                            </p:childTnLst>
+                          </p:cTn>
+                        </p:par>
+                      </p:childTnLst>
+                    </p:cTn>
+                  </p:par>
+                  <p:par>
+                    <p:cTn id="23" fill="hold">
+                      <p:stCondLst>
+                        <p:cond delay="indefinite"/>
+                      </p:stCondLst>
+                      <p:childTnLst>
+                        <p:par>
+                          <p:cTn id="24" fill="hold">
+                            <p:stCondLst>
+                              <p:cond delay="0"/>
+                            </p:stCondLst>
+                            <p:childTnLst>
+                              <p:par>
+                                <p:cTn id="25" presetID="1" presetClass="entr" presetSubtype="0" fill="hold" grpId="0" nodeType="clickEffect">
+                                  <p:stCondLst>
+                                    <p:cond delay="0"/>
+                                  </p:stCondLst>
+                                  <p:childTnLst>
+                                    <p:set>
+                                      <p:cBhvr>
+                                        <p:cTn id="26" dur="1" fill="hold">
+                                          <p:stCondLst>
+                                            <p:cond delay="0"/>
+                                          </p:stCondLst>
+                                        </p:cTn>
+                                        <p:tgtEl>
+                                          <p:spTgt spid="4">
+                                            <p:txEl>
+                                              <p:pRg st="7" end="7"/>
+                                            </p:txEl>
+                                          </p:spTgt>
+                                        </p:tgtEl>
+                                        <p:attrNameLst>
+                                          <p:attrName>style.visibility</p:attrName>
+                                        </p:attrNameLst>
+                                      </p:cBhvr>
+                                      <p:to>
+                                        <p:strVal val="visible"/>
+                                      </p:to>
+                                    </p:set>
+                                  </p:childTnLst>
+                                </p:cTn>
+                              </p:par>
+                            </p:childTnLst>
+                          </p:cTn>
+                        </p:par>
+                      </p:childTnLst>
+                    </p:cTn>
+                  </p:par>
+                  <p:par>
+                    <p:cTn id="27" fill="hold">
+                      <p:stCondLst>
+                        <p:cond delay="indefinite"/>
+                      </p:stCondLst>
+                      <p:childTnLst>
+                        <p:par>
+                          <p:cTn id="28" fill="hold">
+                            <p:stCondLst>
+                              <p:cond delay="0"/>
+                            </p:stCondLst>
+                            <p:childTnLst>
+                              <p:par>
+                                <p:cTn id="29" presetID="1" presetClass="entr" presetSubtype="0" fill="hold" grpId="0" nodeType="clickEffect">
+                                  <p:stCondLst>
+                                    <p:cond delay="0"/>
+                                  </p:stCondLst>
+                                  <p:childTnLst>
+                                    <p:set>
+                                      <p:cBhvr>
+                                        <p:cTn id="30" dur="1" fill="hold">
+                                          <p:stCondLst>
+                                            <p:cond delay="0"/>
+                                          </p:stCondLst>
+                                        </p:cTn>
+                                        <p:tgtEl>
+                                          <p:spTgt spid="4">
+                                            <p:txEl>
+                                              <p:pRg st="10" end="10"/>
+                                            </p:txEl>
+                                          </p:spTgt>
+                                        </p:tgtEl>
+                                        <p:attrNameLst>
+                                          <p:attrName>style.visibility</p:attrName>
+                                        </p:attrNameLst>
+                                      </p:cBhvr>
+                                      <p:to>
+                                        <p:strVal val="visible"/>
+                                      </p:to>
+                                    </p:set>
+                                  </p:childTnLst>
+                                </p:cTn>
+                              </p:par>
+                            </p:childTnLst>
+                          </p:cTn>
+                        </p:par>
+                      </p:childTnLst>
+                    </p:cTn>
+                  </p:par>
+                  <p:par>
+                    <p:cTn id="31" fill="hold">
+                      <p:stCondLst>
+                        <p:cond delay="indefinite"/>
+                      </p:stCondLst>
+                      <p:childTnLst>
+                        <p:par>
+                          <p:cTn id="32" fill="hold">
+                            <p:stCondLst>
+                              <p:cond delay="0"/>
+                            </p:stCondLst>
+                            <p:childTnLst>
+                              <p:par>
+                                <p:cTn id="33" presetID="1" presetClass="entr" presetSubtype="0" fill="hold" grpId="0" nodeType="clickEffect">
+                                  <p:stCondLst>
+                                    <p:cond delay="0"/>
+                                  </p:stCondLst>
+                                  <p:childTnLst>
+                                    <p:set>
+                                      <p:cBhvr>
+                                        <p:cTn id="34" dur="1" fill="hold">
+                                          <p:stCondLst>
+                                            <p:cond delay="0"/>
+                                          </p:stCondLst>
+                                        </p:cTn>
+                                        <p:tgtEl>
+                                          <p:spTgt spid="4">
+                                            <p:txEl>
+                                              <p:pRg st="11" end="11"/>
+                                            </p:txEl>
+                                          </p:spTgt>
+                                        </p:tgtEl>
+                                        <p:attrNameLst>
+                                          <p:attrName>style.visibility</p:attrName>
+                                        </p:attrNameLst>
+                                      </p:cBhvr>
+                                      <p:to>
+                                        <p:strVal val="visible"/>
+                                      </p:to>
+                                    </p:set>
+                                  </p:childTnLst>
+                                </p:cTn>
+                              </p:par>
+                            </p:childTnLst>
+                          </p:cTn>
+                        </p:par>
+                      </p:childTnLst>
+                    </p:cTn>
+                  </p:par>
+                  <p:par>
+                    <p:cTn id="35" fill="hold">
+                      <p:stCondLst>
+                        <p:cond delay="indefinite"/>
+                      </p:stCondLst>
+                      <p:childTnLst>
+                        <p:par>
+                          <p:cTn id="36" fill="hold">
+                            <p:stCondLst>
+                              <p:cond delay="0"/>
+                            </p:stCondLst>
+                            <p:childTnLst>
+                              <p:par>
+                                <p:cTn id="37" presetID="1" presetClass="entr" presetSubtype="0" fill="hold" grpId="0" nodeType="clickEffect">
+                                  <p:stCondLst>
+                                    <p:cond delay="0"/>
+                                  </p:stCondLst>
+                                  <p:childTnLst>
+                                    <p:set>
+                                      <p:cBhvr>
+                                        <p:cTn id="38" dur="1" fill="hold">
+                                          <p:stCondLst>
+                                            <p:cond delay="0"/>
+                                          </p:stCondLst>
+                                        </p:cTn>
+                                        <p:tgtEl>
+                                          <p:spTgt spid="4">
+                                            <p:txEl>
+                                              <p:pRg st="12" end="12"/>
+                                            </p:txEl>
+                                          </p:spTgt>
+                                        </p:tgtEl>
+                                        <p:attrNameLst>
+                                          <p:attrName>style.visibility</p:attrName>
+                                        </p:attrNameLst>
+                                      </p:cBhvr>
+                                      <p:to>
+                                        <p:strVal val="visible"/>
+                                      </p:to>
+                                    </p:set>
+                                  </p:childTnLst>
+                                </p:cTn>
+                              </p:par>
+                            </p:childTnLst>
+                          </p:cTn>
+                        </p:par>
+                      </p:childTnLst>
+                    </p:cTn>
+                  </p:par>
+                  <p:par>
+                    <p:cTn id="39" fill="hold">
+                      <p:stCondLst>
+                        <p:cond delay="indefinite"/>
+                      </p:stCondLst>
+                      <p:childTnLst>
+                        <p:par>
+                          <p:cTn id="40" fill="hold">
+                            <p:stCondLst>
+                              <p:cond delay="0"/>
+                            </p:stCondLst>
+                            <p:childTnLst>
+                              <p:par>
+                                <p:cTn id="41" presetID="1" presetClass="entr" presetSubtype="0" fill="hold" grpId="0" nodeType="clickEffect">
+                                  <p:stCondLst>
+                                    <p:cond delay="0"/>
+                                  </p:stCondLst>
+                                  <p:childTnLst>
+                                    <p:set>
+                                      <p:cBhvr>
+                                        <p:cTn id="42" dur="1" fill="hold">
+                                          <p:stCondLst>
+                                            <p:cond delay="0"/>
+                                          </p:stCondLst>
+                                        </p:cTn>
+                                        <p:tgtEl>
+                                          <p:spTgt spid="4">
+                                            <p:txEl>
+                                              <p:pRg st="13" end="13"/>
+                                            </p:txEl>
+                                          </p:spTgt>
+                                        </p:tgtEl>
+                                        <p:attrNameLst>
+                                          <p:attrName>style.visibility</p:attrName>
+                                        </p:attrNameLst>
+                                      </p:cBhvr>
+                                      <p:to>
+                                        <p:strVal val="visible"/>
+                                      </p:to>
+                                    </p:set>
+                                  </p:childTnLst>
+                                </p:cTn>
+                              </p:par>
+                            </p:childTnLst>
+                          </p:cTn>
+                        </p:par>
+                      </p:childTnLst>
+                    </p:cTn>
+                  </p:par>
+                  <p:par>
+                    <p:cTn id="43" fill="hold">
+                      <p:stCondLst>
+                        <p:cond delay="indefinite"/>
+                      </p:stCondLst>
+                      <p:childTnLst>
+                        <p:par>
+                          <p:cTn id="44" fill="hold">
+                            <p:stCondLst>
+                              <p:cond delay="0"/>
+                            </p:stCondLst>
+                            <p:childTnLst>
+                              <p:par>
+                                <p:cTn id="45" presetID="1" presetClass="entr" presetSubtype="0" fill="hold" grpId="0" nodeType="clickEffect">
+                                  <p:stCondLst>
+                                    <p:cond delay="0"/>
+                                  </p:stCondLst>
+                                  <p:childTnLst>
+                                    <p:set>
+                                      <p:cBhvr>
+                                        <p:cTn id="46" dur="1" fill="hold">
+                                          <p:stCondLst>
+                                            <p:cond delay="0"/>
+                                          </p:stCondLst>
+                                        </p:cTn>
+                                        <p:tgtEl>
+                                          <p:spTgt spid="4">
+                                            <p:txEl>
+                                              <p:pRg st="14" end="14"/>
+                                            </p:txEl>
+                                          </p:spTgt>
+                                        </p:tgtEl>
+                                        <p:attrNameLst>
+                                          <p:attrName>style.visibility</p:attrName>
+                                        </p:attrNameLst>
+                                      </p:cBhvr>
+                                      <p:to>
+                                        <p:strVal val="visible"/>
+                                      </p:to>
+                                    </p:set>
+                                  </p:childTnLst>
+                                </p:cTn>
+                              </p:par>
+                            </p:childTnLst>
+                          </p:cTn>
+                        </p:par>
+                      </p:childTnLst>
+                    </p:cTn>
+                  </p:par>
+                  <p:par>
+                    <p:cTn id="47" fill="hold">
+                      <p:stCondLst>
+                        <p:cond delay="indefinite"/>
+                      </p:stCondLst>
+                      <p:childTnLst>
+                        <p:par>
+                          <p:cTn id="48" fill="hold">
+                            <p:stCondLst>
+                              <p:cond delay="0"/>
+                            </p:stCondLst>
+                            <p:childTnLst>
+                              <p:par>
+                                <p:cTn id="49" presetID="1" presetClass="entr" presetSubtype="0" fill="hold" grpId="0" nodeType="clickEffect">
+                                  <p:stCondLst>
+                                    <p:cond delay="0"/>
+                                  </p:stCondLst>
+                                  <p:childTnLst>
+                                    <p:set>
+                                      <p:cBhvr>
+                                        <p:cTn id="50" dur="1" fill="hold">
+                                          <p:stCondLst>
+                                            <p:cond delay="0"/>
+                                          </p:stCondLst>
+                                        </p:cTn>
+                                        <p:tgtEl>
+                                          <p:spTgt spid="4">
+                                            <p:txEl>
+                                              <p:pRg st="15" end="15"/>
+                                            </p:txEl>
+                                          </p:spTgt>
+                                        </p:tgtEl>
+                                        <p:attrNameLst>
+                                          <p:attrName>style.visibility</p:attrName>
+                                        </p:attrNameLst>
+                                      </p:cBhvr>
+                                      <p:to>
+                                        <p:strVal val="visible"/>
+                                      </p:to>
+                                    </p:set>
+                                  </p:childTnLst>
+                                </p:cTn>
+                              </p:par>
+                            </p:childTnLst>
+                          </p:cTn>
+                        </p:par>
+                      </p:childTnLst>
+                    </p:cTn>
+                  </p:par>
+                  <p:par>
+                    <p:cTn id="51" fill="hold">
+                      <p:stCondLst>
+                        <p:cond delay="indefinite"/>
+                      </p:stCondLst>
+                      <p:childTnLst>
+                        <p:par>
+                          <p:cTn id="52" fill="hold">
+                            <p:stCondLst>
+                              <p:cond delay="0"/>
+                            </p:stCondLst>
+                            <p:childTnLst>
+                              <p:par>
+                                <p:cTn id="53" presetID="1" presetClass="entr" presetSubtype="0" fill="hold" grpId="0" nodeType="clickEffect">
+                                  <p:stCondLst>
+                                    <p:cond delay="0"/>
+                                  </p:stCondLst>
+                                  <p:childTnLst>
+                                    <p:set>
+                                      <p:cBhvr>
+                                        <p:cTn id="54" dur="1" fill="hold">
+                                          <p:stCondLst>
+                                            <p:cond delay="0"/>
+                                          </p:stCondLst>
+                                        </p:cTn>
+                                        <p:tgtEl>
+                                          <p:spTgt spid="4">
+                                            <p:txEl>
+                                              <p:pRg st="23" end="23"/>
+                                            </p:txEl>
+                                          </p:spTgt>
+                                        </p:tgtEl>
+                                        <p:attrNameLst>
+                                          <p:attrName>style.visibility</p:attrName>
+                                        </p:attrNameLst>
+                                      </p:cBhvr>
+                                      <p:to>
+                                        <p:strVal val="visible"/>
+                                      </p:to>
+                                    </p:set>
+                                  </p:childTnLst>
+                                </p:cTn>
+                              </p:par>
+                            </p:childTnLst>
+                          </p:cTn>
+                        </p:par>
+                      </p:childTnLst>
+                    </p:cTn>
+                  </p:par>
+                  <p:par>
+                    <p:cTn id="55" fill="hold">
+                      <p:stCondLst>
+                        <p:cond delay="indefinite"/>
+                      </p:stCondLst>
+                      <p:childTnLst>
+                        <p:par>
+                          <p:cTn id="56" fill="hold">
+                            <p:stCondLst>
+                              <p:cond delay="0"/>
+                            </p:stCondLst>
+                            <p:childTnLst>
+                              <p:par>
+                                <p:cTn id="57" presetID="1" presetClass="entr" presetSubtype="0" fill="hold" grpId="0" nodeType="clickEffect">
+                                  <p:stCondLst>
+                                    <p:cond delay="0"/>
+                                  </p:stCondLst>
+                                  <p:childTnLst>
+                                    <p:set>
+                                      <p:cBhvr>
+                                        <p:cTn id="58" dur="1" fill="hold">
+                                          <p:stCondLst>
+                                            <p:cond delay="0"/>
+                                          </p:stCondLst>
+                                        </p:cTn>
+                                        <p:tgtEl>
+                                          <p:spTgt spid="4">
+                                            <p:txEl>
+                                              <p:pRg st="24" end="24"/>
+                                            </p:txEl>
+                                          </p:spTgt>
+                                        </p:tgtEl>
+                                        <p:attrNameLst>
+                                          <p:attrName>style.visibility</p:attrName>
+                                        </p:attrNameLst>
+                                      </p:cBhvr>
+                                      <p:to>
+                                        <p:strVal val="visible"/>
+                                      </p:to>
+                                    </p:set>
+                                  </p:childTnLst>
+                                </p:cTn>
+                              </p:par>
+                            </p:childTnLst>
+                          </p:cTn>
+                        </p:par>
+                      </p:childTnLst>
+                    </p:cTn>
+                  </p:par>
+                  <p:par>
+                    <p:cTn id="59" fill="hold">
+                      <p:stCondLst>
+                        <p:cond delay="indefinite"/>
+                      </p:stCondLst>
+                      <p:childTnLst>
+                        <p:par>
+                          <p:cTn id="60" fill="hold">
+                            <p:stCondLst>
+                              <p:cond delay="0"/>
+                            </p:stCondLst>
+                            <p:childTnLst>
+                              <p:par>
+                                <p:cTn id="61" presetID="1" presetClass="entr" presetSubtype="0" fill="hold" grpId="0" nodeType="clickEffect">
+                                  <p:stCondLst>
+                                    <p:cond delay="0"/>
+                                  </p:stCondLst>
+                                  <p:childTnLst>
+                                    <p:set>
+                                      <p:cBhvr>
+                                        <p:cTn id="62" dur="1" fill="hold">
+                                          <p:stCondLst>
+                                            <p:cond delay="0"/>
+                                          </p:stCondLst>
+                                        </p:cTn>
+                                        <p:tgtEl>
+                                          <p:spTgt spid="4">
+                                            <p:txEl>
+                                              <p:pRg st="25" end="25"/>
+                                            </p:txEl>
+                                          </p:spTgt>
+                                        </p:tgtEl>
+                                        <p:attrNameLst>
+                                          <p:attrName>style.visibility</p:attrName>
+                                        </p:attrNameLst>
+                                      </p:cBhvr>
+                                      <p:to>
+                                        <p:strVal val="visible"/>
+                                      </p:to>
+                                    </p:set>
+                                  </p:childTnLst>
+                                </p:cTn>
+                              </p:par>
+                            </p:childTnLst>
+                          </p:cTn>
+                        </p:par>
+                      </p:childTnLst>
+                    </p:cTn>
+                  </p:par>
+                  <p:par>
+                    <p:cTn id="63" fill="hold">
+                      <p:stCondLst>
+                        <p:cond delay="indefinite"/>
+                      </p:stCondLst>
+                      <p:childTnLst>
+                        <p:par>
+                          <p:cTn id="64" fill="hold">
+                            <p:stCondLst>
+                              <p:cond delay="0"/>
+                            </p:stCondLst>
+                            <p:childTnLst>
+                              <p:par>
+                                <p:cTn id="65" presetID="1" presetClass="entr" presetSubtype="0" fill="hold" grpId="0" nodeType="clickEffect">
+                                  <p:stCondLst>
+                                    <p:cond delay="0"/>
+                                  </p:stCondLst>
+                                  <p:childTnLst>
+                                    <p:set>
+                                      <p:cBhvr>
+                                        <p:cTn id="66" dur="1" fill="hold">
+                                          <p:stCondLst>
+                                            <p:cond delay="0"/>
+                                          </p:stCondLst>
+                                        </p:cTn>
+                                        <p:tgtEl>
+                                          <p:spTgt spid="4">
+                                            <p:txEl>
+                                              <p:pRg st="26" end="26"/>
+                                            </p:txEl>
+                                          </p:spTgt>
+                                        </p:tgtEl>
+                                        <p:attrNameLst>
+                                          <p:attrName>style.visibility</p:attrName>
+                                        </p:attrNameLst>
+                                      </p:cBhvr>
+                                      <p:to>
+                                        <p:strVal val="visible"/>
+                                      </p:to>
+                                    </p:set>
+                                  </p:childTnLst>
+                                </p:cTn>
+                              </p:par>
+                            </p:childTnLst>
+                          </p:cTn>
+                        </p:par>
+                      </p:childTnLst>
+                    </p:cTn>
+                  </p:par>
+                  <p:par>
+                    <p:cTn id="67" fill="hold">
+                      <p:stCondLst>
+                        <p:cond delay="indefinite"/>
+                      </p:stCondLst>
+                      <p:childTnLst>
+                        <p:par>
+                          <p:cTn id="68" fill="hold">
+                            <p:stCondLst>
+                              <p:cond delay="0"/>
+                            </p:stCondLst>
+                            <p:childTnLst>
+                              <p:par>
+                                <p:cTn id="69" presetID="1" presetClass="entr" presetSubtype="0" fill="hold" grpId="0" nodeType="clickEffect">
+                                  <p:stCondLst>
+                                    <p:cond delay="0"/>
+                                  </p:stCondLst>
+                                  <p:childTnLst>
+                                    <p:set>
+                                      <p:cBhvr>
+                                        <p:cTn id="70" dur="1" fill="hold">
+                                          <p:stCondLst>
+                                            <p:cond delay="0"/>
+                                          </p:stCondLst>
+                                        </p:cTn>
+                                        <p:tgtEl>
+                                          <p:spTgt spid="4">
+                                            <p:txEl>
+                                              <p:pRg st="27" end="27"/>
+                                            </p:txEl>
+                                          </p:spTgt>
+                                        </p:tgtEl>
+                                        <p:attrNameLst>
+                                          <p:attrName>style.visibility</p:attrName>
+                                        </p:attrNameLst>
+                                      </p:cBhvr>
+                                      <p:to>
+                                        <p:strVal val="visible"/>
+                                      </p:to>
+                                    </p:set>
+                                  </p:childTnLst>
+                                </p:cTn>
+                              </p:par>
+                            </p:childTnLst>
+                          </p:cTn>
+                        </p:par>
+                      </p:childTnLst>
+                    </p:cTn>
+                  </p:par>
+                  <p:par>
+                    <p:cTn id="71" fill="hold">
+                      <p:stCondLst>
+                        <p:cond delay="indefinite"/>
+                      </p:stCondLst>
+                      <p:childTnLst>
+                        <p:par>
+                          <p:cTn id="72" fill="hold">
+                            <p:stCondLst>
+                              <p:cond delay="0"/>
+                            </p:stCondLst>
+                            <p:childTnLst>
+                              <p:par>
+                                <p:cTn id="73" presetID="1" presetClass="entr" presetSubtype="0" fill="hold" grpId="0" nodeType="clickEffect">
+                                  <p:stCondLst>
+                                    <p:cond delay="0"/>
+                                  </p:stCondLst>
+                                  <p:childTnLst>
+                                    <p:set>
+                                      <p:cBhvr>
+                                        <p:cTn id="74" dur="1" fill="hold">
+                                          <p:stCondLst>
+                                            <p:cond delay="0"/>
+                                          </p:stCondLst>
+                                        </p:cTn>
+                                        <p:tgtEl>
+                                          <p:spTgt spid="4">
+                                            <p:txEl>
+                                              <p:pRg st="28" end="28"/>
+                                            </p:txEl>
+                                          </p:spTgt>
+                                        </p:tgtEl>
+                                        <p:attrNameLst>
+                                          <p:attrName>style.visibility</p:attrName>
+                                        </p:attrNameLst>
+                                      </p:cBhvr>
+                                      <p:to>
+                                        <p:strVal val="visible"/>
+                                      </p:to>
+                                    </p:set>
+                                  </p:childTnLst>
+                                </p:cTn>
+                              </p:par>
+                            </p:childTnLst>
+                          </p:cTn>
+                        </p:par>
+                      </p:childTnLst>
+                    </p:cTn>
+                  </p:par>
+                  <p:par>
+                    <p:cTn id="75" fill="hold">
+                      <p:stCondLst>
+                        <p:cond delay="indefinite"/>
+                      </p:stCondLst>
+                      <p:childTnLst>
+                        <p:par>
+                          <p:cTn id="76" fill="hold">
+                            <p:stCondLst>
+                              <p:cond delay="0"/>
+                            </p:stCondLst>
+                            <p:childTnLst>
+                              <p:par>
+                                <p:cTn id="77" presetID="1" presetClass="entr" presetSubtype="0" fill="hold" grpId="0" nodeType="clickEffect">
+                                  <p:stCondLst>
+                                    <p:cond delay="0"/>
+                                  </p:stCondLst>
+                                  <p:childTnLst>
+                                    <p:set>
+                                      <p:cBhvr>
+                                        <p:cTn id="78" dur="1" fill="hold">
+                                          <p:stCondLst>
+                                            <p:cond delay="0"/>
+                                          </p:stCondLst>
+                                        </p:cTn>
+                                        <p:tgtEl>
+                                          <p:spTgt spid="4">
+                                            <p:txEl>
+                                              <p:pRg st="31" end="31"/>
+                                            </p:txEl>
+                                          </p:spTgt>
+                                        </p:tgtEl>
+                                        <p:attrNameLst>
+                                          <p:attrName>style.visibility</p:attrName>
+                                        </p:attrNameLst>
+                                      </p:cBhvr>
+                                      <p:to>
+                                        <p:strVal val="visible"/>
+                                      </p:to>
+                                    </p:set>
+                                  </p:childTnLst>
+                                </p:cTn>
+                              </p:par>
+                            </p:childTnLst>
+                          </p:cTn>
+                        </p:par>
+                      </p:childTnLst>
+                    </p:cTn>
+                  </p:par>
+                  <p:par>
+                    <p:cTn id="79" fill="hold">
+                      <p:stCondLst>
+                        <p:cond delay="indefinite"/>
+                      </p:stCondLst>
+                      <p:childTnLst>
+                        <p:par>
+                          <p:cTn id="80" fill="hold">
+                            <p:stCondLst>
+                              <p:cond delay="0"/>
+                            </p:stCondLst>
+                            <p:childTnLst>
+                              <p:par>
+                                <p:cTn id="81" presetID="1" presetClass="entr" presetSubtype="0" fill="hold" grpId="0" nodeType="clickEffect">
+                                  <p:stCondLst>
+                                    <p:cond delay="0"/>
+                                  </p:stCondLst>
+                                  <p:childTnLst>
+                                    <p:set>
+                                      <p:cBhvr>
+                                        <p:cTn id="82" dur="1" fill="hold">
+                                          <p:stCondLst>
+                                            <p:cond delay="0"/>
+                                          </p:stCondLst>
+                                        </p:cTn>
+                                        <p:tgtEl>
+                                          <p:spTgt spid="4">
+                                            <p:txEl>
+                                              <p:pRg st="32" end="32"/>
+                                            </p:txEl>
+                                          </p:spTgt>
+                                        </p:tgtEl>
+                                        <p:attrNameLst>
+                                          <p:attrName>style.visibility</p:attrName>
+                                        </p:attrNameLst>
+                                      </p:cBhvr>
+                                      <p:to>
+                                        <p:strVal val="visible"/>
+                                      </p:to>
+                                    </p:set>
+                                  </p:childTnLst>
+                                </p:cTn>
+                              </p:par>
+                            </p:childTnLst>
+                          </p:cTn>
+                        </p:par>
+                      </p:childTnLst>
+                    </p:cTn>
+                  </p:par>
+                  <p:par>
+                    <p:cTn id="83" fill="hold">
+                      <p:stCondLst>
+                        <p:cond delay="indefinite"/>
+                      </p:stCondLst>
+                      <p:childTnLst>
+                        <p:par>
+                          <p:cTn id="84" fill="hold">
+                            <p:stCondLst>
+                              <p:cond delay="0"/>
+                            </p:stCondLst>
+                            <p:childTnLst>
+                              <p:par>
+                                <p:cTn id="85" presetID="1" presetClass="entr" presetSubtype="0" fill="hold" grpId="0" nodeType="clickEffect">
+                                  <p:stCondLst>
+                                    <p:cond delay="0"/>
+                                  </p:stCondLst>
+                                  <p:childTnLst>
+                                    <p:set>
+                                      <p:cBhvr>
+                                        <p:cTn id="86" dur="1" fill="hold">
+                                          <p:stCondLst>
+                                            <p:cond delay="0"/>
+                                          </p:stCondLst>
+                                        </p:cTn>
+                                        <p:tgtEl>
+                                          <p:spTgt spid="4">
+                                            <p:txEl>
+                                              <p:pRg st="33" end="33"/>
+                                            </p:txEl>
+                                          </p:spTgt>
+                                        </p:tgtEl>
+                                        <p:attrNameLst>
+                                          <p:attrName>style.visibility</p:attrName>
+                                        </p:attrNameLst>
+                                      </p:cBhvr>
+                                      <p:to>
+                                        <p:strVal val="visible"/>
+                                      </p:to>
+                                    </p:set>
+                                  </p:childTnLst>
+                                </p:cTn>
+                              </p:par>
+                            </p:childTnLst>
+                          </p:cTn>
+                        </p:par>
+                      </p:childTnLst>
+                    </p:cTn>
+                  </p:par>
+                  <p:par>
+                    <p:cTn id="87" fill="hold">
+                      <p:stCondLst>
+                        <p:cond delay="indefinite"/>
+                      </p:stCondLst>
+                      <p:childTnLst>
+                        <p:par>
+                          <p:cTn id="88" fill="hold">
+                            <p:stCondLst>
+                              <p:cond delay="0"/>
+                            </p:stCondLst>
+                            <p:childTnLst>
+                              <p:par>
+                                <p:cTn id="89" presetID="1" presetClass="entr" presetSubtype="0" fill="hold" grpId="0" nodeType="clickEffect">
+                                  <p:stCondLst>
+                                    <p:cond delay="0"/>
+                                  </p:stCondLst>
+                                  <p:childTnLst>
+                                    <p:set>
+                                      <p:cBhvr>
+                                        <p:cTn id="90" dur="1" fill="hold">
+                                          <p:stCondLst>
+                                            <p:cond delay="0"/>
+                                          </p:stCondLst>
+                                        </p:cTn>
+                                        <p:tgtEl>
+                                          <p:spTgt spid="4">
+                                            <p:txEl>
+                                              <p:pRg st="34" end="34"/>
+                                            </p:txEl>
+                                          </p:spTgt>
+                                        </p:tgtEl>
+                                        <p:attrNameLst>
+                                          <p:attrName>style.visibility</p:attrName>
+                                        </p:attrNameLst>
+                                      </p:cBhvr>
+                                      <p:to>
+                                        <p:strVal val="visible"/>
+                                      </p:to>
+                                    </p:set>
+                                  </p:childTnLst>
+                                </p:cTn>
+                              </p:par>
+                            </p:childTnLst>
+                          </p:cTn>
+                        </p:par>
+                      </p:childTnLst>
+                    </p:cTn>
+                  </p:par>
+                  <p:par>
+                    <p:cTn id="91" fill="hold">
+                      <p:stCondLst>
+                        <p:cond delay="indefinite"/>
+                      </p:stCondLst>
+                      <p:childTnLst>
+                        <p:par>
+                          <p:cTn id="92" fill="hold">
+                            <p:stCondLst>
+                              <p:cond delay="0"/>
+                            </p:stCondLst>
+                            <p:childTnLst>
+                              <p:par>
+                                <p:cTn id="93" presetID="1" presetClass="entr" presetSubtype="0" fill="hold" grpId="0" nodeType="clickEffect">
+                                  <p:stCondLst>
+                                    <p:cond delay="0"/>
+                                  </p:stCondLst>
+                                  <p:childTnLst>
+                                    <p:set>
+                                      <p:cBhvr>
+                                        <p:cTn id="94" dur="1" fill="hold">
+                                          <p:stCondLst>
+                                            <p:cond delay="0"/>
+                                          </p:stCondLst>
+                                        </p:cTn>
+                                        <p:tgtEl>
+                                          <p:spTgt spid="4">
+                                            <p:txEl>
+                                              <p:pRg st="35" end="35"/>
+                                            </p:txEl>
+                                          </p:spTgt>
+                                        </p:tgtEl>
+                                        <p:attrNameLst>
+                                          <p:attrName>style.visibility</p:attrName>
+                                        </p:attrNameLst>
+                                      </p:cBhvr>
+                                      <p:to>
+                                        <p:strVal val="visible"/>
+                                      </p:to>
+                                    </p:set>
+                                  </p:childTnLst>
+                                </p:cTn>
+                              </p:par>
+                            </p:childTnLst>
+                          </p:cTn>
+                        </p:par>
+                      </p:childTnLst>
+                    </p:cTn>
+                  </p:par>
+                  <p:par>
+                    <p:cTn id="95" fill="hold">
+                      <p:stCondLst>
+                        <p:cond delay="indefinite"/>
+                      </p:stCondLst>
+                      <p:childTnLst>
+                        <p:par>
+                          <p:cTn id="96" fill="hold">
+                            <p:stCondLst>
+                              <p:cond delay="0"/>
+                            </p:stCondLst>
+                            <p:childTnLst>
+                              <p:par>
+                                <p:cTn id="97" presetID="1" presetClass="entr" presetSubtype="0" fill="hold" grpId="0" nodeType="clickEffect">
+                                  <p:stCondLst>
+                                    <p:cond delay="0"/>
+                                  </p:stCondLst>
+                                  <p:childTnLst>
+                                    <p:set>
+                                      <p:cBhvr>
+                                        <p:cTn id="98" dur="1" fill="hold">
+                                          <p:stCondLst>
+                                            <p:cond delay="0"/>
+                                          </p:stCondLst>
+                                        </p:cTn>
+                                        <p:tgtEl>
+                                          <p:spTgt spid="4">
+                                            <p:txEl>
+                                              <p:pRg st="36" end="36"/>
+                                            </p:txEl>
+                                          </p:spTgt>
+                                        </p:tgtEl>
+                                        <p:attrNameLst>
+                                          <p:attrName>style.visibility</p:attrName>
+                                        </p:attrNameLst>
+                                      </p:cBhvr>
+                                      <p:to>
+                                        <p:strVal val="visible"/>
+                                      </p:to>
+                                    </p:set>
+                                  </p:childTnLst>
+                                </p:cTn>
+                              </p:par>
+                            </p:childTnLst>
+                          </p:cTn>
+                        </p:par>
+                      </p:childTnLst>
+                    </p:cTn>
+                  </p:par>
+                </p:childTnLst>
+              </p:cTn>
+              <p:prevCondLst>
+                <p:cond evt="onPrev" delay="0">
+                  <p:tgtEl>
+                    <p:sldTgt/>
+                  </p:tgtEl>
+                </p:cond>
+              </p:prevCondLst>
+              <p:nextCondLst>
+                <p:cond evt="onNext" delay="0">
+                  <p:tgtEl>
+                    <p:sldTgt/>
+                  </p:tgtEl>
+                </p:cond>
+              </p:nextCondLst>
+            </p:seq>
+          </p:childTnLst>
+        </p:cTn>
+      </p:par>
+    </p:tnLst>
+    <p:bldLst>
+      <p:bldP spid="4" grpId="0" uiExpand="1" build="p"/>
+    </p:bldLst>
+  </p:timing>
 </p:sld>
 </file>
 
 <file path=ppt/slides/slide15.xml><?xml version="1.0" encoding="utf-8"?>
-<p:sld xmlns:a="http://schemas.openxmlformats.org/drawingml/2006/main" xmlns:r="http://schemas.openxmlformats.org/officeDocument/2006/relationships" xmlns:p="http://schemas.openxmlformats.org/presentationml/2006/main">
-  <p:cSld>
-    <p:spTree>
-      <p:nvGrpSpPr>
-        <p:cNvPr id="1" name=""/>
-        <p:cNvGrpSpPr/>
-        <p:nvPr/>
-      </p:nvGrpSpPr>
-      <p:grpSpPr>
-        <a:xfrm>
-          <a:off x="0" y="0"/>
-          <a:ext cx="0" cy="0"/>
-          <a:chOff x="0" y="0"/>
-          <a:chExt cx="0" cy="0"/>
-        </a:xfrm>
-      </p:grpSpPr>
-      <p:sp>
-        <p:nvSpPr>
-          <p:cNvPr id="3" name="Content Placeholder 2"/>
-          <p:cNvSpPr>
-            <a:spLocks noGrp="1"/>
-          </p:cNvSpPr>
-          <p:nvPr>
-            <p:ph idx="1"/>
-          </p:nvPr>
-        </p:nvSpPr>
-        <p:spPr/>
-        <p:txBody>
-          <a:bodyPr/>
-          <a:lstStyle/>
-          <a:p>
-            <a:pPr lvl="0" indent="0" marL="0">
-              <a:spcBef>
-                <a:spcPts val="3000"/>
-              </a:spcBef>
-              <a:buNone/>
-            </a:pPr>
-            <a:r>
-              <a:rPr b="1"/>
-              <a:t>Guidelines and policies in the epic branch workflow</a:t>
-            </a:r>
-          </a:p>
-          <a:p>
-            <a:pPr lvl="0"/>
-            <a:r>
-              <a:rPr/>
-              <a:t>Frequently synchronize with </a:t>
-            </a:r>
-            <a:r>
-              <a:rPr>
-                <a:latin typeface="Courier"/>
-              </a:rPr>
-              <a:t>main</a:t>
-            </a:r>
-            <a:r>
-              <a:rPr/>
-              <a:t> into the epic branch to avoid making the merge of the </a:t>
-            </a:r>
-            <a:r>
-              <a:rPr>
-                <a:latin typeface="Courier"/>
-              </a:rPr>
-              <a:t>epic</a:t>
-            </a:r>
-            <a:r>
-              <a:rPr/>
-              <a:t> branch into </a:t>
-            </a:r>
-            <a:r>
-              <a:rPr>
-                <a:latin typeface="Courier"/>
-              </a:rPr>
-              <a:t>main</a:t>
-            </a:r>
-            <a:r>
-              <a:rPr/>
-              <a:t> difficult.</a:t>
-            </a:r>
-          </a:p>
-          <a:p>
-            <a:pPr lvl="0"/>
-            <a:r>
-              <a:rPr/>
-              <a:t>Preliminary packages must not be deployed to a production runtime.</a:t>
-            </a:r>
-          </a:p>
-        </p:txBody>
-      </p:sp>
-    </p:spTree>
-  </p:cSld>
-</p:sld>
-</file>
-
-<file path=ppt/slides/slide16.xml><?xml version="1.0" encoding="utf-8"?>
 <p:sld xmlns:a="http://schemas.openxmlformats.org/drawingml/2006/main" xmlns:r="http://schemas.openxmlformats.org/officeDocument/2006/relationships" xmlns:p="http://schemas.openxmlformats.org/presentationml/2006/main">
   <p:cSld>
     <p:spTree>
@@ -4881,23 +6430,54 @@
             </a:pPr>
             <a:r>
               <a:rPr b="1"/>
-              <a:t>Pipeline principles</a:t>
+              <a:t>Pipeline implementation conventions &amp; principles</a:t>
             </a:r>
           </a:p>
           <a:p>
             <a:pPr lvl="0" indent="0" marL="0">
-              <a:buNone/>
-            </a:pPr>
-            <a:r>
-              <a:rPr/>
-              <a:t>Git tags are used to calculate the changes for the next planned release</a:t>
+              <a:spcBef>
+                <a:spcPts val="3000"/>
+              </a:spcBef>
+              <a:buNone/>
+            </a:pPr>
+            <a:r>
+              <a:rPr b="1"/>
+              <a:t>Basic Build pipeline characteristics</a:t>
+            </a:r>
+          </a:p>
+          <a:p>
+            <a:pPr lvl="0"/>
+            <a:r>
+              <a:rPr/>
+              <a:t>(Typically) runs on each commit added to the history of a branch</a:t>
+            </a:r>
+          </a:p>
+          <a:p>
+            <a:pPr lvl="0"/>
+            <a:r>
+              <a:rPr/>
+              <a:t>Can produce a preliminary package that is stored in a binary artifact repository</a:t>
+            </a:r>
+          </a:p>
+          <a:p>
+            <a:pPr lvl="1"/>
+            <a:r>
+              <a:rPr/>
+              <a:t>Can be deployed to test environments, but not production</a:t>
+            </a:r>
+          </a:p>
+          <a:p>
+            <a:pPr lvl="0"/>
+            <a:r>
+              <a:rPr/>
+              <a:t>May include an automated step to deploy it into the DEV-TEST environment</a:t>
             </a:r>
           </a:p>
         </p:txBody>
       </p:sp>
       <p:pic>
         <p:nvPicPr>
-          <p:cNvPr descr="static/img/branching-model/basicBuildPipeline-computeChanges-default-workflow.png" id="0" name="Picture 1"/>
+          <p:cNvPr descr="static/img/branching-model/defaultWorkflow_buildPipelineAfterMerge.png" id="0" name="Picture 1"/>
           <p:cNvPicPr>
             <a:picLocks noGrp="1" noChangeAspect="1"/>
           </p:cNvPicPr>
@@ -4911,8 +6491,8 @@
         </p:blipFill>
         <p:spPr bwMode="auto">
           <a:xfrm>
-            <a:off x="3568700" y="1066800"/>
-            <a:ext cx="5105400" cy="2641600"/>
+            <a:off x="3568700" y="1460500"/>
+            <a:ext cx="5105400" cy="1854200"/>
           </a:xfrm>
           <a:prstGeom prst="rect">
             <a:avLst/>
@@ -4930,7 +6510,7 @@
 </p:sld>
 </file>
 
-<file path=ppt/slides/slide17.xml><?xml version="1.0" encoding="utf-8"?>
+<file path=ppt/slides/slide16.xml><?xml version="1.0" encoding="utf-8"?>
 <p:sld xmlns:a="http://schemas.openxmlformats.org/drawingml/2006/main" xmlns:r="http://schemas.openxmlformats.org/officeDocument/2006/relationships" xmlns:p="http://schemas.openxmlformats.org/presentationml/2006/main">
   <p:cSld>
     <p:spTree>
@@ -4963,15 +6543,6 @@
           <a:lstStyle/>
           <a:p>
             <a:pPr lvl="0" indent="0" marL="0">
-              <a:buNone/>
-            </a:pPr>
-            <a:r>
-              <a:rPr/>
-              <a:t>Packages are always cumulative.</a:t>
-            </a:r>
-          </a:p>
-          <a:p>
-            <a:pPr lvl="0" indent="0" marL="0">
               <a:spcBef>
                 <a:spcPts val="3000"/>
               </a:spcBef>
@@ -4979,61 +6550,7 @@
             </a:pPr>
             <a:r>
               <a:rPr b="1"/>
-              <a:t>Basic Build pipeline</a:t>
-            </a:r>
-          </a:p>
-          <a:p>
-            <a:pPr lvl="0"/>
-            <a:r>
-              <a:rPr/>
-              <a:t>(Typically) runs on each commit added to the history of a branch</a:t>
-            </a:r>
-          </a:p>
-          <a:p>
-            <a:pPr lvl="0"/>
-            <a:r>
-              <a:rPr/>
-              <a:t>Produces a preliminary package that is stored in a binary repository</a:t>
-            </a:r>
-          </a:p>
-          <a:p>
-            <a:pPr lvl="0"/>
-            <a:r>
-              <a:rPr/>
-              <a:t>May include an automated step to deploy it into the DEV-TEST environment</a:t>
-            </a:r>
-          </a:p>
-          <a:p>
-            <a:pPr lvl="0" indent="0" marL="0">
-              <a:spcBef>
-                <a:spcPts val="3000"/>
-              </a:spcBef>
-              <a:buNone/>
-            </a:pPr>
-            <a:r>
-              <a:rPr b="1"/>
               <a:t>Release pipeline</a:t>
-            </a:r>
-          </a:p>
-          <a:p>
-            <a:pPr lvl="0"/>
-            <a:r>
-              <a:rPr/>
-              <a:t>Produces binaries optimized for performance</a:t>
-            </a:r>
-          </a:p>
-          <a:p>
-            <a:pPr lvl="0"/>
-            <a:r>
-              <a:rPr/>
-              <a:t>(Typically) is manually requested by the development team when a level of stability is reached</a:t>
-            </a:r>
-          </a:p>
-          <a:p>
-            <a:pPr lvl="0"/>
-            <a:r>
-              <a:rPr/>
-              <a:t>Produces a release candidate package that can be deployed to higher test environments.</a:t>
             </a:r>
           </a:p>
         </p:txBody>
@@ -5043,7 +6560,7 @@
 </p:sld>
 </file>
 
-<file path=ppt/slides/slide18.xml><?xml version="1.0" encoding="utf-8"?>
+<file path=ppt/slides/slide17.xml><?xml version="1.0" encoding="utf-8"?>
 <p:sld xmlns:a="http://schemas.openxmlformats.org/drawingml/2006/main" xmlns:r="http://schemas.openxmlformats.org/officeDocument/2006/relationships" xmlns:p="http://schemas.openxmlformats.org/presentationml/2006/main">
   <p:cSld>
     <p:spTree>
@@ -5081,6 +6598,34 @@
             <a:r>
               <a:rPr/>
               <a:t>Collateral</a:t>
+            </a:r>
+          </a:p>
+        </p:txBody>
+      </p:sp>
+      <p:sp>
+        <p:nvSpPr>
+          <p:cNvPr id="3" name="Content Placeholder 2"/>
+          <p:cNvSpPr>
+            <a:spLocks noGrp="1"/>
+          </p:cNvSpPr>
+          <p:nvPr>
+            <p:ph idx="1"/>
+          </p:nvPr>
+        </p:nvSpPr>
+        <p:spPr/>
+        <p:txBody>
+          <a:bodyPr/>
+          <a:lstStyle/>
+          <a:p>
+            <a:pPr lvl="0" indent="0" marL="0">
+              <a:spcBef>
+                <a:spcPts val="3000"/>
+              </a:spcBef>
+              <a:buNone/>
+            </a:pPr>
+            <a:r>
+              <a:rPr b="1"/>
+              <a:t>References</a:t>
             </a:r>
           </a:p>
         </p:txBody>
@@ -5447,106 +6992,6 @@
             <a:r>
               <a:rPr/>
               <a:t>We know it is sometimes unavoidable for work to take longer than one release cycle and we accommodate that as a variant of the base workflow.</a:t>
-            </a:r>
-          </a:p>
-          <a:p>
-            <a:pPr lvl="0" indent="0" marL="0">
-              <a:spcBef>
-                <a:spcPts val="3000"/>
-              </a:spcBef>
-              <a:buNone/>
-            </a:pPr>
-            <a:r>
-              <a:rPr b="1"/>
-              <a:t>Convention over configuration</a:t>
-            </a:r>
-          </a:p>
-          <a:p>
-            <a:pPr lvl="0" indent="0" marL="0">
-              <a:buNone/>
-            </a:pPr>
-            <a:r>
-              <a:rPr/>
-              <a:t>The principles are more important that the tools and names.</a:t>
-            </a:r>
-          </a:p>
-          <a:p>
-            <a:pPr lvl="0" indent="0" marL="0">
-              <a:buNone/>
-            </a:pPr>
-            <a:r>
-              <a:rPr/>
-              <a:t>Naming conventions - making purpose obvious:</a:t>
-            </a:r>
-          </a:p>
-          <a:p>
-            <a:pPr lvl="0"/>
-            <a:r>
-              <a:rPr>
-                <a:latin typeface="Courier"/>
-              </a:rPr>
-              <a:t>main</a:t>
-            </a:r>
-            <a:r>
-              <a:rPr/>
-              <a:t>: single source of truth</a:t>
-            </a:r>
-          </a:p>
-          <a:p>
-            <a:pPr lvl="0"/>
-            <a:r>
-              <a:rPr>
-                <a:latin typeface="Courier"/>
-              </a:rPr>
-              <a:t>release/rel-2.0.1</a:t>
-            </a:r>
-            <a:r>
-              <a:rPr/>
-              <a:t>: explicit versioning numbering of releases</a:t>
-            </a:r>
-          </a:p>
-          <a:p>
-            <a:pPr lvl="0"/>
-            <a:r>
-              <a:rPr>
-                <a:latin typeface="Courier"/>
-              </a:rPr>
-              <a:t>feature/&lt;jira-id|servicenow-id&gt;/new-mortage-calculation</a:t>
-            </a:r>
-            <a:r>
-              <a:rPr/>
-              <a:t>: traceable to other processes</a:t>
-            </a:r>
-          </a:p>
-          <a:p>
-            <a:pPr lvl="0"/>
-            <a:r>
-              <a:rPr>
-                <a:latin typeface="Courier"/>
-              </a:rPr>
-              <a:t>epic/ai-fraud-detection</a:t>
-            </a:r>
-            <a:r>
-              <a:rPr/>
-              <a:t>: maybe put Jira or ServiceNow ids in here too</a:t>
-            </a:r>
-          </a:p>
-          <a:p>
-            <a:pPr lvl="0"/>
-            <a:r>
-              <a:rPr>
-                <a:latin typeface="Courier"/>
-              </a:rPr>
-              <a:t>hotfix/rel-2.0.1/fix-mortgage-calc</a:t>
-            </a:r>
-          </a:p>
-          <a:p>
-            <a:pPr lvl="0" indent="0" marL="0">
-              <a:buNone/>
-            </a:pPr>
-            <a:r>
-              <a:rPr/>
-              <a:t>Names of branches and tags flow through to builds and deployments.</a:t>
             </a:r>
           </a:p>
         </p:txBody>
